--- a/slides/01-weather-view.pptx
+++ b/slides/01-weather-view.pptx
@@ -5574,7 +5574,7 @@
         <p:spPr>
           <a:xfrm>
             <a:off x="1290340" y="2467273"/>
-            <a:ext cx="498830" cy="133350"/>
+            <a:ext cx="1220054" cy="133350"/>
           </a:xfrm>
           <a:prstGeom prst="rect">
             <a:avLst/>
@@ -5590,15 +5590,29 @@
               <a:buNone/>
             </a:pPr>
             <a:r>
+              <a:rPr lang="en-US" sz="900" dirty="0">
+                <a:solidFill>
+                  <a:srgbClr val="8250DF"/>
+                </a:solidFill>
+                <a:latin typeface="Arial" pitchFamily="34" charset="0"/>
+                <a:ea typeface="Arial" pitchFamily="34" charset="-122"/>
+                <a:cs typeface="Arial" pitchFamily="34" charset="-120"/>
+              </a:rPr>
+              <a:t>PROMPT</a:t>
+            </a:r>
+            <a:pPr algn="l" indent="0" marL="0">
+              <a:buNone/>
+            </a:pPr>
+            <a:r>
               <a:rPr lang="en-US" sz="900" b="1" dirty="0">
                 <a:solidFill>
-                  <a:srgbClr val="8250DF"/>
-                </a:solidFill>
-                <a:latin typeface="Arial" pitchFamily="34" charset="0"/>
-                <a:ea typeface="Arial" pitchFamily="34" charset="-122"/>
-                <a:cs typeface="Arial" pitchFamily="34" charset="-120"/>
-              </a:rPr>
-              <a:t>PROMPT</a:t>
+                  <a:srgbClr val="818B98"/>
+                </a:solidFill>
+                <a:latin typeface="Arial" pitchFamily="34" charset="0"/>
+                <a:ea typeface="Arial" pitchFamily="34" charset="-122"/>
+                <a:cs typeface="Arial" pitchFamily="34" charset="-120"/>
+              </a:rPr>
+              <a:t> · ABRIDGED</a:t>
             </a:r>
             <a:endParaRPr lang="en-US" sz="900" dirty="0"/>
           </a:p>
@@ -5674,7 +5688,7 @@
                 <a:ea typeface="Arial" pitchFamily="34" charset="-122"/>
                 <a:cs typeface="Arial" pitchFamily="34" charset="-120"/>
               </a:rPr>
-              <a:t> that I'll undo.</a:t>
+              <a:t> that I'll undo. …</a:t>
             </a:r>
             <a:endParaRPr lang="en-US" sz="1500" dirty="0"/>
           </a:p>

--- a/slides/01-weather-view.pptx
+++ b/slides/01-weather-view.pptx
@@ -1155,7 +1155,9 @@
             <a:r>
               <a:rPr lang="en-US" dirty="0"/>
               <a:t>The review agent reads the code with fresh eyes. Ask for file and line evidence so you can check each claim. Then use the follow-up: "Fix the high-confidence correctness, accessibility, security, and reliability findings from that review. Add a test for each fix, then rerun the unit tests, browser tests, and scripts/verify-app.mjs."
-Before this, generate scripts/verify-app.mjs from the README prompt and inspect it before running it: node scripts/verify-app.mjs --base-url http://localhost:&lt;your-port&gt;</a:t>
+Before this, generate scripts/verify-app.mjs from the README prompt and inspect it before running it: node scripts/verify-app.mjs --base-url http://localhost:&lt;your-port&gt;
+Full prompt:
+/review Review the completed WeatherView implementation against PLAN.md. Skip the "Azure Deployment" section; Phase 3 builds it. Focus on correctness, accessibility, resilience, performance, browser security, and test gaps. Identify missing or incorrectly implemented requirements with file and line evidence. Do not suggest a framework rewrite.</a:t>
             </a:r>
             <a:endParaRPr lang="en-US" dirty="0"/>
           </a:p>
@@ -1419,7 +1421,9 @@
           <a:p>
             <a:r>
               <a:rPr lang="en-US" dirty="0"/>
-              <a:t>The Azure Skills plugin gives the agent current Bicep schemas and azd guidance, so it is not guessing at API versions. Confirm the plugin is available first. Full prompt ends with: Log real generation or validation issues to issues.md.</a:t>
+              <a:t>The Azure Skills plugin gives the agent current Bicep schemas and azd guidance, so it is not guessing at API versions. Confirm the plugin is available first.
+Full prompt:
+Read the "Azure Deployment" section in PLAN.md. Use the installed Azure Skills plugin, including current Bicep schema and azd infrastructure guidance, to create everything that section specifies for the WeatherView deployment: the Bicep in infra/, main.parameters.json, azure.yaml, scripts/build-static.mjs with its npm build script, and staticwebapp.config.json. Follow the section's "Bicep Requirements," "azure.yaml," and "Static Web Apps Configuration" contracts exactly, and do not create anything the section prohibits. Log real generation or validation issues to issues.md.</a:t>
             </a:r>
             <a:endParaRPr lang="en-US" dirty="0"/>
           </a:p>
@@ -1595,7 +1599,7 @@
           <a:p>
             <a:r>
               <a:rPr lang="en-US" dirty="0"/>
-              <a:t>This is one of the most useful habits in agentic deployment. Before creating anything, ask for a read-only review that returns READY or NOT READY, a PASS or FAIL table with file and line evidence, and the smallest fix for each blocker. The README has the full prompt. Do not deploy while any required check is unresolved.</a:t>
+              <a:t>This is one of the most useful habits in agentic deployment. Before creating anything, ask for a read-only review that returns READY or NOT READY, a PASS or FAIL table with file and line evidence for every requirement, and the smallest fix for each blocker. It also runs azd provision --preview, which shows what would be created without creating it. The README has the full prompt. Do not deploy while any required check is unresolved.</a:t>
             </a:r>
             <a:endParaRPr lang="en-US" dirty="0"/>
           </a:p>
@@ -2954,12 +2958,12 @@
         </p:nvSpPr>
         <p:spPr>
           <a:xfrm>
-            <a:off x="7446466" y="152400"/>
-            <a:ext cx="1113383" cy="266700"/>
+            <a:off x="7325916" y="152400"/>
+            <a:ext cx="1233934" cy="279350"/>
           </a:xfrm>
           <a:prstGeom prst="roundRect">
             <a:avLst>
-              <a:gd name="adj" fmla="val 23810"/>
+              <a:gd name="adj" fmla="val 22731"/>
             </a:avLst>
           </a:prstGeom>
           <a:solidFill>
@@ -2986,8 +2990,8 @@
         </p:nvSpPr>
         <p:spPr>
           <a:xfrm>
-            <a:off x="7564822" y="219075"/>
-            <a:ext cx="876672" cy="133350"/>
+            <a:off x="7455969" y="220563"/>
+            <a:ext cx="973827" cy="142875"/>
           </a:xfrm>
           <a:prstGeom prst="rect">
             <a:avLst/>
@@ -3003,7 +3007,7 @@
               <a:buNone/>
             </a:pPr>
             <a:r>
-              <a:rPr lang="en-US" sz="900" b="1" dirty="0">
+              <a:rPr lang="en-US" sz="1000" b="1" dirty="0">
                 <a:solidFill>
                   <a:srgbClr val="FFFFFF"/>
                 </a:solidFill>
@@ -3013,7 +3017,7 @@
               </a:rPr>
               <a:t>WEATHERVIEW</a:t>
             </a:r>
-            <a:endParaRPr lang="en-US" sz="900" dirty="0"/>
+            <a:endParaRPr lang="en-US" sz="1000" dirty="0"/>
           </a:p>
         </p:txBody>
       </p:sp>
@@ -3082,7 +3086,7 @@
         <p:spPr>
           <a:xfrm>
             <a:off x="482501" y="1053852"/>
-            <a:ext cx="7772400" cy="152400"/>
+            <a:ext cx="7772400" cy="171450"/>
           </a:xfrm>
           <a:prstGeom prst="rect">
             <a:avLst/>
@@ -3101,7 +3105,7 @@
               <a:buNone/>
             </a:pPr>
             <a:r>
-              <a:rPr lang="en-US" sz="1100" b="1" dirty="0">
+              <a:rPr lang="en-US" sz="1200" b="1" dirty="0">
                 <a:solidFill>
                   <a:srgbClr val="1A7F37"/>
                 </a:solidFill>
@@ -3111,7 +3115,7 @@
               </a:rPr>
               <a:t>AGENTIC JOURNEY · GITHUB AND AZURE</a:t>
             </a:r>
-            <a:endParaRPr lang="en-US" sz="1100" dirty="0"/>
+            <a:endParaRPr lang="en-US" sz="1200" dirty="0"/>
           </a:p>
         </p:txBody>
       </p:sp>
@@ -3123,7 +3127,7 @@
         </p:nvSpPr>
         <p:spPr>
           <a:xfrm>
-            <a:off x="482501" y="1282452"/>
+            <a:off x="482501" y="1301502"/>
             <a:ext cx="7772400" cy="584150"/>
           </a:xfrm>
           <a:prstGeom prst="rect">
@@ -3165,8 +3169,8 @@
         </p:nvSpPr>
         <p:spPr>
           <a:xfrm>
-            <a:off x="482501" y="2019002"/>
-            <a:ext cx="7772400" cy="558701"/>
+            <a:off x="482501" y="2038052"/>
+            <a:ext cx="7772400" cy="584299"/>
           </a:xfrm>
           <a:prstGeom prst="rect">
             <a:avLst/>
@@ -3180,7 +3184,7 @@
           <a:p>
             <a:pPr algn="l" indent="0" marL="0">
               <a:lnSpc>
-                <a:spcPts val="2200"/>
+                <a:spcPts val="2300"/>
               </a:lnSpc>
               <a:spcBef>
                 <a:spcPts val="1200"/>
@@ -3188,7 +3192,7 @@
               <a:buNone/>
             </a:pPr>
             <a:r>
-              <a:rPr lang="en-US" sz="1600" dirty="0">
+              <a:rPr lang="en-US" sz="1700" dirty="0">
                 <a:solidFill>
                   <a:srgbClr val="59636E"/>
                 </a:solidFill>
@@ -3198,7 +3202,7 @@
               </a:rPr>
               <a:t>What if a one-page product plan could become a polished, accessible weather app running on Azure, with no backend at all?</a:t>
             </a:r>
-            <a:endParaRPr lang="en-US" sz="1600" dirty="0"/>
+            <a:endParaRPr lang="en-US" sz="1700" dirty="0"/>
           </a:p>
         </p:txBody>
       </p:sp>
@@ -3210,12 +3214,12 @@
         </p:nvSpPr>
         <p:spPr>
           <a:xfrm>
-            <a:off x="482501" y="3022550"/>
-            <a:ext cx="355550" cy="355550"/>
+            <a:off x="482501" y="2946350"/>
+            <a:ext cx="431750" cy="431750"/>
           </a:xfrm>
           <a:prstGeom prst="roundRect">
             <a:avLst>
-              <a:gd name="adj" fmla="val 21432"/>
+              <a:gd name="adj" fmla="val 17649"/>
             </a:avLst>
           </a:prstGeom>
           <a:solidFill>
@@ -3250,8 +3254,8 @@
         </p:blipFill>
         <p:spPr>
           <a:xfrm>
-            <a:off x="558701" y="3098750"/>
-            <a:ext cx="203150" cy="203150"/>
+            <a:off x="577751" y="3041600"/>
+            <a:ext cx="241250" cy="241250"/>
           </a:xfrm>
           <a:prstGeom prst="rect">
             <a:avLst/>
@@ -3266,8 +3270,8 @@
         </p:nvSpPr>
         <p:spPr>
           <a:xfrm>
-            <a:off x="952351" y="3051125"/>
-            <a:ext cx="812155" cy="114300"/>
+            <a:off x="1028551" y="2973288"/>
+            <a:ext cx="947109" cy="142875"/>
           </a:xfrm>
           <a:prstGeom prst="rect">
             <a:avLst/>
@@ -3283,7 +3287,7 @@
               <a:buNone/>
             </a:pPr>
             <a:r>
-              <a:rPr lang="en-US" sz="850" b="1" dirty="0">
+              <a:rPr lang="en-US" sz="1000" b="1" dirty="0">
                 <a:solidFill>
                   <a:srgbClr val="59636E"/>
                 </a:solidFill>
@@ -3293,7 +3297,7 @@
               </a:rPr>
               <a:t>SESSION</a:t>
             </a:r>
-            <a:endParaRPr lang="en-US" sz="850" dirty="0"/>
+            <a:endParaRPr lang="en-US" sz="1000" dirty="0"/>
           </a:p>
         </p:txBody>
       </p:sp>
@@ -3305,8 +3309,8 @@
         </p:nvSpPr>
         <p:spPr>
           <a:xfrm>
-            <a:off x="952351" y="3178076"/>
-            <a:ext cx="812155" cy="171450"/>
+            <a:off x="1028551" y="3141464"/>
+            <a:ext cx="947109" cy="209550"/>
           </a:xfrm>
           <a:prstGeom prst="rect">
             <a:avLst/>
@@ -3322,7 +3326,7 @@
               <a:buNone/>
             </a:pPr>
             <a:r>
-              <a:rPr lang="en-US" sz="1200" b="1" dirty="0">
+              <a:rPr lang="en-US" sz="1400" b="1" dirty="0">
                 <a:solidFill>
                   <a:srgbClr val="1F2328"/>
                 </a:solidFill>
@@ -3332,7 +3336,7 @@
               </a:rPr>
               <a:t>60 minutes</a:t>
             </a:r>
-            <a:endParaRPr lang="en-US" sz="1200" dirty="0"/>
+            <a:endParaRPr lang="en-US" sz="1400" dirty="0"/>
           </a:p>
         </p:txBody>
       </p:sp>
@@ -3344,12 +3348,12 @@
         </p:nvSpPr>
         <p:spPr>
           <a:xfrm>
-            <a:off x="2129582" y="3022550"/>
-            <a:ext cx="355550" cy="355550"/>
+            <a:off x="2312640" y="2946350"/>
+            <a:ext cx="431750" cy="431750"/>
           </a:xfrm>
           <a:prstGeom prst="roundRect">
             <a:avLst>
-              <a:gd name="adj" fmla="val 21432"/>
+              <a:gd name="adj" fmla="val 17649"/>
             </a:avLst>
           </a:prstGeom>
           <a:solidFill>
@@ -3384,8 +3388,8 @@
         </p:blipFill>
         <p:spPr>
           <a:xfrm>
-            <a:off x="2205782" y="3098750"/>
-            <a:ext cx="203150" cy="203150"/>
+            <a:off x="2407890" y="3041600"/>
+            <a:ext cx="241250" cy="241250"/>
           </a:xfrm>
           <a:prstGeom prst="rect">
             <a:avLst/>
@@ -3400,8 +3404,8 @@
         </p:nvSpPr>
         <p:spPr>
           <a:xfrm>
-            <a:off x="2599432" y="3051125"/>
-            <a:ext cx="1339069" cy="114300"/>
+            <a:off x="2858691" y="2973288"/>
+            <a:ext cx="1561615" cy="142875"/>
           </a:xfrm>
           <a:prstGeom prst="rect">
             <a:avLst/>
@@ -3417,7 +3421,7 @@
               <a:buNone/>
             </a:pPr>
             <a:r>
-              <a:rPr lang="en-US" sz="850" b="1" dirty="0">
+              <a:rPr lang="en-US" sz="1000" b="1" dirty="0">
                 <a:solidFill>
                   <a:srgbClr val="59636E"/>
                 </a:solidFill>
@@ -3427,7 +3431,7 @@
               </a:rPr>
               <a:t>COST IF LEFT RUNNING</a:t>
             </a:r>
-            <a:endParaRPr lang="en-US" sz="850" dirty="0"/>
+            <a:endParaRPr lang="en-US" sz="1000" dirty="0"/>
           </a:p>
         </p:txBody>
       </p:sp>
@@ -3439,8 +3443,8 @@
         </p:nvSpPr>
         <p:spPr>
           <a:xfrm>
-            <a:off x="2599432" y="3178076"/>
-            <a:ext cx="1339069" cy="171450"/>
+            <a:off x="2858691" y="3141464"/>
+            <a:ext cx="1561615" cy="209550"/>
           </a:xfrm>
           <a:prstGeom prst="rect">
             <a:avLst/>
@@ -3456,7 +3460,7 @@
               <a:buNone/>
             </a:pPr>
             <a:r>
-              <a:rPr lang="en-US" sz="1200" b="1" dirty="0">
+              <a:rPr lang="en-US" sz="1400" b="1" dirty="0">
                 <a:solidFill>
                   <a:srgbClr val="1F2328"/>
                 </a:solidFill>
@@ -3466,7 +3470,7 @@
               </a:rPr>
               <a:t>$0 on the Free tier</a:t>
             </a:r>
-            <a:endParaRPr lang="en-US" sz="1200" dirty="0"/>
+            <a:endParaRPr lang="en-US" sz="1400" dirty="0"/>
           </a:p>
         </p:txBody>
       </p:sp>
@@ -3478,12 +3482,12 @@
         </p:nvSpPr>
         <p:spPr>
           <a:xfrm>
-            <a:off x="4293245" y="3022550"/>
-            <a:ext cx="355550" cy="355550"/>
+            <a:off x="4745236" y="2946350"/>
+            <a:ext cx="431750" cy="431750"/>
           </a:xfrm>
           <a:prstGeom prst="roundRect">
             <a:avLst>
-              <a:gd name="adj" fmla="val 21432"/>
+              <a:gd name="adj" fmla="val 17649"/>
             </a:avLst>
           </a:prstGeom>
           <a:solidFill>
@@ -3518,8 +3522,8 @@
         </p:blipFill>
         <p:spPr>
           <a:xfrm>
-            <a:off x="4369445" y="3098750"/>
-            <a:ext cx="203150" cy="203150"/>
+            <a:off x="4840486" y="3041600"/>
+            <a:ext cx="241250" cy="241250"/>
           </a:xfrm>
           <a:prstGeom prst="rect">
             <a:avLst/>
@@ -3534,8 +3538,8 @@
         </p:nvSpPr>
         <p:spPr>
           <a:xfrm>
-            <a:off x="4763095" y="3051125"/>
-            <a:ext cx="1692926" cy="114300"/>
+            <a:off x="5291286" y="2973288"/>
+            <a:ext cx="1974524" cy="142875"/>
           </a:xfrm>
           <a:prstGeom prst="rect">
             <a:avLst/>
@@ -3551,7 +3555,7 @@
               <a:buNone/>
             </a:pPr>
             <a:r>
-              <a:rPr lang="en-US" sz="850" b="1" dirty="0">
+              <a:rPr lang="en-US" sz="1000" b="1" dirty="0">
                 <a:solidFill>
                   <a:srgbClr val="59636E"/>
                 </a:solidFill>
@@ -3561,7 +3565,7 @@
               </a:rPr>
               <a:t>RUNS ON</a:t>
             </a:r>
-            <a:endParaRPr lang="en-US" sz="850" dirty="0"/>
+            <a:endParaRPr lang="en-US" sz="1000" dirty="0"/>
           </a:p>
         </p:txBody>
       </p:sp>
@@ -3573,8 +3577,8 @@
         </p:nvSpPr>
         <p:spPr>
           <a:xfrm>
-            <a:off x="4763095" y="3178076"/>
-            <a:ext cx="1692926" cy="171450"/>
+            <a:off x="5291286" y="3141464"/>
+            <a:ext cx="1974524" cy="209550"/>
           </a:xfrm>
           <a:prstGeom prst="rect">
             <a:avLst/>
@@ -3590,7 +3594,7 @@
               <a:buNone/>
             </a:pPr>
             <a:r>
-              <a:rPr lang="en-US" sz="1200" b="1" dirty="0">
+              <a:rPr lang="en-US" sz="1400" b="1" dirty="0">
                 <a:solidFill>
                   <a:srgbClr val="1F2328"/>
                 </a:solidFill>
@@ -3600,7 +3604,7 @@
               </a:rPr>
               <a:t>Azure Static Web Apps</a:t>
             </a:r>
-            <a:endParaRPr lang="en-US" sz="1200" dirty="0"/>
+            <a:endParaRPr lang="en-US" sz="1400" dirty="0"/>
           </a:p>
         </p:txBody>
       </p:sp>
@@ -3612,8 +3616,8 @@
         </p:nvSpPr>
         <p:spPr>
           <a:xfrm>
-            <a:off x="482501" y="3759101"/>
-            <a:ext cx="8342275" cy="133350"/>
+            <a:off x="482501" y="3708350"/>
+            <a:ext cx="8342275" cy="142875"/>
           </a:xfrm>
           <a:prstGeom prst="rect">
             <a:avLst/>
@@ -3629,7 +3633,7 @@
               <a:buNone/>
             </a:pPr>
             <a:r>
-              <a:rPr lang="en-US" sz="900" b="1" dirty="0">
+              <a:rPr lang="en-US" sz="1000" b="1" dirty="0">
                 <a:solidFill>
                   <a:srgbClr val="59636E"/>
                 </a:solidFill>
@@ -3639,7 +3643,7 @@
               </a:rPr>
               <a:t>IN THIS SESSION</a:t>
             </a:r>
-            <a:endParaRPr lang="en-US" sz="900" dirty="0"/>
+            <a:endParaRPr lang="en-US" sz="1000" dirty="0"/>
           </a:p>
         </p:txBody>
       </p:sp>
@@ -3651,12 +3655,12 @@
         </p:nvSpPr>
         <p:spPr>
           <a:xfrm>
-            <a:off x="482501" y="3981301"/>
-            <a:ext cx="1356568" cy="336352"/>
+            <a:off x="482501" y="3952726"/>
+            <a:ext cx="1524744" cy="361652"/>
           </a:xfrm>
           <a:prstGeom prst="roundRect">
             <a:avLst>
-              <a:gd name="adj" fmla="val 52861"/>
+              <a:gd name="adj" fmla="val 52675"/>
             </a:avLst>
           </a:prstGeom>
           <a:solidFill>
@@ -3687,12 +3691,12 @@
         </p:nvSpPr>
         <p:spPr>
           <a:xfrm>
-            <a:off x="568226" y="4054227"/>
-            <a:ext cx="190500" cy="190500"/>
+            <a:off x="568226" y="4025652"/>
+            <a:ext cx="215801" cy="215801"/>
           </a:xfrm>
           <a:prstGeom prst="roundRect">
             <a:avLst>
-              <a:gd name="adj" fmla="val 480000"/>
+              <a:gd name="adj" fmla="val 423724"/>
             </a:avLst>
           </a:prstGeom>
           <a:solidFill>
@@ -3719,8 +3723,8 @@
         </p:nvSpPr>
         <p:spPr>
           <a:xfrm>
-            <a:off x="634633" y="4092327"/>
-            <a:ext cx="57686" cy="114300"/>
+            <a:off x="643640" y="4066877"/>
+            <a:ext cx="64972" cy="133350"/>
           </a:xfrm>
           <a:prstGeom prst="rect">
             <a:avLst/>
@@ -3736,7 +3740,7 @@
               <a:buNone/>
             </a:pPr>
             <a:r>
-              <a:rPr lang="en-US" sz="800" b="1" dirty="0">
+              <a:rPr lang="en-US" sz="900" b="1" dirty="0">
                 <a:solidFill>
                   <a:srgbClr val="FFFFFF"/>
                 </a:solidFill>
@@ -3746,7 +3750,7 @@
               </a:rPr>
               <a:t>1</a:t>
             </a:r>
-            <a:endParaRPr lang="en-US" sz="800" dirty="0"/>
+            <a:endParaRPr lang="en-US" sz="900" dirty="0"/>
           </a:p>
         </p:txBody>
       </p:sp>
@@ -3758,8 +3762,8 @@
         </p:nvSpPr>
         <p:spPr>
           <a:xfrm>
-            <a:off x="834926" y="4078039"/>
-            <a:ext cx="885021" cy="142875"/>
+            <a:off x="860227" y="4047827"/>
+            <a:ext cx="1017850" cy="171450"/>
           </a:xfrm>
           <a:prstGeom prst="rect">
             <a:avLst/>
@@ -3775,7 +3779,7 @@
               <a:buNone/>
             </a:pPr>
             <a:r>
-              <a:rPr lang="en-US" sz="1000" b="1" dirty="0">
+              <a:rPr lang="en-US" sz="1150" b="1" dirty="0">
                 <a:solidFill>
                   <a:srgbClr val="0969DA"/>
                 </a:solidFill>
@@ -3785,7 +3789,7 @@
               </a:rPr>
               <a:t>Plan and build</a:t>
             </a:r>
-            <a:endParaRPr lang="en-US" sz="1000" dirty="0"/>
+            <a:endParaRPr lang="en-US" sz="1150" dirty="0"/>
           </a:p>
         </p:txBody>
       </p:sp>
@@ -3797,12 +3801,12 @@
         </p:nvSpPr>
         <p:spPr>
           <a:xfrm>
-            <a:off x="1940570" y="3981301"/>
-            <a:ext cx="1375767" cy="336352"/>
+            <a:off x="2108746" y="3952726"/>
+            <a:ext cx="1546771" cy="361652"/>
           </a:xfrm>
           <a:prstGeom prst="roundRect">
             <a:avLst>
-              <a:gd name="adj" fmla="val 52861"/>
+              <a:gd name="adj" fmla="val 52675"/>
             </a:avLst>
           </a:prstGeom>
           <a:solidFill>
@@ -3833,12 +3837,12 @@
         </p:nvSpPr>
         <p:spPr>
           <a:xfrm>
-            <a:off x="2026295" y="4054227"/>
-            <a:ext cx="190500" cy="190500"/>
+            <a:off x="2194471" y="4025652"/>
+            <a:ext cx="215801" cy="215801"/>
           </a:xfrm>
           <a:prstGeom prst="roundRect">
             <a:avLst>
-              <a:gd name="adj" fmla="val 480000"/>
+              <a:gd name="adj" fmla="val 423724"/>
             </a:avLst>
           </a:prstGeom>
           <a:solidFill>
@@ -3865,8 +3869,8 @@
         </p:nvSpPr>
         <p:spPr>
           <a:xfrm>
-            <a:off x="2092702" y="4092327"/>
-            <a:ext cx="57686" cy="114300"/>
+            <a:off x="2269885" y="4066877"/>
+            <a:ext cx="64972" cy="133350"/>
           </a:xfrm>
           <a:prstGeom prst="rect">
             <a:avLst/>
@@ -3882,7 +3886,7 @@
               <a:buNone/>
             </a:pPr>
             <a:r>
-              <a:rPr lang="en-US" sz="800" b="1" dirty="0">
+              <a:rPr lang="en-US" sz="900" b="1" dirty="0">
                 <a:solidFill>
                   <a:srgbClr val="FFFFFF"/>
                 </a:solidFill>
@@ -3892,7 +3896,7 @@
               </a:rPr>
               <a:t>2</a:t>
             </a:r>
-            <a:endParaRPr lang="en-US" sz="800" dirty="0"/>
+            <a:endParaRPr lang="en-US" sz="900" dirty="0"/>
           </a:p>
         </p:txBody>
       </p:sp>
@@ -3904,8 +3908,8 @@
         </p:nvSpPr>
         <p:spPr>
           <a:xfrm>
-            <a:off x="2292995" y="4078039"/>
-            <a:ext cx="904604" cy="142875"/>
+            <a:off x="2486471" y="4047827"/>
+            <a:ext cx="1040318" cy="171450"/>
           </a:xfrm>
           <a:prstGeom prst="rect">
             <a:avLst/>
@@ -3921,7 +3925,7 @@
               <a:buNone/>
             </a:pPr>
             <a:r>
-              <a:rPr lang="en-US" sz="1000" b="1" dirty="0">
+              <a:rPr lang="en-US" sz="1150" b="1" dirty="0">
                 <a:solidFill>
                   <a:srgbClr val="8250DF"/>
                 </a:solidFill>
@@ -3931,7 +3935,7 @@
               </a:rPr>
               <a:t>Test and verify</a:t>
             </a:r>
-            <a:endParaRPr lang="en-US" sz="1000" dirty="0"/>
+            <a:endParaRPr lang="en-US" sz="1150" dirty="0"/>
           </a:p>
         </p:txBody>
       </p:sp>
@@ -3943,12 +3947,12 @@
         </p:nvSpPr>
         <p:spPr>
           <a:xfrm>
-            <a:off x="3417838" y="3981301"/>
-            <a:ext cx="1450777" cy="336352"/>
+            <a:off x="3757017" y="3952726"/>
+            <a:ext cx="1632942" cy="361652"/>
           </a:xfrm>
           <a:prstGeom prst="roundRect">
             <a:avLst>
-              <a:gd name="adj" fmla="val 52861"/>
+              <a:gd name="adj" fmla="val 52675"/>
             </a:avLst>
           </a:prstGeom>
           <a:solidFill>
@@ -3979,12 +3983,12 @@
         </p:nvSpPr>
         <p:spPr>
           <a:xfrm>
-            <a:off x="3503563" y="4054227"/>
-            <a:ext cx="190500" cy="190500"/>
+            <a:off x="3842742" y="4025652"/>
+            <a:ext cx="215801" cy="215801"/>
           </a:xfrm>
           <a:prstGeom prst="roundRect">
             <a:avLst>
-              <a:gd name="adj" fmla="val 480000"/>
+              <a:gd name="adj" fmla="val 423724"/>
             </a:avLst>
           </a:prstGeom>
           <a:solidFill>
@@ -4011,8 +4015,8 @@
         </p:nvSpPr>
         <p:spPr>
           <a:xfrm>
-            <a:off x="3569970" y="4092327"/>
-            <a:ext cx="57686" cy="114300"/>
+            <a:off x="3918156" y="4066877"/>
+            <a:ext cx="64972" cy="133350"/>
           </a:xfrm>
           <a:prstGeom prst="rect">
             <a:avLst/>
@@ -4028,7 +4032,7 @@
               <a:buNone/>
             </a:pPr>
             <a:r>
-              <a:rPr lang="en-US" sz="800" b="1" dirty="0">
+              <a:rPr lang="en-US" sz="900" b="1" dirty="0">
                 <a:solidFill>
                   <a:srgbClr val="FFFFFF"/>
                 </a:solidFill>
@@ -4038,7 +4042,7 @@
               </a:rPr>
               <a:t>3</a:t>
             </a:r>
-            <a:endParaRPr lang="en-US" sz="800" dirty="0"/>
+            <a:endParaRPr lang="en-US" sz="900" dirty="0"/>
           </a:p>
         </p:txBody>
       </p:sp>
@@ -4050,8 +4054,8 @@
         </p:nvSpPr>
         <p:spPr>
           <a:xfrm>
-            <a:off x="3770263" y="4078039"/>
-            <a:ext cx="981114" cy="142875"/>
+            <a:off x="4134743" y="4047827"/>
+            <a:ext cx="1128212" cy="171450"/>
           </a:xfrm>
           <a:prstGeom prst="rect">
             <a:avLst/>
@@ -4067,7 +4071,7 @@
               <a:buNone/>
             </a:pPr>
             <a:r>
-              <a:rPr lang="en-US" sz="1000" b="1" dirty="0">
+              <a:rPr lang="en-US" sz="1150" b="1" dirty="0">
                 <a:solidFill>
                   <a:srgbClr val="1A7F37"/>
                 </a:solidFill>
@@ -4077,7 +4081,7 @@
               </a:rPr>
               <a:t>Deploy to Azure</a:t>
             </a:r>
-            <a:endParaRPr lang="en-US" sz="1000" dirty="0"/>
+            <a:endParaRPr lang="en-US" sz="1150" dirty="0"/>
           </a:p>
         </p:txBody>
       </p:sp>
@@ -4089,8 +4093,8 @@
         </p:nvSpPr>
         <p:spPr>
           <a:xfrm>
-            <a:off x="482501" y="4724400"/>
-            <a:ext cx="2396237" cy="142875"/>
+            <a:off x="482501" y="4673501"/>
+            <a:ext cx="2635329" cy="152400"/>
           </a:xfrm>
           <a:prstGeom prst="rect">
             <a:avLst/>
@@ -4106,7 +4110,7 @@
               <a:buNone/>
             </a:pPr>
             <a:r>
-              <a:rPr lang="en-US" sz="1000" b="1" dirty="0">
+              <a:rPr lang="en-US" sz="1100" b="1" dirty="0">
                 <a:solidFill>
                   <a:srgbClr val="0969DA"/>
                 </a:solidFill>
@@ -4116,7 +4120,7 @@
               </a:rPr>
               <a:t>github.com/microsoft/agentic-journeys</a:t>
             </a:r>
-            <a:endParaRPr lang="en-US" sz="1000" dirty="0"/>
+            <a:endParaRPr lang="en-US" sz="1100" dirty="0"/>
           </a:p>
         </p:txBody>
       </p:sp>
@@ -4160,12 +4164,12 @@
         </p:nvSpPr>
         <p:spPr>
           <a:xfrm>
-            <a:off x="7446466" y="152400"/>
-            <a:ext cx="1113383" cy="266700"/>
+            <a:off x="7325916" y="152400"/>
+            <a:ext cx="1233934" cy="279350"/>
           </a:xfrm>
           <a:prstGeom prst="roundRect">
             <a:avLst>
-              <a:gd name="adj" fmla="val 23810"/>
+              <a:gd name="adj" fmla="val 22731"/>
             </a:avLst>
           </a:prstGeom>
           <a:solidFill>
@@ -4192,8 +4196,8 @@
         </p:nvSpPr>
         <p:spPr>
           <a:xfrm>
-            <a:off x="7564822" y="219075"/>
-            <a:ext cx="876672" cy="133350"/>
+            <a:off x="7455969" y="220563"/>
+            <a:ext cx="973827" cy="142875"/>
           </a:xfrm>
           <a:prstGeom prst="rect">
             <a:avLst/>
@@ -4209,7 +4213,7 @@
               <a:buNone/>
             </a:pPr>
             <a:r>
-              <a:rPr lang="en-US" sz="900" b="1" dirty="0">
+              <a:rPr lang="en-US" sz="1000" b="1" dirty="0">
                 <a:solidFill>
                   <a:srgbClr val="FFFFFF"/>
                 </a:solidFill>
@@ -4219,7 +4223,7 @@
               </a:rPr>
               <a:t>WEATHERVIEW</a:t>
             </a:r>
-            <a:endParaRPr lang="en-US" sz="900" dirty="0"/>
+            <a:endParaRPr lang="en-US" sz="1000" dirty="0"/>
           </a:p>
         </p:txBody>
       </p:sp>
@@ -4256,7 +4260,7 @@
         <p:spPr>
           <a:xfrm>
             <a:off x="482501" y="330101"/>
-            <a:ext cx="7772400" cy="142875"/>
+            <a:ext cx="8342275" cy="152400"/>
           </a:xfrm>
           <a:prstGeom prst="rect">
             <a:avLst/>
@@ -4272,7 +4276,7 @@
               <a:buNone/>
             </a:pPr>
             <a:r>
-              <a:rPr lang="en-US" sz="1000" b="1" dirty="0">
+              <a:rPr lang="en-US" sz="1100" b="1" dirty="0">
                 <a:solidFill>
                   <a:srgbClr val="0969DA"/>
                 </a:solidFill>
@@ -4282,7 +4286,7 @@
               </a:rPr>
               <a:t>ADD LIVE WEATHER</a:t>
             </a:r>
-            <a:endParaRPr lang="en-US" sz="1000" dirty="0"/>
+            <a:endParaRPr lang="en-US" sz="1100" dirty="0"/>
           </a:p>
         </p:txBody>
       </p:sp>
@@ -4294,8 +4298,8 @@
         </p:nvSpPr>
         <p:spPr>
           <a:xfrm>
-            <a:off x="482501" y="523726"/>
-            <a:ext cx="7772400" cy="393650"/>
+            <a:off x="482501" y="533251"/>
+            <a:ext cx="8342275" cy="419100"/>
           </a:xfrm>
           <a:prstGeom prst="rect">
             <a:avLst/>
@@ -4309,7 +4313,7 @@
           <a:p>
             <a:pPr algn="l" indent="0" marL="0">
               <a:lnSpc>
-                <a:spcPts val="3100"/>
+                <a:spcPts val="3300"/>
               </a:lnSpc>
               <a:spcBef>
                 <a:spcPts val="400"/>
@@ -4317,7 +4321,7 @@
               <a:buNone/>
             </a:pPr>
             <a:r>
-              <a:rPr lang="en-US" sz="2600" b="1" dirty="0">
+              <a:rPr lang="en-US" sz="2800" b="1" dirty="0">
                 <a:solidFill>
                   <a:srgbClr val="1F2328"/>
                 </a:solidFill>
@@ -4327,7 +4331,7 @@
               </a:rPr>
               <a:t>Now make it real</a:t>
             </a:r>
-            <a:endParaRPr lang="en-US" sz="2600" dirty="0"/>
+            <a:endParaRPr lang="en-US" sz="2800" dirty="0"/>
           </a:p>
         </p:txBody>
       </p:sp>
@@ -4339,12 +4343,12 @@
         </p:nvSpPr>
         <p:spPr>
           <a:xfrm>
-            <a:off x="634901" y="1697534"/>
-            <a:ext cx="7873901" cy="2675483"/>
+            <a:off x="634901" y="1664940"/>
+            <a:ext cx="7873901" cy="2791271"/>
           </a:xfrm>
           <a:prstGeom prst="roundRect">
             <a:avLst>
-              <a:gd name="adj" fmla="val 3797"/>
+              <a:gd name="adj" fmla="val 3640"/>
             </a:avLst>
           </a:prstGeom>
           <a:solidFill>
@@ -4378,7 +4382,7 @@
         </p:nvSpPr>
         <p:spPr>
           <a:xfrm>
-            <a:off x="634901" y="1702296"/>
+            <a:off x="634901" y="1669703"/>
             <a:ext cx="7873901" cy="0"/>
           </a:xfrm>
           <a:prstGeom prst="line">
@@ -4401,8 +4405,8 @@
         </p:nvSpPr>
         <p:spPr>
           <a:xfrm>
-            <a:off x="8504039" y="1697534"/>
-            <a:ext cx="0" cy="2675483"/>
+            <a:off x="8504039" y="1664940"/>
+            <a:ext cx="0" cy="2791271"/>
           </a:xfrm>
           <a:prstGeom prst="line">
             <a:avLst/>
@@ -4424,7 +4428,7 @@
         </p:nvSpPr>
         <p:spPr>
           <a:xfrm>
-            <a:off x="634901" y="4368254"/>
+            <a:off x="634901" y="4451449"/>
             <a:ext cx="7873901" cy="0"/>
           </a:xfrm>
           <a:prstGeom prst="line">
@@ -4447,8 +4451,8 @@
         </p:nvSpPr>
         <p:spPr>
           <a:xfrm>
-            <a:off x="663476" y="1697534"/>
-            <a:ext cx="0" cy="2675483"/>
+            <a:off x="663476" y="1664940"/>
+            <a:ext cx="0" cy="2791271"/>
           </a:xfrm>
           <a:prstGeom prst="line">
             <a:avLst/>
@@ -4478,8 +4482,8 @@
         </p:blipFill>
         <p:spPr>
           <a:xfrm>
-            <a:off x="945952" y="1910209"/>
-            <a:ext cx="165050" cy="165050"/>
+            <a:off x="971401" y="1903065"/>
+            <a:ext cx="190500" cy="190500"/>
           </a:xfrm>
           <a:prstGeom prst="rect">
             <a:avLst/>
@@ -4494,8 +4498,8 @@
         </p:nvSpPr>
         <p:spPr>
           <a:xfrm>
-            <a:off x="1187202" y="1925985"/>
-            <a:ext cx="1220054" cy="133350"/>
+            <a:off x="1238101" y="1922115"/>
+            <a:ext cx="1423169" cy="152400"/>
           </a:xfrm>
           <a:prstGeom prst="rect">
             <a:avLst/>
@@ -4511,7 +4515,7 @@
               <a:buNone/>
             </a:pPr>
             <a:r>
-              <a:rPr lang="en-US" sz="900" dirty="0">
+              <a:rPr lang="en-US" sz="1050" dirty="0">
                 <a:solidFill>
                   <a:srgbClr val="8250DF"/>
                 </a:solidFill>
@@ -4525,7 +4529,7 @@
               <a:buNone/>
             </a:pPr>
             <a:r>
-              <a:rPr lang="en-US" sz="900" b="1" dirty="0">
+              <a:rPr lang="en-US" sz="1050" b="1" dirty="0">
                 <a:solidFill>
                   <a:srgbClr val="818B98"/>
                 </a:solidFill>
@@ -4535,7 +4539,7 @@
               </a:rPr>
               <a:t> · ABRIDGED</a:t>
             </a:r>
-            <a:endParaRPr lang="en-US" sz="900" dirty="0"/>
+            <a:endParaRPr lang="en-US" sz="1050" dirty="0"/>
           </a:p>
         </p:txBody>
       </p:sp>
@@ -4547,8 +4551,8 @@
         </p:nvSpPr>
         <p:spPr>
           <a:xfrm>
-            <a:off x="945952" y="2176760"/>
-            <a:ext cx="7445413" cy="486966"/>
+            <a:off x="971401" y="2207716"/>
+            <a:ext cx="7393496" cy="577155"/>
           </a:xfrm>
           <a:prstGeom prst="rect">
             <a:avLst/>
@@ -4562,12 +4566,12 @@
           <a:p>
             <a:pPr algn="l" indent="0" marL="0">
               <a:lnSpc>
-                <a:spcPts val="1917"/>
+                <a:spcPts val="2272"/>
               </a:lnSpc>
               <a:buNone/>
             </a:pPr>
             <a:r>
-              <a:rPr lang="en-US" sz="1350" dirty="0">
+              <a:rPr lang="en-US" sz="1600" dirty="0">
                 <a:solidFill>
                   <a:srgbClr val="1F2328"/>
                 </a:solidFill>
@@ -4575,9 +4579,9 @@
                 <a:ea typeface="Arial" pitchFamily="34" charset="-122"/>
                 <a:cs typeface="Arial" pitchFamily="34" charset="-120"/>
               </a:rPr>
-              <a:t>Read "Primary User Flow," "City Search," "Weather Data," "Weather Code Mapping," "Caching," and "Application States and Resilience" in PLAN.md. Implement the real WeatherView behavior:</a:t>
-            </a:r>
-            <a:endParaRPr lang="en-US" sz="1350" dirty="0"/>
+              <a:t>Read "Primary User Flow," "City Search," "Weather Data," … in PLAN.md. Implement the real WeatherView behavior:</a:t>
+            </a:r>
+            <a:endParaRPr lang="en-US" sz="1600" dirty="0"/>
           </a:p>
         </p:txBody>
       </p:sp>
@@ -4589,7 +4593,7 @@
         </p:nvSpPr>
         <p:spPr>
           <a:xfrm>
-            <a:off x="996702" y="2808684"/>
+            <a:off x="1022152" y="2959894"/>
             <a:ext cx="50750" cy="50750"/>
           </a:xfrm>
           <a:prstGeom prst="roundRect">
@@ -4621,8 +4625,8 @@
         </p:nvSpPr>
         <p:spPr>
           <a:xfrm>
-            <a:off x="1148953" y="2714476"/>
-            <a:ext cx="2634570" cy="243483"/>
+            <a:off x="1174403" y="2848273"/>
+            <a:ext cx="3985784" cy="288578"/>
           </a:xfrm>
           <a:prstGeom prst="rect">
             <a:avLst/>
@@ -4636,12 +4640,12 @@
           <a:p>
             <a:pPr algn="l" indent="0" marL="0">
               <a:lnSpc>
-                <a:spcPts val="1917"/>
+                <a:spcPts val="2272"/>
               </a:lnSpc>
               <a:buNone/>
             </a:pPr>
             <a:r>
-              <a:rPr lang="en-US" sz="1350" dirty="0">
+              <a:rPr lang="en-US" sz="1600" dirty="0">
                 <a:solidFill>
                   <a:srgbClr val="1F2328"/>
                 </a:solidFill>
@@ -4649,9 +4653,9 @@
                 <a:ea typeface="Arial" pitchFamily="34" charset="-122"/>
                 <a:cs typeface="Arial" pitchFamily="34" charset="-120"/>
               </a:rPr>
-              <a:t>geolocation with a Seattle fallback</a:t>
-            </a:r>
-            <a:endParaRPr lang="en-US" sz="1350" dirty="0"/>
+              <a:t>browser geolocation … and Seattle fallback</a:t>
+            </a:r>
+            <a:endParaRPr lang="en-US" sz="1600" dirty="0"/>
           </a:p>
         </p:txBody>
       </p:sp>
@@ -4663,7 +4667,7 @@
         </p:nvSpPr>
         <p:spPr>
           <a:xfrm>
-            <a:off x="996702" y="3102918"/>
+            <a:off x="1022152" y="3311872"/>
             <a:ext cx="50750" cy="50750"/>
           </a:xfrm>
           <a:prstGeom prst="roundRect">
@@ -4695,8 +4699,8 @@
         </p:nvSpPr>
         <p:spPr>
           <a:xfrm>
-            <a:off x="1148953" y="3008709"/>
-            <a:ext cx="3528548" cy="243483"/>
+            <a:off x="1174403" y="3200251"/>
+            <a:ext cx="5368117" cy="288578"/>
           </a:xfrm>
           <a:prstGeom prst="rect">
             <a:avLst/>
@@ -4710,12 +4714,12 @@
           <a:p>
             <a:pPr algn="l" indent="0" marL="0">
               <a:lnSpc>
-                <a:spcPts val="1917"/>
+                <a:spcPts val="2272"/>
               </a:lnSpc>
               <a:buNone/>
             </a:pPr>
             <a:r>
-              <a:rPr lang="en-US" sz="1350" dirty="0">
+              <a:rPr lang="en-US" sz="1600" dirty="0">
                 <a:solidFill>
                   <a:srgbClr val="1F2328"/>
                 </a:solidFill>
@@ -4723,9 +4727,9 @@
                 <a:ea typeface="Arial" pitchFamily="34" charset="-122"/>
                 <a:cs typeface="Arial" pitchFamily="34" charset="-120"/>
               </a:rPr>
-              <a:t>Open-Meteo city search and five-day forecast</a:t>
-            </a:r>
-            <a:endParaRPr lang="en-US" sz="1350" dirty="0"/>
+              <a:t>Open-Meteo city geocoding and five-day forecast requests</a:t>
+            </a:r>
+            <a:endParaRPr lang="en-US" sz="1600" dirty="0"/>
           </a:p>
         </p:txBody>
       </p:sp>
@@ -4737,7 +4741,7 @@
         </p:nvSpPr>
         <p:spPr>
           <a:xfrm>
-            <a:off x="996702" y="3397151"/>
+            <a:off x="1022152" y="3663851"/>
             <a:ext cx="50750" cy="50750"/>
           </a:xfrm>
           <a:prstGeom prst="roundRect">
@@ -4769,8 +4773,8 @@
         </p:nvSpPr>
         <p:spPr>
           <a:xfrm>
-            <a:off x="1148953" y="3302943"/>
-            <a:ext cx="3995348" cy="243483"/>
+            <a:off x="1174403" y="3552230"/>
+            <a:ext cx="4734485" cy="288578"/>
           </a:xfrm>
           <a:prstGeom prst="rect">
             <a:avLst/>
@@ -4784,12 +4788,12 @@
           <a:p>
             <a:pPr algn="l" indent="0" marL="0">
               <a:lnSpc>
-                <a:spcPts val="1917"/>
+                <a:spcPts val="2272"/>
               </a:lnSpc>
               <a:buNone/>
             </a:pPr>
             <a:r>
-              <a:rPr lang="en-US" sz="1350" dirty="0">
+              <a:rPr lang="en-US" sz="1600" dirty="0">
                 <a:solidFill>
                   <a:srgbClr val="1F2328"/>
                 </a:solidFill>
@@ -4799,7 +4803,7 @@
               </a:rPr>
               <a:t>strict payload validation and normalized day objects</a:t>
             </a:r>
-            <a:endParaRPr lang="en-US" sz="1350" dirty="0"/>
+            <a:endParaRPr lang="en-US" sz="1600" dirty="0"/>
           </a:p>
         </p:txBody>
       </p:sp>
@@ -4811,40 +4815,8 @@
         </p:nvSpPr>
         <p:spPr>
           <a:xfrm>
-            <a:off x="996702" y="3691384"/>
-            <a:ext cx="50750" cy="50750"/>
-          </a:xfrm>
-          <a:prstGeom prst="roundRect">
-            <a:avLst>
-              <a:gd name="adj" fmla="val 1801773"/>
-            </a:avLst>
-          </a:prstGeom>
-          <a:solidFill>
-            <a:srgbClr val="8250DF"/>
-          </a:solidFill>
-          <a:ln/>
-        </p:spPr>
-        <p:txBody>
-          <a:bodyPr wrap="square" rtlCol="0" anchor="ctr"/>
-          <a:lstStyle/>
-          <a:p>
-            <a:pPr indent="0" marL="0">
-              <a:buNone/>
-            </a:pPr>
-            <a:endParaRPr lang="en-US" dirty="0"/>
-          </a:p>
-        </p:txBody>
-      </p:sp>
-      <p:sp>
-        <p:nvSpPr>
-          <p:cNvPr id="22" name="Text 18"/>
-          <p:cNvSpPr/>
-          <p:nvPr/>
-        </p:nvSpPr>
-        <p:spPr>
-          <a:xfrm>
-            <a:off x="1148953" y="3597176"/>
-            <a:ext cx="5093199" cy="243483"/>
+            <a:off x="971401" y="3904208"/>
+            <a:ext cx="7393496" cy="288578"/>
           </a:xfrm>
           <a:prstGeom prst="rect">
             <a:avLst/>
@@ -4858,12 +4830,12 @@
           <a:p>
             <a:pPr algn="l" indent="0" marL="0">
               <a:lnSpc>
-                <a:spcPts val="1917"/>
+                <a:spcPts val="2272"/>
               </a:lnSpc>
               <a:buNone/>
             </a:pPr>
             <a:r>
-              <a:rPr lang="en-US" sz="1350" dirty="0">
+              <a:rPr lang="en-US" sz="1600" b="1" dirty="0">
                 <a:solidFill>
                   <a:srgbClr val="1F2328"/>
                 </a:solidFill>
@@ -4871,51 +4843,9 @@
                 <a:ea typeface="Arial" pitchFamily="34" charset="-122"/>
                 <a:cs typeface="Arial" pitchFamily="34" charset="-120"/>
               </a:rPr>
-              <a:t>loading, no-result, malformed-data, network-error, and retry states</a:t>
-            </a:r>
-            <a:endParaRPr lang="en-US" sz="1350" dirty="0"/>
-          </a:p>
-        </p:txBody>
-      </p:sp>
-      <p:sp>
-        <p:nvSpPr>
-          <p:cNvPr id="23" name="Text 19"/>
-          <p:cNvSpPr/>
-          <p:nvPr/>
-        </p:nvSpPr>
-        <p:spPr>
-          <a:xfrm>
-            <a:off x="945952" y="3891409"/>
-            <a:ext cx="7445413" cy="243483"/>
-          </a:xfrm>
-          <a:prstGeom prst="rect">
-            <a:avLst/>
-          </a:prstGeom>
-          <a:noFill/>
-          <a:ln/>
-        </p:spPr>
-        <p:txBody>
-          <a:bodyPr wrap="square" lIns="0" tIns="0" rIns="0" bIns="0" rtlCol="0" anchor="t"/>
-          <a:lstStyle/>
-          <a:p>
-            <a:pPr algn="l" indent="0" marL="0">
-              <a:lnSpc>
-                <a:spcPts val="1917"/>
-              </a:lnSpc>
-              <a:buNone/>
-            </a:pPr>
-            <a:r>
-              <a:rPr lang="en-US" sz="1350" b="1" dirty="0">
-                <a:solidFill>
-                  <a:srgbClr val="1F2328"/>
-                </a:solidFill>
-                <a:latin typeface="Arial" pitchFamily="34" charset="0"/>
-                <a:ea typeface="Arial" pitchFamily="34" charset="-122"/>
-                <a:cs typeface="Arial" pitchFamily="34" charset="-120"/>
-              </a:rPr>
-              <a:t>Keep the previous successful forecast visible when a search fails.</a:t>
-            </a:r>
-            <a:endParaRPr lang="en-US" sz="1350" dirty="0"/>
+              <a:t>Keep the previous successful forecast visible</a:t>
+            </a:r>
+            <a:endParaRPr lang="en-US" sz="1600" dirty="0"/>
           </a:p>
         </p:txBody>
       </p:sp>
@@ -4959,12 +4889,12 @@
         </p:nvSpPr>
         <p:spPr>
           <a:xfrm>
-            <a:off x="7446466" y="152400"/>
-            <a:ext cx="1113383" cy="266700"/>
+            <a:off x="7325916" y="152400"/>
+            <a:ext cx="1233934" cy="279350"/>
           </a:xfrm>
           <a:prstGeom prst="roundRect">
             <a:avLst>
-              <a:gd name="adj" fmla="val 23810"/>
+              <a:gd name="adj" fmla="val 22731"/>
             </a:avLst>
           </a:prstGeom>
           <a:solidFill>
@@ -4991,8 +4921,8 @@
         </p:nvSpPr>
         <p:spPr>
           <a:xfrm>
-            <a:off x="7564822" y="219075"/>
-            <a:ext cx="876672" cy="133350"/>
+            <a:off x="7455969" y="220563"/>
+            <a:ext cx="973827" cy="142875"/>
           </a:xfrm>
           <a:prstGeom prst="rect">
             <a:avLst/>
@@ -5008,7 +4938,7 @@
               <a:buNone/>
             </a:pPr>
             <a:r>
-              <a:rPr lang="en-US" sz="900" b="1" dirty="0">
+              <a:rPr lang="en-US" sz="1000" b="1" dirty="0">
                 <a:solidFill>
                   <a:srgbClr val="FFFFFF"/>
                 </a:solidFill>
@@ -5018,7 +4948,7 @@
               </a:rPr>
               <a:t>WEATHERVIEW</a:t>
             </a:r>
-            <a:endParaRPr lang="en-US" sz="900" dirty="0"/>
+            <a:endParaRPr lang="en-US" sz="1000" dirty="0"/>
           </a:p>
         </p:txBody>
       </p:sp>
@@ -5055,7 +4985,7 @@
         <p:spPr>
           <a:xfrm>
             <a:off x="482501" y="330101"/>
-            <a:ext cx="7772400" cy="142875"/>
+            <a:ext cx="8342275" cy="152400"/>
           </a:xfrm>
           <a:prstGeom prst="rect">
             <a:avLst/>
@@ -5071,7 +5001,7 @@
               <a:buNone/>
             </a:pPr>
             <a:r>
-              <a:rPr lang="en-US" sz="1000" b="1" dirty="0">
+              <a:rPr lang="en-US" sz="1100" b="1" dirty="0">
                 <a:solidFill>
                   <a:srgbClr val="0969DA"/>
                 </a:solidFill>
@@ -5081,7 +5011,7 @@
               </a:rPr>
               <a:t>KEY IDEA</a:t>
             </a:r>
-            <a:endParaRPr lang="en-US" sz="1000" dirty="0"/>
+            <a:endParaRPr lang="en-US" sz="1100" dirty="0"/>
           </a:p>
         </p:txBody>
       </p:sp>
@@ -5093,8 +5023,8 @@
         </p:nvSpPr>
         <p:spPr>
           <a:xfrm>
-            <a:off x="482501" y="523726"/>
-            <a:ext cx="7772400" cy="393650"/>
+            <a:off x="482501" y="533251"/>
+            <a:ext cx="8342275" cy="419100"/>
           </a:xfrm>
           <a:prstGeom prst="rect">
             <a:avLst/>
@@ -5108,7 +5038,7 @@
           <a:p>
             <a:pPr algn="l" indent="0" marL="0">
               <a:lnSpc>
-                <a:spcPts val="3100"/>
+                <a:spcPts val="3300"/>
               </a:lnSpc>
               <a:spcBef>
                 <a:spcPts val="400"/>
@@ -5116,7 +5046,7 @@
               <a:buNone/>
             </a:pPr>
             <a:r>
-              <a:rPr lang="en-US" sz="2600" b="1" dirty="0">
+              <a:rPr lang="en-US" sz="2800" b="1" dirty="0">
                 <a:solidFill>
                   <a:srgbClr val="1F2328"/>
                 </a:solidFill>
@@ -5126,7 +5056,7 @@
               </a:rPr>
               <a:t>Validate at the boundary</a:t>
             </a:r>
-            <a:endParaRPr lang="en-US" sz="2600" dirty="0"/>
+            <a:endParaRPr lang="en-US" sz="2800" dirty="0"/>
           </a:p>
         </p:txBody>
       </p:sp>
@@ -5138,8 +5068,8 @@
         </p:nvSpPr>
         <p:spPr>
           <a:xfrm>
-            <a:off x="482501" y="980777"/>
-            <a:ext cx="7772400" cy="228600"/>
+            <a:off x="482501" y="1028551"/>
+            <a:ext cx="8342275" cy="254050"/>
           </a:xfrm>
           <a:prstGeom prst="rect">
             <a:avLst/>
@@ -5153,15 +5083,15 @@
           <a:p>
             <a:pPr algn="l" indent="0" marL="0">
               <a:lnSpc>
-                <a:spcPts val="1800"/>
+                <a:spcPts val="2000"/>
               </a:lnSpc>
               <a:spcBef>
-                <a:spcPts val="500"/>
+                <a:spcPts val="600"/>
               </a:spcBef>
               <a:buNone/>
             </a:pPr>
             <a:r>
-              <a:rPr lang="en-US" sz="1400" dirty="0">
+              <a:rPr lang="en-US" sz="1600" dirty="0">
                 <a:solidFill>
                   <a:srgbClr val="59636E"/>
                 </a:solidFill>
@@ -5171,7 +5101,7 @@
               </a:rPr>
               <a:t>Bad data never reaches the UI. The last good forecast stays.</a:t>
             </a:r>
-            <a:endParaRPr lang="en-US" sz="1400" dirty="0"/>
+            <a:endParaRPr lang="en-US" sz="1600" dirty="0"/>
           </a:p>
         </p:txBody>
       </p:sp>
@@ -5191,7 +5121,7 @@
         </p:blipFill>
         <p:spPr>
           <a:xfrm>
-            <a:off x="1790551" y="1549301"/>
+            <a:off x="1790551" y="1587401"/>
             <a:ext cx="5562600" cy="3174950"/>
           </a:xfrm>
           <a:prstGeom prst="rect">
@@ -5239,12 +5169,12 @@
         </p:nvSpPr>
         <p:spPr>
           <a:xfrm>
-            <a:off x="7446466" y="152400"/>
-            <a:ext cx="1113383" cy="266700"/>
+            <a:off x="7325916" y="152400"/>
+            <a:ext cx="1233934" cy="279350"/>
           </a:xfrm>
           <a:prstGeom prst="roundRect">
             <a:avLst>
-              <a:gd name="adj" fmla="val 23810"/>
+              <a:gd name="adj" fmla="val 22731"/>
             </a:avLst>
           </a:prstGeom>
           <a:solidFill>
@@ -5271,8 +5201,8 @@
         </p:nvSpPr>
         <p:spPr>
           <a:xfrm>
-            <a:off x="7564822" y="219075"/>
-            <a:ext cx="876672" cy="133350"/>
+            <a:off x="7455969" y="220563"/>
+            <a:ext cx="973827" cy="142875"/>
           </a:xfrm>
           <a:prstGeom prst="rect">
             <a:avLst/>
@@ -5288,7 +5218,7 @@
               <a:buNone/>
             </a:pPr>
             <a:r>
-              <a:rPr lang="en-US" sz="900" b="1" dirty="0">
+              <a:rPr lang="en-US" sz="1000" b="1" dirty="0">
                 <a:solidFill>
                   <a:srgbClr val="FFFFFF"/>
                 </a:solidFill>
@@ -5298,7 +5228,7 @@
               </a:rPr>
               <a:t>WEATHERVIEW</a:t>
             </a:r>
-            <a:endParaRPr lang="en-US" sz="900" dirty="0"/>
+            <a:endParaRPr lang="en-US" sz="1000" dirty="0"/>
           </a:p>
         </p:txBody>
       </p:sp>
@@ -5335,7 +5265,7 @@
         <p:spPr>
           <a:xfrm>
             <a:off x="482501" y="330101"/>
-            <a:ext cx="7772400" cy="142875"/>
+            <a:ext cx="8342275" cy="152400"/>
           </a:xfrm>
           <a:prstGeom prst="rect">
             <a:avLst/>
@@ -5351,7 +5281,7 @@
               <a:buNone/>
             </a:pPr>
             <a:r>
-              <a:rPr lang="en-US" sz="1000" b="1" dirty="0">
+              <a:rPr lang="en-US" sz="1100" b="1" dirty="0">
                 <a:solidFill>
                   <a:srgbClr val="0969DA"/>
                 </a:solidFill>
@@ -5361,7 +5291,7 @@
               </a:rPr>
               <a:t>SAFE EXPERIMENTS</a:t>
             </a:r>
-            <a:endParaRPr lang="en-US" sz="1000" dirty="0"/>
+            <a:endParaRPr lang="en-US" sz="1100" dirty="0"/>
           </a:p>
         </p:txBody>
       </p:sp>
@@ -5373,8 +5303,8 @@
         </p:nvSpPr>
         <p:spPr>
           <a:xfrm>
-            <a:off x="482501" y="523726"/>
-            <a:ext cx="7772400" cy="393650"/>
+            <a:off x="482501" y="533251"/>
+            <a:ext cx="8342275" cy="419100"/>
           </a:xfrm>
           <a:prstGeom prst="rect">
             <a:avLst/>
@@ -5388,7 +5318,7 @@
           <a:p>
             <a:pPr algn="l" indent="0" marL="0">
               <a:lnSpc>
-                <a:spcPts val="3100"/>
+                <a:spcPts val="3300"/>
               </a:lnSpc>
               <a:spcBef>
                 <a:spcPts val="400"/>
@@ -5396,7 +5326,7 @@
               <a:buNone/>
             </a:pPr>
             <a:r>
-              <a:rPr lang="en-US" sz="2600" b="1" dirty="0">
+              <a:rPr lang="en-US" sz="2800" b="1" dirty="0">
                 <a:solidFill>
                   <a:srgbClr val="1F2328"/>
                 </a:solidFill>
@@ -5406,7 +5336,7 @@
               </a:rPr>
               <a:t>Try anything. Rewind it.</a:t>
             </a:r>
-            <a:endParaRPr lang="en-US" sz="2600" dirty="0"/>
+            <a:endParaRPr lang="en-US" sz="2800" dirty="0"/>
           </a:p>
         </p:txBody>
       </p:sp>
@@ -5418,12 +5348,12 @@
         </p:nvSpPr>
         <p:spPr>
           <a:xfrm>
-            <a:off x="738039" y="2238821"/>
-            <a:ext cx="4825901" cy="1541711"/>
+            <a:off x="813495" y="1982986"/>
+            <a:ext cx="4953000" cy="2104579"/>
           </a:xfrm>
           <a:prstGeom prst="roundRect">
             <a:avLst>
-              <a:gd name="adj" fmla="val 6590"/>
+              <a:gd name="adj" fmla="val 4828"/>
             </a:avLst>
           </a:prstGeom>
           <a:solidFill>
@@ -5457,8 +5387,8 @@
         </p:nvSpPr>
         <p:spPr>
           <a:xfrm>
-            <a:off x="738039" y="2243584"/>
-            <a:ext cx="4825901" cy="0"/>
+            <a:off x="813495" y="1987748"/>
+            <a:ext cx="4953000" cy="0"/>
           </a:xfrm>
           <a:prstGeom prst="line">
             <a:avLst/>
@@ -5480,8 +5410,8 @@
         </p:nvSpPr>
         <p:spPr>
           <a:xfrm>
-            <a:off x="5559177" y="2238821"/>
-            <a:ext cx="0" cy="1541711"/>
+            <a:off x="5761732" y="1982986"/>
+            <a:ext cx="0" cy="2104579"/>
           </a:xfrm>
           <a:prstGeom prst="line">
             <a:avLst/>
@@ -5503,8 +5433,8 @@
         </p:nvSpPr>
         <p:spPr>
           <a:xfrm>
-            <a:off x="738039" y="3775770"/>
-            <a:ext cx="4825901" cy="0"/>
+            <a:off x="813495" y="4082802"/>
+            <a:ext cx="4953000" cy="0"/>
           </a:xfrm>
           <a:prstGeom prst="line">
             <a:avLst/>
@@ -5526,8 +5456,8 @@
         </p:nvSpPr>
         <p:spPr>
           <a:xfrm>
-            <a:off x="766614" y="2238821"/>
-            <a:ext cx="0" cy="1541711"/>
+            <a:off x="842070" y="1982986"/>
+            <a:ext cx="0" cy="2104579"/>
           </a:xfrm>
           <a:prstGeom prst="line">
             <a:avLst/>
@@ -5557,8 +5487,8 @@
         </p:blipFill>
         <p:spPr>
           <a:xfrm>
-            <a:off x="1049089" y="2451497"/>
-            <a:ext cx="165050" cy="165050"/>
+            <a:off x="1149995" y="2221111"/>
+            <a:ext cx="190500" cy="190500"/>
           </a:xfrm>
           <a:prstGeom prst="rect">
             <a:avLst/>
@@ -5573,8 +5503,8 @@
         </p:nvSpPr>
         <p:spPr>
           <a:xfrm>
-            <a:off x="1290340" y="2467273"/>
-            <a:ext cx="1220054" cy="133350"/>
+            <a:off x="1416695" y="2240161"/>
+            <a:ext cx="1423169" cy="152400"/>
           </a:xfrm>
           <a:prstGeom prst="rect">
             <a:avLst/>
@@ -5590,7 +5520,7 @@
               <a:buNone/>
             </a:pPr>
             <a:r>
-              <a:rPr lang="en-US" sz="900" dirty="0">
+              <a:rPr lang="en-US" sz="1050" dirty="0">
                 <a:solidFill>
                   <a:srgbClr val="8250DF"/>
                 </a:solidFill>
@@ -5604,7 +5534,7 @@
               <a:buNone/>
             </a:pPr>
             <a:r>
-              <a:rPr lang="en-US" sz="900" b="1" dirty="0">
+              <a:rPr lang="en-US" sz="1050" b="1" dirty="0">
                 <a:solidFill>
                   <a:srgbClr val="818B98"/>
                 </a:solidFill>
@@ -5614,7 +5544,7 @@
               </a:rPr>
               <a:t> · ABRIDGED</a:t>
             </a:r>
-            <a:endParaRPr lang="en-US" sz="900" dirty="0"/>
+            <a:endParaRPr lang="en-US" sz="1050" dirty="0"/>
           </a:p>
         </p:txBody>
       </p:sp>
@@ -5626,8 +5556,8 @@
         </p:nvSpPr>
         <p:spPr>
           <a:xfrm>
-            <a:off x="1049089" y="2730698"/>
-            <a:ext cx="4336453" cy="811709"/>
+            <a:off x="1149995" y="2525762"/>
+            <a:ext cx="4414177" cy="1298377"/>
           </a:xfrm>
           <a:prstGeom prst="rect">
             <a:avLst/>
@@ -5641,12 +5571,12 @@
           <a:p>
             <a:pPr algn="l" indent="0" marL="0">
               <a:lnSpc>
-                <a:spcPts val="2130"/>
+                <a:spcPts val="2556"/>
               </a:lnSpc>
               <a:buNone/>
             </a:pPr>
             <a:r>
-              <a:rPr lang="en-US" sz="1500" dirty="0">
+              <a:rPr lang="en-US" sz="1800" dirty="0">
                 <a:solidFill>
                   <a:srgbClr val="1F2328"/>
                 </a:solidFill>
@@ -5658,12 +5588,12 @@
             </a:r>
             <a:pPr algn="l" indent="0" marL="0">
               <a:lnSpc>
-                <a:spcPts val="2130"/>
+                <a:spcPts val="2556"/>
               </a:lnSpc>
               <a:buNone/>
             </a:pPr>
             <a:r>
-              <a:rPr lang="en-US" sz="1500" b="1" dirty="0">
+              <a:rPr lang="en-US" sz="1800" b="1" dirty="0">
                 <a:solidFill>
                   <a:srgbClr val="1F2328"/>
                 </a:solidFill>
@@ -5675,12 +5605,12 @@
             </a:r>
             <a:pPr algn="l" indent="0" marL="0">
               <a:lnSpc>
-                <a:spcPts val="2130"/>
+                <a:spcPts val="2556"/>
               </a:lnSpc>
               <a:buNone/>
             </a:pPr>
             <a:r>
-              <a:rPr lang="en-US" sz="1500" dirty="0">
+              <a:rPr lang="en-US" sz="1800" dirty="0">
                 <a:solidFill>
                   <a:srgbClr val="1F2328"/>
                 </a:solidFill>
@@ -5690,7 +5620,7 @@
               </a:rPr>
               <a:t> that I'll undo. …</a:t>
             </a:r>
-            <a:endParaRPr lang="en-US" sz="1500" dirty="0"/>
+            <a:endParaRPr lang="en-US" sz="1800" dirty="0"/>
           </a:p>
         </p:txBody>
       </p:sp>
@@ -5702,7 +5632,7 @@
         </p:nvSpPr>
         <p:spPr>
           <a:xfrm>
-            <a:off x="5894040" y="2823865"/>
+            <a:off x="6096595" y="2849463"/>
             <a:ext cx="336855" cy="371475"/>
           </a:xfrm>
           <a:prstGeom prst="rect">
@@ -5741,7 +5671,7 @@
         </p:nvSpPr>
         <p:spPr>
           <a:xfrm>
-            <a:off x="7035403" y="2204889"/>
+            <a:off x="7099102" y="2087612"/>
             <a:ext cx="888950" cy="888950"/>
           </a:xfrm>
           <a:prstGeom prst="roundRect">
@@ -5781,7 +5711,7 @@
         </p:blipFill>
         <p:spPr>
           <a:xfrm>
-            <a:off x="7232154" y="2401639"/>
+            <a:off x="7295852" y="2284363"/>
             <a:ext cx="495300" cy="495300"/>
           </a:xfrm>
           <a:prstGeom prst="rect">
@@ -5797,8 +5727,8 @@
         </p:nvSpPr>
         <p:spPr>
           <a:xfrm>
-            <a:off x="6893123" y="3220789"/>
-            <a:ext cx="1197132" cy="314325"/>
+            <a:off x="6903393" y="3103513"/>
+            <a:ext cx="1305976" cy="352425"/>
           </a:xfrm>
           <a:prstGeom prst="rect">
             <a:avLst/>
@@ -5814,7 +5744,7 @@
               <a:buNone/>
             </a:pPr>
             <a:r>
-              <a:rPr lang="en-US" sz="2200" b="1" dirty="0">
+              <a:rPr lang="en-US" sz="2400" b="1" dirty="0">
                 <a:solidFill>
                   <a:srgbClr val="0969DA"/>
                 </a:solidFill>
@@ -5824,7 +5754,7 @@
               </a:rPr>
               <a:t>/rewind</a:t>
             </a:r>
-            <a:endParaRPr lang="en-US" sz="2200" dirty="0"/>
+            <a:endParaRPr lang="en-US" sz="2400" dirty="0"/>
           </a:p>
         </p:txBody>
       </p:sp>
@@ -5836,8 +5766,8 @@
         </p:nvSpPr>
         <p:spPr>
           <a:xfrm>
-            <a:off x="6535879" y="3662065"/>
-            <a:ext cx="1888147" cy="152400"/>
+            <a:off x="6741213" y="3582888"/>
+            <a:ext cx="1604727" cy="400050"/>
           </a:xfrm>
           <a:prstGeom prst="rect">
             <a:avLst/>
@@ -5853,7 +5783,7 @@
               <a:buNone/>
             </a:pPr>
             <a:r>
-              <a:rPr lang="en-US" sz="1100" dirty="0">
+              <a:rPr lang="en-US" sz="1300" dirty="0">
                 <a:solidFill>
                   <a:srgbClr val="59636E"/>
                 </a:solidFill>
@@ -5861,13 +5791,14 @@
                 <a:ea typeface="Arial" pitchFamily="34" charset="-122"/>
                 <a:cs typeface="Arial" pitchFamily="34" charset="-120"/>
               </a:rPr>
-              <a:t>Choose </a:t>
+              <a:t>Choose
+</a:t>
             </a:r>
             <a:pPr algn="ctr" indent="0" marL="0">
               <a:buNone/>
             </a:pPr>
             <a:r>
-              <a:rPr lang="en-US" sz="1100" b="1" dirty="0">
+              <a:rPr lang="en-US" sz="1300" b="1" dirty="0">
                 <a:solidFill>
                   <a:srgbClr val="59636E"/>
                 </a:solidFill>
@@ -5877,7 +5808,7 @@
               </a:rPr>
               <a:t>Conversation + files</a:t>
             </a:r>
-            <a:endParaRPr lang="en-US" sz="1100" dirty="0"/>
+            <a:endParaRPr lang="en-US" sz="1300" dirty="0"/>
           </a:p>
         </p:txBody>
       </p:sp>
@@ -5921,12 +5852,12 @@
         </p:nvSpPr>
         <p:spPr>
           <a:xfrm>
-            <a:off x="7446466" y="152400"/>
-            <a:ext cx="1113383" cy="266700"/>
+            <a:off x="7325916" y="152400"/>
+            <a:ext cx="1233934" cy="279350"/>
           </a:xfrm>
           <a:prstGeom prst="roundRect">
             <a:avLst>
-              <a:gd name="adj" fmla="val 23810"/>
+              <a:gd name="adj" fmla="val 22731"/>
             </a:avLst>
           </a:prstGeom>
           <a:solidFill>
@@ -5953,8 +5884,8 @@
         </p:nvSpPr>
         <p:spPr>
           <a:xfrm>
-            <a:off x="7564822" y="219075"/>
-            <a:ext cx="876672" cy="133350"/>
+            <a:off x="7455969" y="220563"/>
+            <a:ext cx="973827" cy="142875"/>
           </a:xfrm>
           <a:prstGeom prst="rect">
             <a:avLst/>
@@ -5970,7 +5901,7 @@
               <a:buNone/>
             </a:pPr>
             <a:r>
-              <a:rPr lang="en-US" sz="900" b="1" dirty="0">
+              <a:rPr lang="en-US" sz="1000" b="1" dirty="0">
                 <a:solidFill>
                   <a:srgbClr val="FFFFFF"/>
                 </a:solidFill>
@@ -5980,7 +5911,7 @@
               </a:rPr>
               <a:t>WEATHERVIEW</a:t>
             </a:r>
-            <a:endParaRPr lang="en-US" sz="900" dirty="0"/>
+            <a:endParaRPr lang="en-US" sz="1000" dirty="0"/>
           </a:p>
         </p:txBody>
       </p:sp>
@@ -6089,7 +6020,7 @@
         <p:spPr>
           <a:xfrm>
             <a:off x="558701" y="1828651"/>
-            <a:ext cx="3886200" cy="142875"/>
+            <a:ext cx="3886200" cy="152400"/>
           </a:xfrm>
           <a:prstGeom prst="rect">
             <a:avLst/>
@@ -6108,7 +6039,7 @@
               <a:buNone/>
             </a:pPr>
             <a:r>
-              <a:rPr lang="en-US" sz="1000" b="1" dirty="0">
+              <a:rPr lang="en-US" sz="1100" b="1" dirty="0">
                 <a:solidFill>
                   <a:srgbClr val="59636E"/>
                 </a:solidFill>
@@ -6118,7 +6049,7 @@
               </a:rPr>
               <a:t>SECTION 2 OF 3</a:t>
             </a:r>
-            <a:endParaRPr lang="en-US" sz="1000" dirty="0"/>
+            <a:endParaRPr lang="en-US" sz="1100" dirty="0"/>
           </a:p>
         </p:txBody>
       </p:sp>
@@ -6130,8 +6061,8 @@
         </p:nvSpPr>
         <p:spPr>
           <a:xfrm>
-            <a:off x="558701" y="2034927"/>
-            <a:ext cx="3886200" cy="444550"/>
+            <a:off x="558701" y="2044452"/>
+            <a:ext cx="3886200" cy="469850"/>
           </a:xfrm>
           <a:prstGeom prst="rect">
             <a:avLst/>
@@ -6145,7 +6076,7 @@
           <a:p>
             <a:pPr algn="l" indent="0" marL="0">
               <a:lnSpc>
-                <a:spcPts val="3500"/>
+                <a:spcPts val="3700"/>
               </a:lnSpc>
               <a:spcBef>
                 <a:spcPts val="500"/>
@@ -6153,7 +6084,7 @@
               <a:buNone/>
             </a:pPr>
             <a:r>
-              <a:rPr lang="en-US" sz="3000" b="1" dirty="0">
+              <a:rPr lang="en-US" sz="3200" b="1" dirty="0">
                 <a:solidFill>
                   <a:srgbClr val="1F2328"/>
                 </a:solidFill>
@@ -6163,7 +6094,7 @@
               </a:rPr>
               <a:t>Test and verify</a:t>
             </a:r>
-            <a:endParaRPr lang="en-US" sz="3000" dirty="0"/>
+            <a:endParaRPr lang="en-US" sz="3200" dirty="0"/>
           </a:p>
         </p:txBody>
       </p:sp>
@@ -6175,8 +6106,8 @@
         </p:nvSpPr>
         <p:spPr>
           <a:xfrm>
-            <a:off x="558701" y="2606427"/>
-            <a:ext cx="3886200" cy="482501"/>
+            <a:off x="558701" y="2666702"/>
+            <a:ext cx="3886200" cy="533400"/>
           </a:xfrm>
           <a:prstGeom prst="rect">
             <a:avLst/>
@@ -6190,15 +6121,15 @@
           <a:p>
             <a:pPr algn="l" indent="0" marL="0">
               <a:lnSpc>
-                <a:spcPts val="1900"/>
+                <a:spcPts val="2100"/>
               </a:lnSpc>
               <a:spcBef>
-                <a:spcPts val="1000"/>
+                <a:spcPts val="1200"/>
               </a:spcBef>
               <a:buNone/>
             </a:pPr>
             <a:r>
-              <a:rPr lang="en-US" sz="1400" dirty="0">
+              <a:rPr lang="en-US" sz="1600" dirty="0">
                 <a:solidFill>
                   <a:srgbClr val="59636E"/>
                 </a:solidFill>
@@ -6208,7 +6139,7 @@
               </a:rPr>
               <a:t>A confident answer is not proof. Tests and a verifier turn the plan into evidence.</a:t>
             </a:r>
-            <a:endParaRPr lang="en-US" sz="1400" dirty="0"/>
+            <a:endParaRPr lang="en-US" sz="1600" dirty="0"/>
           </a:p>
         </p:txBody>
       </p:sp>
@@ -6277,11 +6208,11 @@
         <p:spPr>
           <a:xfrm>
             <a:off x="558701" y="4368701"/>
-            <a:ext cx="1270099" cy="336352"/>
+            <a:ext cx="1394520" cy="361652"/>
           </a:xfrm>
           <a:prstGeom prst="roundRect">
             <a:avLst>
-              <a:gd name="adj" fmla="val 52861"/>
+              <a:gd name="adj" fmla="val 52675"/>
             </a:avLst>
           </a:prstGeom>
           <a:solidFill>
@@ -6313,11 +6244,11 @@
         <p:spPr>
           <a:xfrm>
             <a:off x="644426" y="4441627"/>
-            <a:ext cx="190500" cy="190500"/>
+            <a:ext cx="215801" cy="215801"/>
           </a:xfrm>
           <a:prstGeom prst="roundRect">
             <a:avLst>
-              <a:gd name="adj" fmla="val 480000"/>
+              <a:gd name="adj" fmla="val 423724"/>
             </a:avLst>
           </a:prstGeom>
           <a:solidFill>
@@ -6344,8 +6275,8 @@
         </p:nvSpPr>
         <p:spPr>
           <a:xfrm>
-            <a:off x="710833" y="4479727"/>
-            <a:ext cx="57686" cy="114300"/>
+            <a:off x="719840" y="4482852"/>
+            <a:ext cx="64972" cy="133350"/>
           </a:xfrm>
           <a:prstGeom prst="rect">
             <a:avLst/>
@@ -6361,7 +6292,7 @@
               <a:buNone/>
             </a:pPr>
             <a:r>
-              <a:rPr lang="en-US" sz="800" b="1" dirty="0">
+              <a:rPr lang="en-US" sz="900" b="1" dirty="0">
                 <a:solidFill>
                   <a:srgbClr val="818B98"/>
                 </a:solidFill>
@@ -6371,7 +6302,7 @@
               </a:rPr>
               <a:t>1</a:t>
             </a:r>
-            <a:endParaRPr lang="en-US" sz="800" dirty="0"/>
+            <a:endParaRPr lang="en-US" sz="900" dirty="0"/>
           </a:p>
         </p:txBody>
       </p:sp>
@@ -6383,8 +6314,8 @@
         </p:nvSpPr>
         <p:spPr>
           <a:xfrm>
-            <a:off x="911126" y="4470202"/>
-            <a:ext cx="796823" cy="133350"/>
+            <a:off x="936427" y="4478089"/>
+            <a:ext cx="885021" cy="142875"/>
           </a:xfrm>
           <a:prstGeom prst="rect">
             <a:avLst/>
@@ -6400,7 +6331,7 @@
               <a:buNone/>
             </a:pPr>
             <a:r>
-              <a:rPr lang="en-US" sz="900" b="1" dirty="0">
+              <a:rPr lang="en-US" sz="1000" b="1" dirty="0">
                 <a:solidFill>
                   <a:srgbClr val="818B98"/>
                 </a:solidFill>
@@ -6410,7 +6341,7 @@
               </a:rPr>
               <a:t>Plan and build</a:t>
             </a:r>
-            <a:endParaRPr lang="en-US" sz="900" dirty="0"/>
+            <a:endParaRPr lang="en-US" sz="1000" dirty="0"/>
           </a:p>
         </p:txBody>
       </p:sp>
@@ -6422,12 +6353,12 @@
         </p:nvSpPr>
         <p:spPr>
           <a:xfrm>
-            <a:off x="1930301" y="4368701"/>
-            <a:ext cx="1287214" cy="336352"/>
+            <a:off x="2054721" y="4368701"/>
+            <a:ext cx="1413718" cy="361652"/>
           </a:xfrm>
           <a:prstGeom prst="roundRect">
             <a:avLst>
-              <a:gd name="adj" fmla="val 52861"/>
+              <a:gd name="adj" fmla="val 52675"/>
             </a:avLst>
           </a:prstGeom>
           <a:solidFill>
@@ -6458,12 +6389,12 @@
         </p:nvSpPr>
         <p:spPr>
           <a:xfrm>
-            <a:off x="2016026" y="4441627"/>
-            <a:ext cx="190500" cy="190500"/>
+            <a:off x="2140446" y="4441627"/>
+            <a:ext cx="215801" cy="215801"/>
           </a:xfrm>
           <a:prstGeom prst="roundRect">
             <a:avLst>
-              <a:gd name="adj" fmla="val 480000"/>
+              <a:gd name="adj" fmla="val 423724"/>
             </a:avLst>
           </a:prstGeom>
           <a:solidFill>
@@ -6490,8 +6421,8 @@
         </p:nvSpPr>
         <p:spPr>
           <a:xfrm>
-            <a:off x="2082433" y="4479727"/>
-            <a:ext cx="57686" cy="114300"/>
+            <a:off x="2215860" y="4482852"/>
+            <a:ext cx="64972" cy="133350"/>
           </a:xfrm>
           <a:prstGeom prst="rect">
             <a:avLst/>
@@ -6507,7 +6438,7 @@
               <a:buNone/>
             </a:pPr>
             <a:r>
-              <a:rPr lang="en-US" sz="800" b="1" dirty="0">
+              <a:rPr lang="en-US" sz="900" b="1" dirty="0">
                 <a:solidFill>
                   <a:srgbClr val="8250DF"/>
                 </a:solidFill>
@@ -6517,7 +6448,7 @@
               </a:rPr>
               <a:t>2</a:t>
             </a:r>
-            <a:endParaRPr lang="en-US" sz="800" dirty="0"/>
+            <a:endParaRPr lang="en-US" sz="900" dirty="0"/>
           </a:p>
         </p:txBody>
       </p:sp>
@@ -6529,8 +6460,8 @@
         </p:nvSpPr>
         <p:spPr>
           <a:xfrm>
-            <a:off x="2282726" y="4470202"/>
-            <a:ext cx="814280" cy="133350"/>
+            <a:off x="2432447" y="4478089"/>
+            <a:ext cx="904604" cy="142875"/>
           </a:xfrm>
           <a:prstGeom prst="rect">
             <a:avLst/>
@@ -6546,7 +6477,7 @@
               <a:buNone/>
             </a:pPr>
             <a:r>
-              <a:rPr lang="en-US" sz="900" b="1" dirty="0">
+              <a:rPr lang="en-US" sz="1000" b="1" dirty="0">
                 <a:solidFill>
                   <a:srgbClr val="FFFFFF"/>
                 </a:solidFill>
@@ -6556,7 +6487,7 @@
               </a:rPr>
               <a:t>Test and verify</a:t>
             </a:r>
-            <a:endParaRPr lang="en-US" sz="900" dirty="0"/>
+            <a:endParaRPr lang="en-US" sz="1000" dirty="0"/>
           </a:p>
         </p:txBody>
       </p:sp>
@@ -6568,12 +6499,12 @@
         </p:nvSpPr>
         <p:spPr>
           <a:xfrm>
-            <a:off x="3319016" y="4368701"/>
-            <a:ext cx="1354782" cy="336352"/>
+            <a:off x="3569940" y="4368701"/>
+            <a:ext cx="1488728" cy="361652"/>
           </a:xfrm>
           <a:prstGeom prst="roundRect">
             <a:avLst>
-              <a:gd name="adj" fmla="val 52861"/>
+              <a:gd name="adj" fmla="val 52675"/>
             </a:avLst>
           </a:prstGeom>
           <a:solidFill>
@@ -6604,12 +6535,12 @@
         </p:nvSpPr>
         <p:spPr>
           <a:xfrm>
-            <a:off x="3404741" y="4441627"/>
-            <a:ext cx="190500" cy="190500"/>
+            <a:off x="3655665" y="4441627"/>
+            <a:ext cx="215801" cy="215801"/>
           </a:xfrm>
           <a:prstGeom prst="roundRect">
             <a:avLst>
-              <a:gd name="adj" fmla="val 480000"/>
+              <a:gd name="adj" fmla="val 423724"/>
             </a:avLst>
           </a:prstGeom>
           <a:solidFill>
@@ -6636,8 +6567,8 @@
         </p:nvSpPr>
         <p:spPr>
           <a:xfrm>
-            <a:off x="3471148" y="4479727"/>
-            <a:ext cx="57686" cy="114300"/>
+            <a:off x="3731079" y="4482852"/>
+            <a:ext cx="64972" cy="133350"/>
           </a:xfrm>
           <a:prstGeom prst="rect">
             <a:avLst/>
@@ -6653,7 +6584,7 @@
               <a:buNone/>
             </a:pPr>
             <a:r>
-              <a:rPr lang="en-US" sz="800" b="1" dirty="0">
+              <a:rPr lang="en-US" sz="900" b="1" dirty="0">
                 <a:solidFill>
                   <a:srgbClr val="818B98"/>
                 </a:solidFill>
@@ -6663,7 +6594,7 @@
               </a:rPr>
               <a:t>3</a:t>
             </a:r>
-            <a:endParaRPr lang="en-US" sz="800" dirty="0"/>
+            <a:endParaRPr lang="en-US" sz="900" dirty="0"/>
           </a:p>
         </p:txBody>
       </p:sp>
@@ -6675,8 +6606,8 @@
         </p:nvSpPr>
         <p:spPr>
           <a:xfrm>
-            <a:off x="3671441" y="4470202"/>
-            <a:ext cx="883200" cy="133350"/>
+            <a:off x="3947666" y="4478089"/>
+            <a:ext cx="981114" cy="142875"/>
           </a:xfrm>
           <a:prstGeom prst="rect">
             <a:avLst/>
@@ -6692,7 +6623,7 @@
               <a:buNone/>
             </a:pPr>
             <a:r>
-              <a:rPr lang="en-US" sz="900" b="1" dirty="0">
+              <a:rPr lang="en-US" sz="1000" b="1" dirty="0">
                 <a:solidFill>
                   <a:srgbClr val="818B98"/>
                 </a:solidFill>
@@ -6702,7 +6633,7 @@
               </a:rPr>
               <a:t>Deploy to Azure</a:t>
             </a:r>
-            <a:endParaRPr lang="en-US" sz="900" dirty="0"/>
+            <a:endParaRPr lang="en-US" sz="1000" dirty="0"/>
           </a:p>
         </p:txBody>
       </p:sp>
@@ -6746,12 +6677,12 @@
         </p:nvSpPr>
         <p:spPr>
           <a:xfrm>
-            <a:off x="7446466" y="152400"/>
-            <a:ext cx="1113383" cy="266700"/>
+            <a:off x="7325916" y="152400"/>
+            <a:ext cx="1233934" cy="279350"/>
           </a:xfrm>
           <a:prstGeom prst="roundRect">
             <a:avLst>
-              <a:gd name="adj" fmla="val 23810"/>
+              <a:gd name="adj" fmla="val 22731"/>
             </a:avLst>
           </a:prstGeom>
           <a:solidFill>
@@ -6778,8 +6709,8 @@
         </p:nvSpPr>
         <p:spPr>
           <a:xfrm>
-            <a:off x="7564822" y="219075"/>
-            <a:ext cx="876672" cy="133350"/>
+            <a:off x="7455969" y="220563"/>
+            <a:ext cx="973827" cy="142875"/>
           </a:xfrm>
           <a:prstGeom prst="rect">
             <a:avLst/>
@@ -6795,7 +6726,7 @@
               <a:buNone/>
             </a:pPr>
             <a:r>
-              <a:rPr lang="en-US" sz="900" b="1" dirty="0">
+              <a:rPr lang="en-US" sz="1000" b="1" dirty="0">
                 <a:solidFill>
                   <a:srgbClr val="FFFFFF"/>
                 </a:solidFill>
@@ -6805,7 +6736,7 @@
               </a:rPr>
               <a:t>WEATHERVIEW</a:t>
             </a:r>
-            <a:endParaRPr lang="en-US" sz="900" dirty="0"/>
+            <a:endParaRPr lang="en-US" sz="1000" dirty="0"/>
           </a:p>
         </p:txBody>
       </p:sp>
@@ -6842,7 +6773,7 @@
         <p:spPr>
           <a:xfrm>
             <a:off x="482501" y="330101"/>
-            <a:ext cx="7772400" cy="142875"/>
+            <a:ext cx="8342275" cy="152400"/>
           </a:xfrm>
           <a:prstGeom prst="rect">
             <a:avLst/>
@@ -6858,7 +6789,7 @@
               <a:buNone/>
             </a:pPr>
             <a:r>
-              <a:rPr lang="en-US" sz="1000" b="1" dirty="0">
+              <a:rPr lang="en-US" sz="1100" b="1" dirty="0">
                 <a:solidFill>
                   <a:srgbClr val="8250DF"/>
                 </a:solidFill>
@@ -6868,7 +6799,7 @@
               </a:rPr>
               <a:t>LAYERS OF EVIDENCE</a:t>
             </a:r>
-            <a:endParaRPr lang="en-US" sz="1000" dirty="0"/>
+            <a:endParaRPr lang="en-US" sz="1100" dirty="0"/>
           </a:p>
         </p:txBody>
       </p:sp>
@@ -6880,8 +6811,8 @@
         </p:nvSpPr>
         <p:spPr>
           <a:xfrm>
-            <a:off x="482501" y="523726"/>
-            <a:ext cx="7772400" cy="393650"/>
+            <a:off x="482501" y="533251"/>
+            <a:ext cx="8342275" cy="419100"/>
           </a:xfrm>
           <a:prstGeom prst="rect">
             <a:avLst/>
@@ -6895,7 +6826,7 @@
           <a:p>
             <a:pPr algn="l" indent="0" marL="0">
               <a:lnSpc>
-                <a:spcPts val="3100"/>
+                <a:spcPts val="3300"/>
               </a:lnSpc>
               <a:spcBef>
                 <a:spcPts val="400"/>
@@ -6903,7 +6834,7 @@
               <a:buNone/>
             </a:pPr>
             <a:r>
-              <a:rPr lang="en-US" sz="2600" b="1" dirty="0">
+              <a:rPr lang="en-US" sz="2800" b="1" dirty="0">
                 <a:solidFill>
                   <a:srgbClr val="1F2328"/>
                 </a:solidFill>
@@ -6913,7 +6844,7 @@
               </a:rPr>
               <a:t>Four ways to prove it works</a:t>
             </a:r>
-            <a:endParaRPr lang="en-US" sz="2600" dirty="0"/>
+            <a:endParaRPr lang="en-US" sz="2800" dirty="0"/>
           </a:p>
         </p:txBody>
       </p:sp>
@@ -6925,12 +6856,12 @@
         </p:nvSpPr>
         <p:spPr>
           <a:xfrm>
-            <a:off x="1092101" y="1877764"/>
-            <a:ext cx="634901" cy="634901"/>
+            <a:off x="1054001" y="1785193"/>
+            <a:ext cx="711101" cy="711101"/>
           </a:xfrm>
           <a:prstGeom prst="roundRect">
             <a:avLst>
-              <a:gd name="adj" fmla="val 12002"/>
+              <a:gd name="adj" fmla="val 10716"/>
             </a:avLst>
           </a:prstGeom>
           <a:solidFill>
@@ -6965,8 +6896,8 @@
         </p:blipFill>
         <p:spPr>
           <a:xfrm>
-            <a:off x="1231702" y="2017365"/>
-            <a:ext cx="355550" cy="355550"/>
+            <a:off x="1212652" y="1943844"/>
+            <a:ext cx="393650" cy="393650"/>
           </a:xfrm>
           <a:prstGeom prst="rect">
             <a:avLst/>
@@ -6981,8 +6912,8 @@
         </p:nvSpPr>
         <p:spPr>
           <a:xfrm>
-            <a:off x="1025941" y="2614166"/>
-            <a:ext cx="767221" cy="206425"/>
+            <a:off x="966889" y="2597795"/>
+            <a:ext cx="885325" cy="238125"/>
           </a:xfrm>
           <a:prstGeom prst="rect">
             <a:avLst/>
@@ -6996,12 +6927,12 @@
           <a:p>
             <a:pPr algn="ctr" indent="0" marL="0">
               <a:lnSpc>
-                <a:spcPts val="1625"/>
+                <a:spcPts val="1875"/>
               </a:lnSpc>
               <a:buNone/>
             </a:pPr>
             <a:r>
-              <a:rPr lang="en-US" sz="1300" b="1" dirty="0">
+              <a:rPr lang="en-US" sz="1500" b="1" dirty="0">
                 <a:solidFill>
                   <a:srgbClr val="1F2328"/>
                 </a:solidFill>
@@ -7011,7 +6942,7 @@
               </a:rPr>
               <a:t>Unit tests</a:t>
             </a:r>
-            <a:endParaRPr lang="en-US" sz="1300" dirty="0"/>
+            <a:endParaRPr lang="en-US" sz="1500" dirty="0"/>
           </a:p>
         </p:txBody>
       </p:sp>
@@ -7023,8 +6954,8 @@
         </p:nvSpPr>
         <p:spPr>
           <a:xfrm>
-            <a:off x="476863" y="2922091"/>
-            <a:ext cx="1865376" cy="360164"/>
+            <a:off x="476863" y="2937421"/>
+            <a:ext cx="1865376" cy="428625"/>
           </a:xfrm>
           <a:prstGeom prst="rect">
             <a:avLst/>
@@ -7038,12 +6969,12 @@
           <a:p>
             <a:pPr algn="ctr" indent="0" marL="0">
               <a:lnSpc>
-                <a:spcPts val="1418"/>
+                <a:spcPts val="1688"/>
               </a:lnSpc>
               <a:buNone/>
             </a:pPr>
             <a:r>
-              <a:rPr lang="en-US" sz="1050" dirty="0">
+              <a:rPr lang="en-US" sz="1250" dirty="0">
                 <a:solidFill>
                   <a:srgbClr val="59636E"/>
                 </a:solidFill>
@@ -7053,7 +6984,7 @@
               </a:rPr>
               <a:t>Node test runner for the pure modules</a:t>
             </a:r>
-            <a:endParaRPr lang="en-US" sz="1050" dirty="0"/>
+            <a:endParaRPr lang="en-US" sz="1250" dirty="0"/>
           </a:p>
         </p:txBody>
       </p:sp>
@@ -7065,8 +6996,8 @@
         </p:nvSpPr>
         <p:spPr>
           <a:xfrm>
-            <a:off x="2359869" y="2076152"/>
-            <a:ext cx="207365" cy="238125"/>
+            <a:off x="2346966" y="2007394"/>
+            <a:ext cx="233172" cy="266700"/>
           </a:xfrm>
           <a:prstGeom prst="rect">
             <a:avLst/>
@@ -7082,7 +7013,7 @@
               <a:buNone/>
             </a:pPr>
             <a:r>
-              <a:rPr lang="en-US" sz="1600" dirty="0">
+              <a:rPr lang="en-US" sz="1800" dirty="0">
                 <a:solidFill>
                   <a:srgbClr val="818B98"/>
                 </a:solidFill>
@@ -7092,7 +7023,7 @@
               </a:rPr>
               <a:t>→</a:t>
             </a:r>
-            <a:endParaRPr lang="en-US" sz="1600" dirty="0"/>
+            <a:endParaRPr lang="en-US" sz="1800" dirty="0"/>
           </a:p>
         </p:txBody>
       </p:sp>
@@ -7104,12 +7035,12 @@
         </p:nvSpPr>
         <p:spPr>
           <a:xfrm>
-            <a:off x="3200251" y="1877764"/>
-            <a:ext cx="634901" cy="634901"/>
+            <a:off x="3162151" y="1785193"/>
+            <a:ext cx="711101" cy="711101"/>
           </a:xfrm>
           <a:prstGeom prst="roundRect">
             <a:avLst>
-              <a:gd name="adj" fmla="val 12002"/>
+              <a:gd name="adj" fmla="val 10716"/>
             </a:avLst>
           </a:prstGeom>
           <a:solidFill>
@@ -7144,8 +7075,8 @@
         </p:blipFill>
         <p:spPr>
           <a:xfrm>
-            <a:off x="3339852" y="2017365"/>
-            <a:ext cx="355550" cy="355550"/>
+            <a:off x="3320802" y="1943844"/>
+            <a:ext cx="393650" cy="393650"/>
           </a:xfrm>
           <a:prstGeom prst="rect">
             <a:avLst/>
@@ -7160,8 +7091,8 @@
         </p:nvSpPr>
         <p:spPr>
           <a:xfrm>
-            <a:off x="2960882" y="2614166"/>
-            <a:ext cx="1113639" cy="206425"/>
+            <a:off x="2875112" y="2597795"/>
+            <a:ext cx="1285178" cy="238125"/>
           </a:xfrm>
           <a:prstGeom prst="rect">
             <a:avLst/>
@@ -7175,12 +7106,12 @@
           <a:p>
             <a:pPr algn="ctr" indent="0" marL="0">
               <a:lnSpc>
-                <a:spcPts val="1625"/>
+                <a:spcPts val="1875"/>
               </a:lnSpc>
               <a:buNone/>
             </a:pPr>
             <a:r>
-              <a:rPr lang="en-US" sz="1300" b="1" dirty="0">
+              <a:rPr lang="en-US" sz="1500" b="1" dirty="0">
                 <a:solidFill>
                   <a:srgbClr val="1F2328"/>
                 </a:solidFill>
@@ -7190,7 +7121,7 @@
               </a:rPr>
               <a:t>Browser tests</a:t>
             </a:r>
-            <a:endParaRPr lang="en-US" sz="1300" dirty="0"/>
+            <a:endParaRPr lang="en-US" sz="1500" dirty="0"/>
           </a:p>
         </p:txBody>
       </p:sp>
@@ -7202,8 +7133,8 @@
         </p:nvSpPr>
         <p:spPr>
           <a:xfrm>
-            <a:off x="2585014" y="2922091"/>
-            <a:ext cx="1865376" cy="360164"/>
+            <a:off x="2585014" y="2937421"/>
+            <a:ext cx="1865376" cy="428625"/>
           </a:xfrm>
           <a:prstGeom prst="rect">
             <a:avLst/>
@@ -7217,12 +7148,12 @@
           <a:p>
             <a:pPr algn="ctr" indent="0" marL="0">
               <a:lnSpc>
-                <a:spcPts val="1418"/>
+                <a:spcPts val="1688"/>
               </a:lnSpc>
               <a:buNone/>
             </a:pPr>
             <a:r>
-              <a:rPr lang="en-US" sz="1050" dirty="0">
+              <a:rPr lang="en-US" sz="1250" dirty="0">
                 <a:solidFill>
                   <a:srgbClr val="59636E"/>
                 </a:solidFill>
@@ -7232,7 +7163,7 @@
               </a:rPr>
               <a:t>Playwright with mocked weather</a:t>
             </a:r>
-            <a:endParaRPr lang="en-US" sz="1050" dirty="0"/>
+            <a:endParaRPr lang="en-US" sz="1250" dirty="0"/>
           </a:p>
         </p:txBody>
       </p:sp>
@@ -7244,8 +7175,8 @@
         </p:nvSpPr>
         <p:spPr>
           <a:xfrm>
-            <a:off x="4468020" y="2076152"/>
-            <a:ext cx="207365" cy="238125"/>
+            <a:off x="4455116" y="2007394"/>
+            <a:ext cx="233172" cy="266700"/>
           </a:xfrm>
           <a:prstGeom prst="rect">
             <a:avLst/>
@@ -7261,7 +7192,7 @@
               <a:buNone/>
             </a:pPr>
             <a:r>
-              <a:rPr lang="en-US" sz="1600" dirty="0">
+              <a:rPr lang="en-US" sz="1800" dirty="0">
                 <a:solidFill>
                   <a:srgbClr val="818B98"/>
                 </a:solidFill>
@@ -7271,7 +7202,7 @@
               </a:rPr>
               <a:t>→</a:t>
             </a:r>
-            <a:endParaRPr lang="en-US" sz="1600" dirty="0"/>
+            <a:endParaRPr lang="en-US" sz="1800" dirty="0"/>
           </a:p>
         </p:txBody>
       </p:sp>
@@ -7283,12 +7214,12 @@
         </p:nvSpPr>
         <p:spPr>
           <a:xfrm>
-            <a:off x="5308402" y="1877764"/>
-            <a:ext cx="634901" cy="634901"/>
+            <a:off x="5270302" y="1785193"/>
+            <a:ext cx="711101" cy="711101"/>
           </a:xfrm>
           <a:prstGeom prst="roundRect">
             <a:avLst>
-              <a:gd name="adj" fmla="val 12002"/>
+              <a:gd name="adj" fmla="val 10716"/>
             </a:avLst>
           </a:prstGeom>
           <a:solidFill>
@@ -7323,8 +7254,8 @@
         </p:blipFill>
         <p:spPr>
           <a:xfrm>
-            <a:off x="5448002" y="2017365"/>
-            <a:ext cx="355550" cy="355550"/>
+            <a:off x="5428952" y="1943844"/>
+            <a:ext cx="393650" cy="393650"/>
           </a:xfrm>
           <a:prstGeom prst="rect">
             <a:avLst/>
@@ -7339,8 +7270,8 @@
         </p:nvSpPr>
         <p:spPr>
           <a:xfrm>
-            <a:off x="5340307" y="2614166"/>
-            <a:ext cx="571089" cy="206425"/>
+            <a:off x="5296285" y="2597795"/>
+            <a:ext cx="658984" cy="238125"/>
           </a:xfrm>
           <a:prstGeom prst="rect">
             <a:avLst/>
@@ -7354,12 +7285,12 @@
           <a:p>
             <a:pPr algn="ctr" indent="0" marL="0">
               <a:lnSpc>
-                <a:spcPts val="1625"/>
+                <a:spcPts val="1875"/>
               </a:lnSpc>
               <a:buNone/>
             </a:pPr>
             <a:r>
-              <a:rPr lang="en-US" sz="1300" b="1" dirty="0">
+              <a:rPr lang="en-US" sz="1500" b="1" dirty="0">
                 <a:solidFill>
                   <a:srgbClr val="1F2328"/>
                 </a:solidFill>
@@ -7369,7 +7300,7 @@
               </a:rPr>
               <a:t>Verifier</a:t>
             </a:r>
-            <a:endParaRPr lang="en-US" sz="1300" dirty="0"/>
+            <a:endParaRPr lang="en-US" sz="1500" dirty="0"/>
           </a:p>
         </p:txBody>
       </p:sp>
@@ -7381,8 +7312,8 @@
         </p:nvSpPr>
         <p:spPr>
           <a:xfrm>
-            <a:off x="4987210" y="2922091"/>
-            <a:ext cx="1277285" cy="180082"/>
+            <a:off x="4865767" y="2937421"/>
+            <a:ext cx="1520020" cy="214313"/>
           </a:xfrm>
           <a:prstGeom prst="rect">
             <a:avLst/>
@@ -7396,12 +7327,12 @@
           <a:p>
             <a:pPr algn="ctr" indent="0" marL="0">
               <a:lnSpc>
-                <a:spcPts val="1418"/>
+                <a:spcPts val="1688"/>
               </a:lnSpc>
               <a:buNone/>
             </a:pPr>
             <a:r>
-              <a:rPr lang="en-US" sz="1050" dirty="0">
+              <a:rPr lang="en-US" sz="1250" dirty="0">
                 <a:solidFill>
                   <a:srgbClr val="59636E"/>
                 </a:solidFill>
@@ -7411,7 +7342,7 @@
               </a:rPr>
               <a:t>scripts/verify-app.mjs</a:t>
             </a:r>
-            <a:endParaRPr lang="en-US" sz="1050" dirty="0"/>
+            <a:endParaRPr lang="en-US" sz="1250" dirty="0"/>
           </a:p>
         </p:txBody>
       </p:sp>
@@ -7423,8 +7354,8 @@
         </p:nvSpPr>
         <p:spPr>
           <a:xfrm>
-            <a:off x="6576170" y="2076152"/>
-            <a:ext cx="207365" cy="238125"/>
+            <a:off x="6563267" y="2007394"/>
+            <a:ext cx="233172" cy="266700"/>
           </a:xfrm>
           <a:prstGeom prst="rect">
             <a:avLst/>
@@ -7440,7 +7371,7 @@
               <a:buNone/>
             </a:pPr>
             <a:r>
-              <a:rPr lang="en-US" sz="1600" dirty="0">
+              <a:rPr lang="en-US" sz="1800" dirty="0">
                 <a:solidFill>
                   <a:srgbClr val="818B98"/>
                 </a:solidFill>
@@ -7450,7 +7381,7 @@
               </a:rPr>
               <a:t>→</a:t>
             </a:r>
-            <a:endParaRPr lang="en-US" sz="1600" dirty="0"/>
+            <a:endParaRPr lang="en-US" sz="1800" dirty="0"/>
           </a:p>
         </p:txBody>
       </p:sp>
@@ -7462,12 +7393,12 @@
         </p:nvSpPr>
         <p:spPr>
           <a:xfrm>
-            <a:off x="7416552" y="1877764"/>
-            <a:ext cx="634901" cy="634901"/>
+            <a:off x="7378452" y="1785193"/>
+            <a:ext cx="711101" cy="711101"/>
           </a:xfrm>
           <a:prstGeom prst="roundRect">
             <a:avLst>
-              <a:gd name="adj" fmla="val 12002"/>
+              <a:gd name="adj" fmla="val 10716"/>
             </a:avLst>
           </a:prstGeom>
           <a:solidFill>
@@ -7502,8 +7433,8 @@
         </p:blipFill>
         <p:spPr>
           <a:xfrm>
-            <a:off x="7556153" y="2017365"/>
-            <a:ext cx="355550" cy="355550"/>
+            <a:off x="7537103" y="1943844"/>
+            <a:ext cx="393650" cy="393650"/>
           </a:xfrm>
           <a:prstGeom prst="rect">
             <a:avLst/>
@@ -7518,8 +7449,8 @@
         </p:nvSpPr>
         <p:spPr>
           <a:xfrm>
-            <a:off x="7448458" y="2614166"/>
-            <a:ext cx="571089" cy="206425"/>
+            <a:off x="7404436" y="2597795"/>
+            <a:ext cx="658984" cy="238125"/>
           </a:xfrm>
           <a:prstGeom prst="rect">
             <a:avLst/>
@@ -7533,12 +7464,12 @@
           <a:p>
             <a:pPr algn="ctr" indent="0" marL="0">
               <a:lnSpc>
-                <a:spcPts val="1625"/>
+                <a:spcPts val="1875"/>
               </a:lnSpc>
               <a:buNone/>
             </a:pPr>
             <a:r>
-              <a:rPr lang="en-US" sz="1300" b="1" dirty="0">
+              <a:rPr lang="en-US" sz="1500" b="1" dirty="0">
                 <a:solidFill>
                   <a:srgbClr val="1F2328"/>
                 </a:solidFill>
@@ -7548,7 +7479,7 @@
               </a:rPr>
               <a:t>/review</a:t>
             </a:r>
-            <a:endParaRPr lang="en-US" sz="1300" dirty="0"/>
+            <a:endParaRPr lang="en-US" sz="1500" dirty="0"/>
           </a:p>
         </p:txBody>
       </p:sp>
@@ -7560,8 +7491,8 @@
         </p:nvSpPr>
         <p:spPr>
           <a:xfrm>
-            <a:off x="6841544" y="2922091"/>
-            <a:ext cx="1784768" cy="180082"/>
+            <a:off x="6801314" y="2937421"/>
+            <a:ext cx="1865376" cy="428625"/>
           </a:xfrm>
           <a:prstGeom prst="rect">
             <a:avLst/>
@@ -7575,12 +7506,12 @@
           <a:p>
             <a:pPr algn="ctr" indent="0" marL="0">
               <a:lnSpc>
-                <a:spcPts val="1418"/>
+                <a:spcPts val="1688"/>
               </a:lnSpc>
               <a:buNone/>
             </a:pPr>
             <a:r>
-              <a:rPr lang="en-US" sz="1050" dirty="0">
+              <a:rPr lang="en-US" sz="1250" dirty="0">
                 <a:solidFill>
                   <a:srgbClr val="59636E"/>
                 </a:solidFill>
@@ -7590,7 +7521,7 @@
               </a:rPr>
               <a:t>A second opinion on the code</a:t>
             </a:r>
-            <a:endParaRPr lang="en-US" sz="1050" dirty="0"/>
+            <a:endParaRPr lang="en-US" sz="1250" dirty="0"/>
           </a:p>
         </p:txBody>
       </p:sp>
@@ -7602,12 +7533,12 @@
         </p:nvSpPr>
         <p:spPr>
           <a:xfrm>
-            <a:off x="2017216" y="3714006"/>
-            <a:ext cx="5109270" cy="427732"/>
+            <a:off x="1642467" y="3823246"/>
+            <a:ext cx="5858619" cy="462111"/>
           </a:xfrm>
           <a:prstGeom prst="roundRect">
             <a:avLst>
-              <a:gd name="adj" fmla="val 17815"/>
+              <a:gd name="adj" fmla="val 16490"/>
             </a:avLst>
           </a:prstGeom>
           <a:solidFill>
@@ -7646,7 +7577,7 @@
         </p:blipFill>
         <p:spPr>
           <a:xfrm>
-            <a:off x="2179141" y="3839021"/>
+            <a:off x="1804392" y="3965377"/>
             <a:ext cx="177701" cy="177701"/>
           </a:xfrm>
           <a:prstGeom prst="rect">
@@ -7662,8 +7593,8 @@
         </p:nvSpPr>
         <p:spPr>
           <a:xfrm>
-            <a:off x="2458343" y="3825032"/>
-            <a:ext cx="4596342" cy="205680"/>
+            <a:off x="2083594" y="3934271"/>
+            <a:ext cx="5360679" cy="240060"/>
           </a:xfrm>
           <a:prstGeom prst="rect">
             <a:avLst/>
@@ -7677,12 +7608,12 @@
           <a:p>
             <a:pPr algn="l" indent="0" marL="0">
               <a:lnSpc>
-                <a:spcPts val="1620"/>
+                <a:spcPts val="1890"/>
               </a:lnSpc>
               <a:buNone/>
             </a:pPr>
             <a:r>
-              <a:rPr lang="en-US" sz="1200" dirty="0">
+              <a:rPr lang="en-US" sz="1400" dirty="0">
                 <a:solidFill>
                   <a:srgbClr val="1F2328"/>
                 </a:solidFill>
@@ -7694,12 +7625,12 @@
             </a:r>
             <a:pPr algn="l" indent="0" marL="0">
               <a:lnSpc>
-                <a:spcPts val="1620"/>
+                <a:spcPts val="1890"/>
               </a:lnSpc>
               <a:buNone/>
             </a:pPr>
             <a:r>
-              <a:rPr lang="en-US" sz="1200" b="1" dirty="0">
+              <a:rPr lang="en-US" sz="1400" b="1" dirty="0">
                 <a:solidFill>
                   <a:srgbClr val="1F2328"/>
                 </a:solidFill>
@@ -7709,7 +7640,7 @@
               </a:rPr>
               <a:t>Never weaken the app to make a test pass.</a:t>
             </a:r>
-            <a:endParaRPr lang="en-US" sz="1200" dirty="0"/>
+            <a:endParaRPr lang="en-US" sz="1400" dirty="0"/>
           </a:p>
         </p:txBody>
       </p:sp>
@@ -7753,12 +7684,12 @@
         </p:nvSpPr>
         <p:spPr>
           <a:xfrm>
-            <a:off x="7446466" y="152400"/>
-            <a:ext cx="1113383" cy="266700"/>
+            <a:off x="7325916" y="152400"/>
+            <a:ext cx="1233934" cy="279350"/>
           </a:xfrm>
           <a:prstGeom prst="roundRect">
             <a:avLst>
-              <a:gd name="adj" fmla="val 23810"/>
+              <a:gd name="adj" fmla="val 22731"/>
             </a:avLst>
           </a:prstGeom>
           <a:solidFill>
@@ -7785,8 +7716,8 @@
         </p:nvSpPr>
         <p:spPr>
           <a:xfrm>
-            <a:off x="7564822" y="219075"/>
-            <a:ext cx="876672" cy="133350"/>
+            <a:off x="7455969" y="220563"/>
+            <a:ext cx="973827" cy="142875"/>
           </a:xfrm>
           <a:prstGeom prst="rect">
             <a:avLst/>
@@ -7802,7 +7733,7 @@
               <a:buNone/>
             </a:pPr>
             <a:r>
-              <a:rPr lang="en-US" sz="900" b="1" dirty="0">
+              <a:rPr lang="en-US" sz="1000" b="1" dirty="0">
                 <a:solidFill>
                   <a:srgbClr val="FFFFFF"/>
                 </a:solidFill>
@@ -7812,7 +7743,7 @@
               </a:rPr>
               <a:t>WEATHERVIEW</a:t>
             </a:r>
-            <a:endParaRPr lang="en-US" sz="900" dirty="0"/>
+            <a:endParaRPr lang="en-US" sz="1000" dirty="0"/>
           </a:p>
         </p:txBody>
       </p:sp>
@@ -7849,7 +7780,7 @@
         <p:spPr>
           <a:xfrm>
             <a:off x="482501" y="330101"/>
-            <a:ext cx="7772400" cy="142875"/>
+            <a:ext cx="8342275" cy="152400"/>
           </a:xfrm>
           <a:prstGeom prst="rect">
             <a:avLst/>
@@ -7865,7 +7796,7 @@
               <a:buNone/>
             </a:pPr>
             <a:r>
-              <a:rPr lang="en-US" sz="1000" b="1" dirty="0">
+              <a:rPr lang="en-US" sz="1100" b="1" dirty="0">
                 <a:solidFill>
                   <a:srgbClr val="8250DF"/>
                 </a:solidFill>
@@ -7875,7 +7806,7 @@
               </a:rPr>
               <a:t>GENERATE TESTS</a:t>
             </a:r>
-            <a:endParaRPr lang="en-US" sz="1000" dirty="0"/>
+            <a:endParaRPr lang="en-US" sz="1100" dirty="0"/>
           </a:p>
         </p:txBody>
       </p:sp>
@@ -7887,8 +7818,8 @@
         </p:nvSpPr>
         <p:spPr>
           <a:xfrm>
-            <a:off x="482501" y="523726"/>
-            <a:ext cx="7772400" cy="393650"/>
+            <a:off x="482501" y="533251"/>
+            <a:ext cx="8342275" cy="419100"/>
           </a:xfrm>
           <a:prstGeom prst="rect">
             <a:avLst/>
@@ -7902,7 +7833,7 @@
           <a:p>
             <a:pPr algn="l" indent="0" marL="0">
               <a:lnSpc>
-                <a:spcPts val="3100"/>
+                <a:spcPts val="3300"/>
               </a:lnSpc>
               <a:spcBef>
                 <a:spcPts val="400"/>
@@ -7910,7 +7841,7 @@
               <a:buNone/>
             </a:pPr>
             <a:r>
-              <a:rPr lang="en-US" sz="2600" b="1" dirty="0">
+              <a:rPr lang="en-US" sz="2800" b="1" dirty="0">
                 <a:solidFill>
                   <a:srgbClr val="1F2328"/>
                 </a:solidFill>
@@ -7920,7 +7851,7 @@
               </a:rPr>
               <a:t>Make the plan testable</a:t>
             </a:r>
-            <a:endParaRPr lang="en-US" sz="2600" dirty="0"/>
+            <a:endParaRPr lang="en-US" sz="2800" dirty="0"/>
           </a:p>
         </p:txBody>
       </p:sp>
@@ -7932,12 +7863,12 @@
         </p:nvSpPr>
         <p:spPr>
           <a:xfrm>
-            <a:off x="634901" y="2067818"/>
-            <a:ext cx="7873901" cy="1934766"/>
+            <a:off x="634901" y="1846064"/>
+            <a:ext cx="7873901" cy="2429173"/>
           </a:xfrm>
           <a:prstGeom prst="roundRect">
             <a:avLst>
-              <a:gd name="adj" fmla="val 5251"/>
+              <a:gd name="adj" fmla="val 4183"/>
             </a:avLst>
           </a:prstGeom>
           <a:solidFill>
@@ -7971,7 +7902,7 @@
         </p:nvSpPr>
         <p:spPr>
           <a:xfrm>
-            <a:off x="634901" y="2072580"/>
+            <a:off x="634901" y="1850827"/>
             <a:ext cx="7873901" cy="0"/>
           </a:xfrm>
           <a:prstGeom prst="line">
@@ -7994,8 +7925,8 @@
         </p:nvSpPr>
         <p:spPr>
           <a:xfrm>
-            <a:off x="8504039" y="2067818"/>
-            <a:ext cx="0" cy="1934766"/>
+            <a:off x="8504039" y="1846064"/>
+            <a:ext cx="0" cy="2429173"/>
           </a:xfrm>
           <a:prstGeom prst="line">
             <a:avLst/>
@@ -8017,7 +7948,7 @@
         </p:nvSpPr>
         <p:spPr>
           <a:xfrm>
-            <a:off x="634901" y="3997821"/>
+            <a:off x="634901" y="4270474"/>
             <a:ext cx="7873901" cy="0"/>
           </a:xfrm>
           <a:prstGeom prst="line">
@@ -8040,8 +7971,8 @@
         </p:nvSpPr>
         <p:spPr>
           <a:xfrm>
-            <a:off x="663476" y="2067818"/>
-            <a:ext cx="0" cy="1934766"/>
+            <a:off x="663476" y="1846064"/>
+            <a:ext cx="0" cy="2429173"/>
           </a:xfrm>
           <a:prstGeom prst="line">
             <a:avLst/>
@@ -8071,8 +8002,8 @@
         </p:blipFill>
         <p:spPr>
           <a:xfrm>
-            <a:off x="945952" y="2280493"/>
-            <a:ext cx="165050" cy="165050"/>
+            <a:off x="971401" y="2084189"/>
+            <a:ext cx="190500" cy="190500"/>
           </a:xfrm>
           <a:prstGeom prst="rect">
             <a:avLst/>
@@ -8087,8 +8018,8 @@
         </p:nvSpPr>
         <p:spPr>
           <a:xfrm>
-            <a:off x="1187202" y="2296269"/>
-            <a:ext cx="1220054" cy="133350"/>
+            <a:off x="1238101" y="2103239"/>
+            <a:ext cx="1423169" cy="152400"/>
           </a:xfrm>
           <a:prstGeom prst="rect">
             <a:avLst/>
@@ -8104,7 +8035,7 @@
               <a:buNone/>
             </a:pPr>
             <a:r>
-              <a:rPr lang="en-US" sz="900" dirty="0">
+              <a:rPr lang="en-US" sz="1050" dirty="0">
                 <a:solidFill>
                   <a:srgbClr val="8250DF"/>
                 </a:solidFill>
@@ -8118,7 +8049,7 @@
               <a:buNone/>
             </a:pPr>
             <a:r>
-              <a:rPr lang="en-US" sz="900" b="1" dirty="0">
+              <a:rPr lang="en-US" sz="1050" b="1" dirty="0">
                 <a:solidFill>
                   <a:srgbClr val="818B98"/>
                 </a:solidFill>
@@ -8128,7 +8059,7 @@
               </a:rPr>
               <a:t> · ABRIDGED</a:t>
             </a:r>
-            <a:endParaRPr lang="en-US" sz="900" dirty="0"/>
+            <a:endParaRPr lang="en-US" sz="1050" dirty="0"/>
           </a:p>
         </p:txBody>
       </p:sp>
@@ -8140,8 +8071,8 @@
         </p:nvSpPr>
         <p:spPr>
           <a:xfrm>
-            <a:off x="945952" y="2547045"/>
-            <a:ext cx="7445413" cy="1217414"/>
+            <a:off x="971401" y="2388840"/>
+            <a:ext cx="7393496" cy="1622971"/>
           </a:xfrm>
           <a:prstGeom prst="rect">
             <a:avLst/>
@@ -8155,12 +8086,12 @@
           <a:p>
             <a:pPr algn="l" indent="0" marL="0">
               <a:lnSpc>
-                <a:spcPts val="1917"/>
+                <a:spcPts val="2556"/>
               </a:lnSpc>
               <a:buNone/>
             </a:pPr>
             <a:r>
-              <a:rPr lang="en-US" sz="1350" dirty="0">
+              <a:rPr lang="en-US" sz="1800" dirty="0">
                 <a:solidFill>
                   <a:srgbClr val="1F2328"/>
                 </a:solidFill>
@@ -8172,12 +8103,12 @@
             </a:r>
             <a:pPr algn="l" indent="0" marL="0">
               <a:lnSpc>
-                <a:spcPts val="1917"/>
+                <a:spcPts val="2556"/>
               </a:lnSpc>
               <a:buNone/>
             </a:pPr>
             <a:r>
-              <a:rPr lang="en-US" sz="1350" b="1" dirty="0">
+              <a:rPr lang="en-US" sz="1800" b="1" dirty="0">
                 <a:solidFill>
                   <a:srgbClr val="1F2328"/>
                 </a:solidFill>
@@ -8189,12 +8120,12 @@
             </a:r>
             <a:pPr algn="l" indent="0" marL="0">
               <a:lnSpc>
-                <a:spcPts val="1917"/>
+                <a:spcPts val="2556"/>
               </a:lnSpc>
               <a:buNone/>
             </a:pPr>
             <a:r>
-              <a:rPr lang="en-US" sz="1350" dirty="0">
+              <a:rPr lang="en-US" sz="1800" dirty="0">
                 <a:solidFill>
                   <a:srgbClr val="1F2328"/>
                 </a:solidFill>
@@ -8202,16 +8133,16 @@
                 <a:ea typeface="Arial" pitchFamily="34" charset="-122"/>
                 <a:cs typeface="Arial" pitchFamily="34" charset="-120"/>
               </a:rPr>
-              <a:t> for success, no-result, malformed-payload, and network-failure cases. They must assert exactly five cards, city search, unit refetch, preference persistence, retry behavior, accessible names, and visible keyboard focus. … </a:t>
+              <a:t> for success, no-result, malformed-payload, and network-failure cases. … </a:t>
             </a:r>
             <a:pPr algn="l" indent="0" marL="0">
               <a:lnSpc>
-                <a:spcPts val="1917"/>
+                <a:spcPts val="2556"/>
               </a:lnSpc>
               <a:buNone/>
             </a:pPr>
             <a:r>
-              <a:rPr lang="en-US" sz="1350" b="1" dirty="0">
+              <a:rPr lang="en-US" sz="1800" b="1" dirty="0">
                 <a:solidFill>
                   <a:srgbClr val="1F2328"/>
                 </a:solidFill>
@@ -8221,7 +8152,7 @@
               </a:rPr>
               <a:t>Do not weaken application behavior to make tests pass.</a:t>
             </a:r>
-            <a:endParaRPr lang="en-US" sz="1350" dirty="0"/>
+            <a:endParaRPr lang="en-US" sz="1800" dirty="0"/>
           </a:p>
         </p:txBody>
       </p:sp>
@@ -8265,12 +8196,12 @@
         </p:nvSpPr>
         <p:spPr>
           <a:xfrm>
-            <a:off x="7446466" y="152400"/>
-            <a:ext cx="1113383" cy="266700"/>
+            <a:off x="7325916" y="152400"/>
+            <a:ext cx="1233934" cy="279350"/>
           </a:xfrm>
           <a:prstGeom prst="roundRect">
             <a:avLst>
-              <a:gd name="adj" fmla="val 23810"/>
+              <a:gd name="adj" fmla="val 22731"/>
             </a:avLst>
           </a:prstGeom>
           <a:solidFill>
@@ -8297,8 +8228,8 @@
         </p:nvSpPr>
         <p:spPr>
           <a:xfrm>
-            <a:off x="7564822" y="219075"/>
-            <a:ext cx="876672" cy="133350"/>
+            <a:off x="7455969" y="220563"/>
+            <a:ext cx="973827" cy="142875"/>
           </a:xfrm>
           <a:prstGeom prst="rect">
             <a:avLst/>
@@ -8314,7 +8245,7 @@
               <a:buNone/>
             </a:pPr>
             <a:r>
-              <a:rPr lang="en-US" sz="900" b="1" dirty="0">
+              <a:rPr lang="en-US" sz="1000" b="1" dirty="0">
                 <a:solidFill>
                   <a:srgbClr val="FFFFFF"/>
                 </a:solidFill>
@@ -8324,7 +8255,7 @@
               </a:rPr>
               <a:t>WEATHERVIEW</a:t>
             </a:r>
-            <a:endParaRPr lang="en-US" sz="900" dirty="0"/>
+            <a:endParaRPr lang="en-US" sz="1000" dirty="0"/>
           </a:p>
         </p:txBody>
       </p:sp>
@@ -8361,7 +8292,7 @@
         <p:spPr>
           <a:xfrm>
             <a:off x="482501" y="330101"/>
-            <a:ext cx="7772400" cy="142875"/>
+            <a:ext cx="8342275" cy="152400"/>
           </a:xfrm>
           <a:prstGeom prst="rect">
             <a:avLst/>
@@ -8377,7 +8308,7 @@
               <a:buNone/>
             </a:pPr>
             <a:r>
-              <a:rPr lang="en-US" sz="1000" b="1" dirty="0">
+              <a:rPr lang="en-US" sz="1100" b="1" dirty="0">
                 <a:solidFill>
                   <a:srgbClr val="8250DF"/>
                 </a:solidFill>
@@ -8387,7 +8318,7 @@
               </a:rPr>
               <a:t>SECOND OPINION</a:t>
             </a:r>
-            <a:endParaRPr lang="en-US" sz="1000" dirty="0"/>
+            <a:endParaRPr lang="en-US" sz="1100" dirty="0"/>
           </a:p>
         </p:txBody>
       </p:sp>
@@ -8399,8 +8330,8 @@
         </p:nvSpPr>
         <p:spPr>
           <a:xfrm>
-            <a:off x="482501" y="523726"/>
-            <a:ext cx="7772400" cy="393650"/>
+            <a:off x="482501" y="533251"/>
+            <a:ext cx="8342275" cy="419100"/>
           </a:xfrm>
           <a:prstGeom prst="rect">
             <a:avLst/>
@@ -8414,7 +8345,7 @@
           <a:p>
             <a:pPr algn="l" indent="0" marL="0">
               <a:lnSpc>
-                <a:spcPts val="3100"/>
+                <a:spcPts val="3300"/>
               </a:lnSpc>
               <a:spcBef>
                 <a:spcPts val="400"/>
@@ -8422,7 +8353,7 @@
               <a:buNone/>
             </a:pPr>
             <a:r>
-              <a:rPr lang="en-US" sz="2600" b="1" dirty="0">
+              <a:rPr lang="en-US" sz="2800" b="1" dirty="0">
                 <a:solidFill>
                   <a:srgbClr val="1F2328"/>
                 </a:solidFill>
@@ -8432,7 +8363,7 @@
               </a:rPr>
               <a:t>Review against the plan</a:t>
             </a:r>
-            <a:endParaRPr lang="en-US" sz="2600" dirty="0"/>
+            <a:endParaRPr lang="en-US" sz="2800" dirty="0"/>
           </a:p>
         </p:txBody>
       </p:sp>
@@ -8444,12 +8375,12 @@
         </p:nvSpPr>
         <p:spPr>
           <a:xfrm>
-            <a:off x="634901" y="1790700"/>
-            <a:ext cx="7873901" cy="2082850"/>
+            <a:off x="634901" y="1767036"/>
+            <a:ext cx="7873901" cy="2104579"/>
           </a:xfrm>
           <a:prstGeom prst="roundRect">
             <a:avLst>
-              <a:gd name="adj" fmla="val 4878"/>
+              <a:gd name="adj" fmla="val 4828"/>
             </a:avLst>
           </a:prstGeom>
           <a:solidFill>
@@ -8483,7 +8414,7 @@
         </p:nvSpPr>
         <p:spPr>
           <a:xfrm>
-            <a:off x="634901" y="1795462"/>
+            <a:off x="634901" y="1771799"/>
             <a:ext cx="7873901" cy="0"/>
           </a:xfrm>
           <a:prstGeom prst="line">
@@ -8506,8 +8437,8 @@
         </p:nvSpPr>
         <p:spPr>
           <a:xfrm>
-            <a:off x="8504039" y="1790700"/>
-            <a:ext cx="0" cy="2082850"/>
+            <a:off x="8504039" y="1767036"/>
+            <a:ext cx="0" cy="2104579"/>
           </a:xfrm>
           <a:prstGeom prst="line">
             <a:avLst/>
@@ -8529,7 +8460,7 @@
         </p:nvSpPr>
         <p:spPr>
           <a:xfrm>
-            <a:off x="634901" y="3868787"/>
+            <a:off x="634901" y="3866852"/>
             <a:ext cx="7873901" cy="0"/>
           </a:xfrm>
           <a:prstGeom prst="line">
@@ -8552,8 +8483,8 @@
         </p:nvSpPr>
         <p:spPr>
           <a:xfrm>
-            <a:off x="663476" y="1790700"/>
-            <a:ext cx="0" cy="2082850"/>
+            <a:off x="663476" y="1767036"/>
+            <a:ext cx="0" cy="2104579"/>
           </a:xfrm>
           <a:prstGeom prst="line">
             <a:avLst/>
@@ -8583,8 +8514,8 @@
         </p:blipFill>
         <p:spPr>
           <a:xfrm>
-            <a:off x="945952" y="2003375"/>
-            <a:ext cx="165050" cy="165050"/>
+            <a:off x="971401" y="2005161"/>
+            <a:ext cx="190500" cy="190500"/>
           </a:xfrm>
           <a:prstGeom prst="rect">
             <a:avLst/>
@@ -8599,8 +8530,8 @@
         </p:nvSpPr>
         <p:spPr>
           <a:xfrm>
-            <a:off x="1187202" y="2019151"/>
-            <a:ext cx="498830" cy="133350"/>
+            <a:off x="1238101" y="2024211"/>
+            <a:ext cx="1423169" cy="152400"/>
           </a:xfrm>
           <a:prstGeom prst="rect">
             <a:avLst/>
@@ -8616,7 +8547,7 @@
               <a:buNone/>
             </a:pPr>
             <a:r>
-              <a:rPr lang="en-US" sz="900" b="1" dirty="0">
+              <a:rPr lang="en-US" sz="1050" dirty="0">
                 <a:solidFill>
                   <a:srgbClr val="8250DF"/>
                 </a:solidFill>
@@ -8626,7 +8557,21 @@
               </a:rPr>
               <a:t>PROMPT</a:t>
             </a:r>
-            <a:endParaRPr lang="en-US" sz="900" dirty="0"/>
+            <a:pPr algn="l" indent="0" marL="0">
+              <a:buNone/>
+            </a:pPr>
+            <a:r>
+              <a:rPr lang="en-US" sz="1050" b="1" dirty="0">
+                <a:solidFill>
+                  <a:srgbClr val="818B98"/>
+                </a:solidFill>
+                <a:latin typeface="Arial" pitchFamily="34" charset="0"/>
+                <a:ea typeface="Arial" pitchFamily="34" charset="-122"/>
+                <a:cs typeface="Arial" pitchFamily="34" charset="-120"/>
+              </a:rPr>
+              <a:t> · ABRIDGED</a:t>
+            </a:r>
+            <a:endParaRPr lang="en-US" sz="1050" dirty="0"/>
           </a:p>
         </p:txBody>
       </p:sp>
@@ -8638,8 +8583,8 @@
         </p:nvSpPr>
         <p:spPr>
           <a:xfrm>
-            <a:off x="945952" y="2282577"/>
-            <a:ext cx="7445413" cy="1352848"/>
+            <a:off x="971401" y="2309813"/>
+            <a:ext cx="7393496" cy="1298377"/>
           </a:xfrm>
           <a:prstGeom prst="rect">
             <a:avLst/>
@@ -8653,12 +8598,12 @@
           <a:p>
             <a:pPr algn="l" indent="0" marL="0">
               <a:lnSpc>
-                <a:spcPts val="2130"/>
+                <a:spcPts val="2556"/>
               </a:lnSpc>
               <a:buNone/>
             </a:pPr>
             <a:r>
-              <a:rPr lang="en-US" sz="1500" b="1" dirty="0">
+              <a:rPr lang="en-US" sz="1800" b="1" dirty="0">
                 <a:solidFill>
                   <a:srgbClr val="1F2328"/>
                 </a:solidFill>
@@ -8670,12 +8615,12 @@
             </a:r>
             <a:pPr algn="l" indent="0" marL="0">
               <a:lnSpc>
-                <a:spcPts val="2130"/>
+                <a:spcPts val="2556"/>
               </a:lnSpc>
               <a:buNone/>
             </a:pPr>
             <a:r>
-              <a:rPr lang="en-US" sz="1500" dirty="0">
+              <a:rPr lang="en-US" sz="1800" dirty="0">
                 <a:solidFill>
                   <a:srgbClr val="1F2328"/>
                 </a:solidFill>
@@ -8683,9 +8628,43 @@
                 <a:ea typeface="Arial" pitchFamily="34" charset="-122"/>
                 <a:cs typeface="Arial" pitchFamily="34" charset="-120"/>
               </a:rPr>
-              <a:t> Review the completed WeatherView implementation against PLAN.md. Skip the "Azure Deployment" section; Phase 3 builds it. Focus on correctness, accessibility, resilience, performance, browser security, and test gaps. Identify missing or incorrectly implemented requirements with file and line evidence. Do not suggest a framework rewrite.</a:t>
-            </a:r>
-            <a:endParaRPr lang="en-US" sz="1500" dirty="0"/>
+              <a:t> Review the completed WeatherView implementation against PLAN.md. … Focus on correctness, accessibility, resilience, performance, browser security, and test gaps. Identify missing or incorrectly implemented requirements </a:t>
+            </a:r>
+            <a:pPr algn="l" indent="0" marL="0">
+              <a:lnSpc>
+                <a:spcPts val="2556"/>
+              </a:lnSpc>
+              <a:buNone/>
+            </a:pPr>
+            <a:r>
+              <a:rPr lang="en-US" sz="1800" b="1" dirty="0">
+                <a:solidFill>
+                  <a:srgbClr val="1F2328"/>
+                </a:solidFill>
+                <a:latin typeface="Arial" pitchFamily="34" charset="0"/>
+                <a:ea typeface="Arial" pitchFamily="34" charset="-122"/>
+                <a:cs typeface="Arial" pitchFamily="34" charset="-120"/>
+              </a:rPr>
+              <a:t>with file and line evidence</a:t>
+            </a:r>
+            <a:pPr algn="l" indent="0" marL="0">
+              <a:lnSpc>
+                <a:spcPts val="2556"/>
+              </a:lnSpc>
+              <a:buNone/>
+            </a:pPr>
+            <a:r>
+              <a:rPr lang="en-US" sz="1800" dirty="0">
+                <a:solidFill>
+                  <a:srgbClr val="1F2328"/>
+                </a:solidFill>
+                <a:latin typeface="Arial" pitchFamily="34" charset="0"/>
+                <a:ea typeface="Arial" pitchFamily="34" charset="-122"/>
+                <a:cs typeface="Arial" pitchFamily="34" charset="-120"/>
+              </a:rPr>
+              <a:t>.</a:t>
+            </a:r>
+            <a:endParaRPr lang="en-US" sz="1800" dirty="0"/>
           </a:p>
         </p:txBody>
       </p:sp>
@@ -8705,8 +8684,8 @@
         </p:blipFill>
         <p:spPr>
           <a:xfrm>
-            <a:off x="634901" y="4089350"/>
-            <a:ext cx="177701" cy="177701"/>
+            <a:off x="634901" y="4131915"/>
+            <a:ext cx="215801" cy="215801"/>
           </a:xfrm>
           <a:prstGeom prst="rect">
             <a:avLst/>
@@ -8721,8 +8700,8 @@
         </p:nvSpPr>
         <p:spPr>
           <a:xfrm>
-            <a:off x="914102" y="4076700"/>
-            <a:ext cx="5771918" cy="203150"/>
+            <a:off x="952202" y="4125516"/>
+            <a:ext cx="6731627" cy="228600"/>
           </a:xfrm>
           <a:prstGeom prst="rect">
             <a:avLst/>
@@ -8736,12 +8715,12 @@
           <a:p>
             <a:pPr algn="l" indent="0" marL="0">
               <a:lnSpc>
-                <a:spcPts val="1600"/>
+                <a:spcPts val="1800"/>
               </a:lnSpc>
               <a:buNone/>
             </a:pPr>
             <a:r>
-              <a:rPr lang="en-US" sz="1200" dirty="0">
+              <a:rPr lang="en-US" sz="1400" dirty="0">
                 <a:solidFill>
                   <a:srgbClr val="59636E"/>
                 </a:solidFill>
@@ -8753,12 +8732,12 @@
             </a:r>
             <a:pPr algn="l" indent="0" marL="0">
               <a:lnSpc>
-                <a:spcPts val="1600"/>
+                <a:spcPts val="1800"/>
               </a:lnSpc>
               <a:buNone/>
             </a:pPr>
             <a:r>
-              <a:rPr lang="en-US" sz="1200" b="1" dirty="0">
+              <a:rPr lang="en-US" sz="1400" b="1" dirty="0">
                 <a:solidFill>
                   <a:srgbClr val="59636E"/>
                 </a:solidFill>
@@ -8770,12 +8749,12 @@
             </a:r>
             <a:pPr algn="l" indent="0" marL="0">
               <a:lnSpc>
-                <a:spcPts val="1600"/>
+                <a:spcPts val="1800"/>
               </a:lnSpc>
               <a:buNone/>
             </a:pPr>
             <a:r>
-              <a:rPr lang="en-US" sz="1200" dirty="0">
+              <a:rPr lang="en-US" sz="1400" dirty="0">
                 <a:solidFill>
                   <a:srgbClr val="59636E"/>
                 </a:solidFill>
@@ -8785,7 +8764,7 @@
               </a:rPr>
               <a:t>, and rerun everything.</a:t>
             </a:r>
-            <a:endParaRPr lang="en-US" sz="1200" dirty="0"/>
+            <a:endParaRPr lang="en-US" sz="1400" dirty="0"/>
           </a:p>
         </p:txBody>
       </p:sp>
@@ -8829,12 +8808,12 @@
         </p:nvSpPr>
         <p:spPr>
           <a:xfrm>
-            <a:off x="7446466" y="152400"/>
-            <a:ext cx="1113383" cy="266700"/>
+            <a:off x="7325916" y="152400"/>
+            <a:ext cx="1233934" cy="279350"/>
           </a:xfrm>
           <a:prstGeom prst="roundRect">
             <a:avLst>
-              <a:gd name="adj" fmla="val 23810"/>
+              <a:gd name="adj" fmla="val 22731"/>
             </a:avLst>
           </a:prstGeom>
           <a:solidFill>
@@ -8861,8 +8840,8 @@
         </p:nvSpPr>
         <p:spPr>
           <a:xfrm>
-            <a:off x="7564822" y="219075"/>
-            <a:ext cx="876672" cy="133350"/>
+            <a:off x="7455969" y="220563"/>
+            <a:ext cx="973827" cy="142875"/>
           </a:xfrm>
           <a:prstGeom prst="rect">
             <a:avLst/>
@@ -8878,7 +8857,7 @@
               <a:buNone/>
             </a:pPr>
             <a:r>
-              <a:rPr lang="en-US" sz="900" b="1" dirty="0">
+              <a:rPr lang="en-US" sz="1000" b="1" dirty="0">
                 <a:solidFill>
                   <a:srgbClr val="FFFFFF"/>
                 </a:solidFill>
@@ -8888,7 +8867,7 @@
               </a:rPr>
               <a:t>WEATHERVIEW</a:t>
             </a:r>
-            <a:endParaRPr lang="en-US" sz="900" dirty="0"/>
+            <a:endParaRPr lang="en-US" sz="1000" dirty="0"/>
           </a:p>
         </p:txBody>
       </p:sp>
@@ -8997,7 +8976,7 @@
         <p:spPr>
           <a:xfrm>
             <a:off x="558701" y="1828651"/>
-            <a:ext cx="3886200" cy="142875"/>
+            <a:ext cx="3886200" cy="152400"/>
           </a:xfrm>
           <a:prstGeom prst="rect">
             <a:avLst/>
@@ -9016,7 +8995,7 @@
               <a:buNone/>
             </a:pPr>
             <a:r>
-              <a:rPr lang="en-US" sz="1000" b="1" dirty="0">
+              <a:rPr lang="en-US" sz="1100" b="1" dirty="0">
                 <a:solidFill>
                   <a:srgbClr val="59636E"/>
                 </a:solidFill>
@@ -9026,7 +9005,7 @@
               </a:rPr>
               <a:t>SECTION 3 OF 3</a:t>
             </a:r>
-            <a:endParaRPr lang="en-US" sz="1000" dirty="0"/>
+            <a:endParaRPr lang="en-US" sz="1100" dirty="0"/>
           </a:p>
         </p:txBody>
       </p:sp>
@@ -9038,8 +9017,8 @@
         </p:nvSpPr>
         <p:spPr>
           <a:xfrm>
-            <a:off x="558701" y="2034927"/>
-            <a:ext cx="3886200" cy="444550"/>
+            <a:off x="558701" y="2044452"/>
+            <a:ext cx="3886200" cy="469850"/>
           </a:xfrm>
           <a:prstGeom prst="rect">
             <a:avLst/>
@@ -9053,7 +9032,7 @@
           <a:p>
             <a:pPr algn="l" indent="0" marL="0">
               <a:lnSpc>
-                <a:spcPts val="3500"/>
+                <a:spcPts val="3700"/>
               </a:lnSpc>
               <a:spcBef>
                 <a:spcPts val="500"/>
@@ -9061,7 +9040,7 @@
               <a:buNone/>
             </a:pPr>
             <a:r>
-              <a:rPr lang="en-US" sz="3000" b="1" dirty="0">
+              <a:rPr lang="en-US" sz="3200" b="1" dirty="0">
                 <a:solidFill>
                   <a:srgbClr val="1F2328"/>
                 </a:solidFill>
@@ -9071,7 +9050,7 @@
               </a:rPr>
               <a:t>Deploy to Azure</a:t>
             </a:r>
-            <a:endParaRPr lang="en-US" sz="3000" dirty="0"/>
+            <a:endParaRPr lang="en-US" sz="3200" dirty="0"/>
           </a:p>
         </p:txBody>
       </p:sp>
@@ -9083,8 +9062,8 @@
         </p:nvSpPr>
         <p:spPr>
           <a:xfrm>
-            <a:off x="558701" y="2606427"/>
-            <a:ext cx="3886200" cy="723751"/>
+            <a:off x="558701" y="2666702"/>
+            <a:ext cx="3886200" cy="800100"/>
           </a:xfrm>
           <a:prstGeom prst="rect">
             <a:avLst/>
@@ -9098,15 +9077,15 @@
           <a:p>
             <a:pPr algn="l" indent="0" marL="0">
               <a:lnSpc>
-                <a:spcPts val="1900"/>
+                <a:spcPts val="2100"/>
               </a:lnSpc>
               <a:spcBef>
-                <a:spcPts val="1000"/>
+                <a:spcPts val="1200"/>
               </a:spcBef>
               <a:buNone/>
             </a:pPr>
             <a:r>
-              <a:rPr lang="en-US" sz="1400" dirty="0">
+              <a:rPr lang="en-US" sz="1600" dirty="0">
                 <a:solidFill>
                   <a:srgbClr val="59636E"/>
                 </a:solidFill>
@@ -9116,7 +9095,7 @@
               </a:rPr>
               <a:t>Let the agent write the Bicep, review it before anything is created, then ship with one command.</a:t>
             </a:r>
-            <a:endParaRPr lang="en-US" sz="1400" dirty="0"/>
+            <a:endParaRPr lang="en-US" sz="1600" dirty="0"/>
           </a:p>
         </p:txBody>
       </p:sp>
@@ -9196,11 +9175,11 @@
         <p:spPr>
           <a:xfrm>
             <a:off x="558701" y="4368701"/>
-            <a:ext cx="1270099" cy="336352"/>
+            <a:ext cx="1394520" cy="361652"/>
           </a:xfrm>
           <a:prstGeom prst="roundRect">
             <a:avLst>
-              <a:gd name="adj" fmla="val 52861"/>
+              <a:gd name="adj" fmla="val 52675"/>
             </a:avLst>
           </a:prstGeom>
           <a:solidFill>
@@ -9232,11 +9211,11 @@
         <p:spPr>
           <a:xfrm>
             <a:off x="644426" y="4441627"/>
-            <a:ext cx="190500" cy="190500"/>
+            <a:ext cx="215801" cy="215801"/>
           </a:xfrm>
           <a:prstGeom prst="roundRect">
             <a:avLst>
-              <a:gd name="adj" fmla="val 480000"/>
+              <a:gd name="adj" fmla="val 423724"/>
             </a:avLst>
           </a:prstGeom>
           <a:solidFill>
@@ -9263,8 +9242,8 @@
         </p:nvSpPr>
         <p:spPr>
           <a:xfrm>
-            <a:off x="710833" y="4479727"/>
-            <a:ext cx="57686" cy="114300"/>
+            <a:off x="719840" y="4482852"/>
+            <a:ext cx="64972" cy="133350"/>
           </a:xfrm>
           <a:prstGeom prst="rect">
             <a:avLst/>
@@ -9280,7 +9259,7 @@
               <a:buNone/>
             </a:pPr>
             <a:r>
-              <a:rPr lang="en-US" sz="800" b="1" dirty="0">
+              <a:rPr lang="en-US" sz="900" b="1" dirty="0">
                 <a:solidFill>
                   <a:srgbClr val="818B98"/>
                 </a:solidFill>
@@ -9290,7 +9269,7 @@
               </a:rPr>
               <a:t>1</a:t>
             </a:r>
-            <a:endParaRPr lang="en-US" sz="800" dirty="0"/>
+            <a:endParaRPr lang="en-US" sz="900" dirty="0"/>
           </a:p>
         </p:txBody>
       </p:sp>
@@ -9302,8 +9281,8 @@
         </p:nvSpPr>
         <p:spPr>
           <a:xfrm>
-            <a:off x="911126" y="4470202"/>
-            <a:ext cx="796823" cy="133350"/>
+            <a:off x="936427" y="4478089"/>
+            <a:ext cx="885021" cy="142875"/>
           </a:xfrm>
           <a:prstGeom prst="rect">
             <a:avLst/>
@@ -9319,7 +9298,7 @@
               <a:buNone/>
             </a:pPr>
             <a:r>
-              <a:rPr lang="en-US" sz="900" b="1" dirty="0">
+              <a:rPr lang="en-US" sz="1000" b="1" dirty="0">
                 <a:solidFill>
                   <a:srgbClr val="818B98"/>
                 </a:solidFill>
@@ -9329,7 +9308,7 @@
               </a:rPr>
               <a:t>Plan and build</a:t>
             </a:r>
-            <a:endParaRPr lang="en-US" sz="900" dirty="0"/>
+            <a:endParaRPr lang="en-US" sz="1000" dirty="0"/>
           </a:p>
         </p:txBody>
       </p:sp>
@@ -9341,12 +9320,12 @@
         </p:nvSpPr>
         <p:spPr>
           <a:xfrm>
-            <a:off x="1930301" y="4368701"/>
-            <a:ext cx="1287214" cy="336352"/>
+            <a:off x="2054721" y="4368701"/>
+            <a:ext cx="1413718" cy="361652"/>
           </a:xfrm>
           <a:prstGeom prst="roundRect">
             <a:avLst>
-              <a:gd name="adj" fmla="val 52861"/>
+              <a:gd name="adj" fmla="val 52675"/>
             </a:avLst>
           </a:prstGeom>
           <a:solidFill>
@@ -9377,12 +9356,12 @@
         </p:nvSpPr>
         <p:spPr>
           <a:xfrm>
-            <a:off x="2016026" y="4441627"/>
-            <a:ext cx="190500" cy="190500"/>
+            <a:off x="2140446" y="4441627"/>
+            <a:ext cx="215801" cy="215801"/>
           </a:xfrm>
           <a:prstGeom prst="roundRect">
             <a:avLst>
-              <a:gd name="adj" fmla="val 480000"/>
+              <a:gd name="adj" fmla="val 423724"/>
             </a:avLst>
           </a:prstGeom>
           <a:solidFill>
@@ -9409,8 +9388,8 @@
         </p:nvSpPr>
         <p:spPr>
           <a:xfrm>
-            <a:off x="2082433" y="4479727"/>
-            <a:ext cx="57686" cy="114300"/>
+            <a:off x="2215860" y="4482852"/>
+            <a:ext cx="64972" cy="133350"/>
           </a:xfrm>
           <a:prstGeom prst="rect">
             <a:avLst/>
@@ -9426,7 +9405,7 @@
               <a:buNone/>
             </a:pPr>
             <a:r>
-              <a:rPr lang="en-US" sz="800" b="1" dirty="0">
+              <a:rPr lang="en-US" sz="900" b="1" dirty="0">
                 <a:solidFill>
                   <a:srgbClr val="818B98"/>
                 </a:solidFill>
@@ -9436,7 +9415,7 @@
               </a:rPr>
               <a:t>2</a:t>
             </a:r>
-            <a:endParaRPr lang="en-US" sz="800" dirty="0"/>
+            <a:endParaRPr lang="en-US" sz="900" dirty="0"/>
           </a:p>
         </p:txBody>
       </p:sp>
@@ -9448,8 +9427,8 @@
         </p:nvSpPr>
         <p:spPr>
           <a:xfrm>
-            <a:off x="2282726" y="4470202"/>
-            <a:ext cx="814280" cy="133350"/>
+            <a:off x="2432447" y="4478089"/>
+            <a:ext cx="904604" cy="142875"/>
           </a:xfrm>
           <a:prstGeom prst="rect">
             <a:avLst/>
@@ -9465,7 +9444,7 @@
               <a:buNone/>
             </a:pPr>
             <a:r>
-              <a:rPr lang="en-US" sz="900" b="1" dirty="0">
+              <a:rPr lang="en-US" sz="1000" b="1" dirty="0">
                 <a:solidFill>
                   <a:srgbClr val="818B98"/>
                 </a:solidFill>
@@ -9475,7 +9454,7 @@
               </a:rPr>
               <a:t>Test and verify</a:t>
             </a:r>
-            <a:endParaRPr lang="en-US" sz="900" dirty="0"/>
+            <a:endParaRPr lang="en-US" sz="1000" dirty="0"/>
           </a:p>
         </p:txBody>
       </p:sp>
@@ -9487,12 +9466,12 @@
         </p:nvSpPr>
         <p:spPr>
           <a:xfrm>
-            <a:off x="3319016" y="4368701"/>
-            <a:ext cx="1354782" cy="336352"/>
+            <a:off x="3569940" y="4368701"/>
+            <a:ext cx="1488728" cy="361652"/>
           </a:xfrm>
           <a:prstGeom prst="roundRect">
             <a:avLst>
-              <a:gd name="adj" fmla="val 52861"/>
+              <a:gd name="adj" fmla="val 52675"/>
             </a:avLst>
           </a:prstGeom>
           <a:solidFill>
@@ -9523,12 +9502,12 @@
         </p:nvSpPr>
         <p:spPr>
           <a:xfrm>
-            <a:off x="3404741" y="4441627"/>
-            <a:ext cx="190500" cy="190500"/>
+            <a:off x="3655665" y="4441627"/>
+            <a:ext cx="215801" cy="215801"/>
           </a:xfrm>
           <a:prstGeom prst="roundRect">
             <a:avLst>
-              <a:gd name="adj" fmla="val 480000"/>
+              <a:gd name="adj" fmla="val 423724"/>
             </a:avLst>
           </a:prstGeom>
           <a:solidFill>
@@ -9555,8 +9534,8 @@
         </p:nvSpPr>
         <p:spPr>
           <a:xfrm>
-            <a:off x="3471148" y="4479727"/>
-            <a:ext cx="57686" cy="114300"/>
+            <a:off x="3731079" y="4482852"/>
+            <a:ext cx="64972" cy="133350"/>
           </a:xfrm>
           <a:prstGeom prst="rect">
             <a:avLst/>
@@ -9572,7 +9551,7 @@
               <a:buNone/>
             </a:pPr>
             <a:r>
-              <a:rPr lang="en-US" sz="800" b="1" dirty="0">
+              <a:rPr lang="en-US" sz="900" b="1" dirty="0">
                 <a:solidFill>
                   <a:srgbClr val="1A7F37"/>
                 </a:solidFill>
@@ -9582,7 +9561,7 @@
               </a:rPr>
               <a:t>3</a:t>
             </a:r>
-            <a:endParaRPr lang="en-US" sz="800" dirty="0"/>
+            <a:endParaRPr lang="en-US" sz="900" dirty="0"/>
           </a:p>
         </p:txBody>
       </p:sp>
@@ -9594,8 +9573,8 @@
         </p:nvSpPr>
         <p:spPr>
           <a:xfrm>
-            <a:off x="3671441" y="4470202"/>
-            <a:ext cx="883200" cy="133350"/>
+            <a:off x="3947666" y="4478089"/>
+            <a:ext cx="981114" cy="142875"/>
           </a:xfrm>
           <a:prstGeom prst="rect">
             <a:avLst/>
@@ -9611,7 +9590,7 @@
               <a:buNone/>
             </a:pPr>
             <a:r>
-              <a:rPr lang="en-US" sz="900" b="1" dirty="0">
+              <a:rPr lang="en-US" sz="1000" b="1" dirty="0">
                 <a:solidFill>
                   <a:srgbClr val="FFFFFF"/>
                 </a:solidFill>
@@ -9621,7 +9600,7 @@
               </a:rPr>
               <a:t>Deploy to Azure</a:t>
             </a:r>
-            <a:endParaRPr lang="en-US" sz="900" dirty="0"/>
+            <a:endParaRPr lang="en-US" sz="1000" dirty="0"/>
           </a:p>
         </p:txBody>
       </p:sp>
@@ -9665,12 +9644,12 @@
         </p:nvSpPr>
         <p:spPr>
           <a:xfrm>
-            <a:off x="7446466" y="152400"/>
-            <a:ext cx="1113383" cy="266700"/>
+            <a:off x="7325916" y="152400"/>
+            <a:ext cx="1233934" cy="279350"/>
           </a:xfrm>
           <a:prstGeom prst="roundRect">
             <a:avLst>
-              <a:gd name="adj" fmla="val 23810"/>
+              <a:gd name="adj" fmla="val 22731"/>
             </a:avLst>
           </a:prstGeom>
           <a:solidFill>
@@ -9697,8 +9676,8 @@
         </p:nvSpPr>
         <p:spPr>
           <a:xfrm>
-            <a:off x="7564822" y="219075"/>
-            <a:ext cx="876672" cy="133350"/>
+            <a:off x="7455969" y="220563"/>
+            <a:ext cx="973827" cy="142875"/>
           </a:xfrm>
           <a:prstGeom prst="rect">
             <a:avLst/>
@@ -9714,7 +9693,7 @@
               <a:buNone/>
             </a:pPr>
             <a:r>
-              <a:rPr lang="en-US" sz="900" b="1" dirty="0">
+              <a:rPr lang="en-US" sz="1000" b="1" dirty="0">
                 <a:solidFill>
                   <a:srgbClr val="FFFFFF"/>
                 </a:solidFill>
@@ -9724,7 +9703,7 @@
               </a:rPr>
               <a:t>WEATHERVIEW</a:t>
             </a:r>
-            <a:endParaRPr lang="en-US" sz="900" dirty="0"/>
+            <a:endParaRPr lang="en-US" sz="1000" dirty="0"/>
           </a:p>
         </p:txBody>
       </p:sp>
@@ -9761,7 +9740,7 @@
         <p:spPr>
           <a:xfrm>
             <a:off x="482501" y="330101"/>
-            <a:ext cx="7772400" cy="142875"/>
+            <a:ext cx="8342275" cy="152400"/>
           </a:xfrm>
           <a:prstGeom prst="rect">
             <a:avLst/>
@@ -9777,7 +9756,7 @@
               <a:buNone/>
             </a:pPr>
             <a:r>
-              <a:rPr lang="en-US" sz="1000" b="1" dirty="0">
+              <a:rPr lang="en-US" sz="1100" b="1" dirty="0">
                 <a:solidFill>
                   <a:srgbClr val="1A7F37"/>
                 </a:solidFill>
@@ -9787,7 +9766,7 @@
               </a:rPr>
               <a:t>ARCHITECTURE</a:t>
             </a:r>
-            <a:endParaRPr lang="en-US" sz="1000" dirty="0"/>
+            <a:endParaRPr lang="en-US" sz="1100" dirty="0"/>
           </a:p>
         </p:txBody>
       </p:sp>
@@ -9799,8 +9778,8 @@
         </p:nvSpPr>
         <p:spPr>
           <a:xfrm>
-            <a:off x="482501" y="523726"/>
-            <a:ext cx="7772400" cy="393650"/>
+            <a:off x="482501" y="533251"/>
+            <a:ext cx="8342275" cy="419100"/>
           </a:xfrm>
           <a:prstGeom prst="rect">
             <a:avLst/>
@@ -9814,7 +9793,7 @@
           <a:p>
             <a:pPr algn="l" indent="0" marL="0">
               <a:lnSpc>
-                <a:spcPts val="3100"/>
+                <a:spcPts val="3300"/>
               </a:lnSpc>
               <a:spcBef>
                 <a:spcPts val="400"/>
@@ -9822,7 +9801,7 @@
               <a:buNone/>
             </a:pPr>
             <a:r>
-              <a:rPr lang="en-US" sz="2600" b="1" dirty="0">
+              <a:rPr lang="en-US" sz="2800" b="1" dirty="0">
                 <a:solidFill>
                   <a:srgbClr val="1F2328"/>
                 </a:solidFill>
@@ -9832,7 +9811,7 @@
               </a:rPr>
               <a:t>Static files, global hosting</a:t>
             </a:r>
-            <a:endParaRPr lang="en-US" sz="2600" dirty="0"/>
+            <a:endParaRPr lang="en-US" sz="2800" dirty="0"/>
           </a:p>
         </p:txBody>
       </p:sp>
@@ -9844,12 +9823,12 @@
         </p:nvSpPr>
         <p:spPr>
           <a:xfrm>
-            <a:off x="1337965" y="2479625"/>
-            <a:ext cx="1650950" cy="1060252"/>
+            <a:off x="1321445" y="2390775"/>
+            <a:ext cx="1650950" cy="1288852"/>
           </a:xfrm>
           <a:prstGeom prst="roundRect">
             <a:avLst>
-              <a:gd name="adj" fmla="val 9583"/>
+              <a:gd name="adj" fmla="val 7883"/>
             </a:avLst>
           </a:prstGeom>
           <a:solidFill>
@@ -9880,12 +9859,12 @@
         </p:nvSpPr>
         <p:spPr>
           <a:xfrm>
-            <a:off x="1972866" y="2603450"/>
-            <a:ext cx="381000" cy="381000"/>
+            <a:off x="1918246" y="2539901"/>
+            <a:ext cx="457200" cy="457200"/>
           </a:xfrm>
           <a:prstGeom prst="roundRect">
             <a:avLst>
-              <a:gd name="adj" fmla="val 20000"/>
+              <a:gd name="adj" fmla="val 16667"/>
             </a:avLst>
           </a:prstGeom>
           <a:solidFill>
@@ -9920,8 +9899,8 @@
         </p:blipFill>
         <p:spPr>
           <a:xfrm>
-            <a:off x="2055465" y="2686050"/>
-            <a:ext cx="215801" cy="215801"/>
+            <a:off x="2019895" y="2641550"/>
+            <a:ext cx="253901" cy="253901"/>
           </a:xfrm>
           <a:prstGeom prst="rect">
             <a:avLst/>
@@ -9936,8 +9915,8 @@
         </p:nvSpPr>
         <p:spPr>
           <a:xfrm>
-            <a:off x="1891180" y="3047851"/>
-            <a:ext cx="544372" cy="165050"/>
+            <a:off x="1809990" y="3073301"/>
+            <a:ext cx="673861" cy="203150"/>
           </a:xfrm>
           <a:prstGeom prst="rect">
             <a:avLst/>
@@ -9951,12 +9930,12 @@
           <a:p>
             <a:pPr algn="ctr" indent="0" marL="0">
               <a:lnSpc>
-                <a:spcPts val="1300"/>
+                <a:spcPts val="1600"/>
               </a:lnSpc>
               <a:buNone/>
             </a:pPr>
             <a:r>
-              <a:rPr lang="en-US" sz="1050" b="1" dirty="0">
+              <a:rPr lang="en-US" sz="1300" b="1" dirty="0">
                 <a:solidFill>
                   <a:srgbClr val="1F2328"/>
                 </a:solidFill>
@@ -9966,7 +9945,7 @@
               </a:rPr>
               <a:t>Browser</a:t>
             </a:r>
-            <a:endParaRPr lang="en-US" sz="1050" dirty="0"/>
+            <a:endParaRPr lang="en-US" sz="1300" dirty="0"/>
           </a:p>
         </p:txBody>
       </p:sp>
@@ -9978,8 +9957,8 @@
         </p:nvSpPr>
         <p:spPr>
           <a:xfrm>
-            <a:off x="1551593" y="3276302"/>
-            <a:ext cx="1223546" cy="139750"/>
+            <a:off x="1644371" y="3352651"/>
+            <a:ext cx="1005099" cy="177850"/>
           </a:xfrm>
           <a:prstGeom prst="rect">
             <a:avLst/>
@@ -9993,12 +9972,12 @@
           <a:p>
             <a:pPr algn="ctr" indent="0" marL="0">
               <a:lnSpc>
-                <a:spcPts val="1100"/>
+                <a:spcPts val="1400"/>
               </a:lnSpc>
               <a:buNone/>
             </a:pPr>
             <a:r>
-              <a:rPr lang="en-US" sz="850" dirty="0">
+              <a:rPr lang="en-US" sz="1100" dirty="0">
                 <a:solidFill>
                   <a:srgbClr val="59636E"/>
                 </a:solidFill>
@@ -10006,9 +9985,9 @@
                 <a:ea typeface="Arial" pitchFamily="34" charset="-122"/>
                 <a:cs typeface="Arial" pitchFamily="34" charset="-120"/>
               </a:rPr>
-              <a:t>HTML, CSS, JS modules</a:t>
-            </a:r>
-            <a:endParaRPr lang="en-US" sz="850" dirty="0"/>
+              <a:t>HTML, CSS, JS</a:t>
+            </a:r>
+            <a:endParaRPr lang="en-US" sz="1100" dirty="0"/>
           </a:p>
         </p:txBody>
       </p:sp>
@@ -10020,8 +9999,8 @@
         </p:nvSpPr>
         <p:spPr>
           <a:xfrm>
-            <a:off x="3223323" y="2397026"/>
-            <a:ext cx="318486" cy="104775"/>
+            <a:off x="3153672" y="2358926"/>
+            <a:ext cx="424598" cy="142875"/>
           </a:xfrm>
           <a:prstGeom prst="rect">
             <a:avLst/>
@@ -10037,7 +10016,7 @@
               <a:buNone/>
             </a:pPr>
             <a:r>
-              <a:rPr lang="en-US" sz="750" dirty="0">
+              <a:rPr lang="en-US" sz="1000" dirty="0">
                 <a:solidFill>
                   <a:srgbClr val="59636E"/>
                 </a:solidFill>
@@ -10047,7 +10026,7 @@
               </a:rPr>
               <a:t>HTTPS</a:t>
             </a:r>
-            <a:endParaRPr lang="en-US" sz="750" dirty="0"/>
+            <a:endParaRPr lang="en-US" sz="1000" dirty="0"/>
           </a:p>
         </p:txBody>
       </p:sp>
@@ -10059,8 +10038,8 @@
         </p:nvSpPr>
         <p:spPr>
           <a:xfrm>
-            <a:off x="3278883" y="2501801"/>
-            <a:ext cx="207365" cy="228600"/>
+            <a:off x="3249460" y="2501801"/>
+            <a:ext cx="233172" cy="254050"/>
           </a:xfrm>
           <a:prstGeom prst="rect">
             <a:avLst/>
@@ -10074,12 +10053,12 @@
           <a:p>
             <a:pPr algn="ctr" indent="0" marL="0">
               <a:lnSpc>
-                <a:spcPts val="1800"/>
+                <a:spcPts val="2000"/>
               </a:lnSpc>
               <a:buNone/>
             </a:pPr>
             <a:r>
-              <a:rPr lang="en-US" sz="1600" dirty="0">
+              <a:rPr lang="en-US" sz="1800" dirty="0">
                 <a:solidFill>
                   <a:srgbClr val="818B98"/>
                 </a:solidFill>
@@ -10089,7 +10068,7 @@
               </a:rPr>
               <a:t>→</a:t>
             </a:r>
-            <a:endParaRPr lang="en-US" sz="1600" dirty="0"/>
+            <a:endParaRPr lang="en-US" sz="1800" dirty="0"/>
           </a:p>
         </p:txBody>
       </p:sp>
@@ -10101,8 +10080,8 @@
         </p:nvSpPr>
         <p:spPr>
           <a:xfrm>
-            <a:off x="3209662" y="3289102"/>
-            <a:ext cx="345659" cy="104775"/>
+            <a:off x="3135608" y="3314551"/>
+            <a:ext cx="460727" cy="142875"/>
           </a:xfrm>
           <a:prstGeom prst="rect">
             <a:avLst/>
@@ -10118,7 +10097,7 @@
               <a:buNone/>
             </a:pPr>
             <a:r>
-              <a:rPr lang="en-US" sz="750" dirty="0">
+              <a:rPr lang="en-US" sz="1000" dirty="0">
                 <a:solidFill>
                   <a:srgbClr val="59636E"/>
                 </a:solidFill>
@@ -10128,7 +10107,7 @@
               </a:rPr>
               <a:t>forecast</a:t>
             </a:r>
-            <a:endParaRPr lang="en-US" sz="750" dirty="0"/>
+            <a:endParaRPr lang="en-US" sz="1000" dirty="0"/>
           </a:p>
         </p:txBody>
       </p:sp>
@@ -10140,8 +10119,8 @@
         </p:nvSpPr>
         <p:spPr>
           <a:xfrm>
-            <a:off x="3278883" y="3393877"/>
-            <a:ext cx="207365" cy="228600"/>
+            <a:off x="3249460" y="3457426"/>
+            <a:ext cx="233172" cy="254050"/>
           </a:xfrm>
           <a:prstGeom prst="rect">
             <a:avLst/>
@@ -10155,12 +10134,12 @@
           <a:p>
             <a:pPr algn="ctr" indent="0" marL="0">
               <a:lnSpc>
-                <a:spcPts val="1800"/>
+                <a:spcPts val="2000"/>
               </a:lnSpc>
               <a:buNone/>
             </a:pPr>
             <a:r>
-              <a:rPr lang="en-US" sz="1600" dirty="0">
+              <a:rPr lang="en-US" sz="1800" dirty="0">
                 <a:solidFill>
                   <a:srgbClr val="818B98"/>
                 </a:solidFill>
@@ -10170,7 +10149,7 @@
               </a:rPr>
               <a:t>→</a:t>
             </a:r>
-            <a:endParaRPr lang="en-US" sz="1600" dirty="0"/>
+            <a:endParaRPr lang="en-US" sz="1800" dirty="0"/>
           </a:p>
         </p:txBody>
       </p:sp>
@@ -10182,12 +10161,12 @@
         </p:nvSpPr>
         <p:spPr>
           <a:xfrm>
-            <a:off x="3776216" y="1590824"/>
-            <a:ext cx="2235101" cy="1599902"/>
+            <a:off x="3759696" y="1375023"/>
+            <a:ext cx="2489150" cy="1853952"/>
           </a:xfrm>
           <a:prstGeom prst="roundRect">
             <a:avLst>
-              <a:gd name="adj" fmla="val 7938"/>
+              <a:gd name="adj" fmla="val 6850"/>
             </a:avLst>
           </a:prstGeom>
           <a:solidFill>
@@ -10226,8 +10205,8 @@
         </p:blipFill>
         <p:spPr>
           <a:xfrm>
-            <a:off x="3938141" y="1752749"/>
-            <a:ext cx="139601" cy="139601"/>
+            <a:off x="3921621" y="1536948"/>
+            <a:ext cx="165050" cy="165050"/>
           </a:xfrm>
           <a:prstGeom prst="rect">
             <a:avLst/>
@@ -10242,8 +10221,8 @@
         </p:nvSpPr>
         <p:spPr>
           <a:xfrm>
-            <a:off x="4141143" y="1765399"/>
-            <a:ext cx="1467951" cy="114300"/>
+            <a:off x="4150072" y="1547961"/>
+            <a:ext cx="1726930" cy="142875"/>
           </a:xfrm>
           <a:prstGeom prst="rect">
             <a:avLst/>
@@ -10259,7 +10238,7 @@
               <a:buNone/>
             </a:pPr>
             <a:r>
-              <a:rPr lang="en-US" sz="850" b="1" dirty="0">
+              <a:rPr lang="en-US" sz="1000" b="1" dirty="0">
                 <a:solidFill>
                   <a:srgbClr val="0969DA"/>
                 </a:solidFill>
@@ -10269,7 +10248,7 @@
               </a:rPr>
               <a:t>AZURE RESOURCE GROUP</a:t>
             </a:r>
-            <a:endParaRPr lang="en-US" sz="850" dirty="0"/>
+            <a:endParaRPr lang="en-US" sz="1000" dirty="0"/>
           </a:p>
         </p:txBody>
       </p:sp>
@@ -10281,12 +10260,12 @@
         </p:nvSpPr>
         <p:spPr>
           <a:xfrm>
-            <a:off x="3941266" y="1968550"/>
-            <a:ext cx="1905000" cy="1060252"/>
+            <a:off x="3924746" y="1778198"/>
+            <a:ext cx="2158901" cy="1288852"/>
           </a:xfrm>
           <a:prstGeom prst="roundRect">
             <a:avLst>
-              <a:gd name="adj" fmla="val 9583"/>
+              <a:gd name="adj" fmla="val 7883"/>
             </a:avLst>
           </a:prstGeom>
           <a:solidFill>
@@ -10317,12 +10296,12 @@
         </p:nvSpPr>
         <p:spPr>
           <a:xfrm>
-            <a:off x="4703266" y="2092375"/>
-            <a:ext cx="381000" cy="381000"/>
+            <a:off x="4775597" y="1927324"/>
+            <a:ext cx="457200" cy="457200"/>
           </a:xfrm>
           <a:prstGeom prst="roundRect">
             <a:avLst>
-              <a:gd name="adj" fmla="val 20000"/>
+              <a:gd name="adj" fmla="val 16667"/>
             </a:avLst>
           </a:prstGeom>
           <a:solidFill>
@@ -10357,8 +10336,8 @@
         </p:blipFill>
         <p:spPr>
           <a:xfrm>
-            <a:off x="4785866" y="2174974"/>
-            <a:ext cx="215801" cy="215801"/>
+            <a:off x="4877246" y="2028974"/>
+            <a:ext cx="253901" cy="253901"/>
           </a:xfrm>
           <a:prstGeom prst="rect">
             <a:avLst/>
@@ -10373,8 +10352,8 @@
         </p:nvSpPr>
         <p:spPr>
           <a:xfrm>
-            <a:off x="4360932" y="2536775"/>
-            <a:ext cx="1065669" cy="165050"/>
+            <a:off x="4344606" y="2460724"/>
+            <a:ext cx="1319183" cy="203150"/>
           </a:xfrm>
           <a:prstGeom prst="rect">
             <a:avLst/>
@@ -10388,12 +10367,12 @@
           <a:p>
             <a:pPr algn="ctr" indent="0" marL="0">
               <a:lnSpc>
-                <a:spcPts val="1300"/>
+                <a:spcPts val="1600"/>
               </a:lnSpc>
               <a:buNone/>
             </a:pPr>
             <a:r>
-              <a:rPr lang="en-US" sz="1050" b="1" dirty="0">
+              <a:rPr lang="en-US" sz="1300" b="1" dirty="0">
                 <a:solidFill>
                   <a:srgbClr val="1F2328"/>
                 </a:solidFill>
@@ -10403,7 +10382,7 @@
               </a:rPr>
               <a:t>Static Web Apps</a:t>
             </a:r>
-            <a:endParaRPr lang="en-US" sz="1050" dirty="0"/>
+            <a:endParaRPr lang="en-US" sz="1300" dirty="0"/>
           </a:p>
         </p:txBody>
       </p:sp>
@@ -10415,8 +10394,8 @@
         </p:nvSpPr>
         <p:spPr>
           <a:xfrm>
-            <a:off x="4688830" y="2765227"/>
-            <a:ext cx="409873" cy="139750"/>
+            <a:off x="4738994" y="2740075"/>
+            <a:ext cx="530406" cy="177850"/>
           </a:xfrm>
           <a:prstGeom prst="rect">
             <a:avLst/>
@@ -10430,12 +10409,12 @@
           <a:p>
             <a:pPr algn="ctr" indent="0" marL="0">
               <a:lnSpc>
-                <a:spcPts val="1100"/>
+                <a:spcPts val="1400"/>
               </a:lnSpc>
               <a:buNone/>
             </a:pPr>
             <a:r>
-              <a:rPr lang="en-US" sz="850" dirty="0">
+              <a:rPr lang="en-US" sz="1100" dirty="0">
                 <a:solidFill>
                   <a:srgbClr val="59636E"/>
                 </a:solidFill>
@@ -10445,7 +10424,7 @@
               </a:rPr>
               <a:t>Free tier</a:t>
             </a:r>
-            <a:endParaRPr lang="en-US" sz="850" dirty="0"/>
+            <a:endParaRPr lang="en-US" sz="1100" dirty="0"/>
           </a:p>
         </p:txBody>
       </p:sp>
@@ -10457,12 +10436,12 @@
         </p:nvSpPr>
         <p:spPr>
           <a:xfrm>
-            <a:off x="3776216" y="3368427"/>
-            <a:ext cx="2235101" cy="1060252"/>
+            <a:off x="3759696" y="3406676"/>
+            <a:ext cx="2489150" cy="1288852"/>
           </a:xfrm>
           <a:prstGeom prst="roundRect">
             <a:avLst>
-              <a:gd name="adj" fmla="val 9583"/>
+              <a:gd name="adj" fmla="val 7883"/>
             </a:avLst>
           </a:prstGeom>
           <a:solidFill>
@@ -10493,12 +10472,12 @@
         </p:nvSpPr>
         <p:spPr>
           <a:xfrm>
-            <a:off x="4703266" y="3492252"/>
-            <a:ext cx="381000" cy="381000"/>
+            <a:off x="4775597" y="3555802"/>
+            <a:ext cx="457200" cy="457200"/>
           </a:xfrm>
           <a:prstGeom prst="roundRect">
             <a:avLst>
-              <a:gd name="adj" fmla="val 20000"/>
+              <a:gd name="adj" fmla="val 16667"/>
             </a:avLst>
           </a:prstGeom>
           <a:solidFill>
@@ -10533,8 +10512,8 @@
         </p:blipFill>
         <p:spPr>
           <a:xfrm>
-            <a:off x="4785866" y="3574852"/>
-            <a:ext cx="215801" cy="215801"/>
+            <a:off x="4877246" y="3657451"/>
+            <a:ext cx="253901" cy="253901"/>
           </a:xfrm>
           <a:prstGeom prst="rect">
             <a:avLst/>
@@ -10549,8 +10528,8 @@
         </p:nvSpPr>
         <p:spPr>
           <a:xfrm>
-            <a:off x="4500746" y="3936653"/>
-            <a:ext cx="785893" cy="165050"/>
+            <a:off x="4517813" y="4089202"/>
+            <a:ext cx="972916" cy="203150"/>
           </a:xfrm>
           <a:prstGeom prst="rect">
             <a:avLst/>
@@ -10564,12 +10543,12 @@
           <a:p>
             <a:pPr algn="ctr" indent="0" marL="0">
               <a:lnSpc>
-                <a:spcPts val="1300"/>
+                <a:spcPts val="1600"/>
               </a:lnSpc>
               <a:buNone/>
             </a:pPr>
             <a:r>
-              <a:rPr lang="en-US" sz="1050" b="1" dirty="0">
+              <a:rPr lang="en-US" sz="1300" b="1" dirty="0">
                 <a:solidFill>
                   <a:srgbClr val="1F2328"/>
                 </a:solidFill>
@@ -10579,7 +10558,7 @@
               </a:rPr>
               <a:t>Open-Meteo</a:t>
             </a:r>
-            <a:endParaRPr lang="en-US" sz="1050" dirty="0"/>
+            <a:endParaRPr lang="en-US" sz="1300" dirty="0"/>
           </a:p>
         </p:txBody>
       </p:sp>
@@ -10591,8 +10570,8 @@
         </p:nvSpPr>
         <p:spPr>
           <a:xfrm>
-            <a:off x="4193036" y="4165104"/>
-            <a:ext cx="1401461" cy="139750"/>
+            <a:off x="4454055" y="4368552"/>
+            <a:ext cx="1100432" cy="177850"/>
           </a:xfrm>
           <a:prstGeom prst="rect">
             <a:avLst/>
@@ -10606,12 +10585,12 @@
           <a:p>
             <a:pPr algn="ctr" indent="0" marL="0">
               <a:lnSpc>
-                <a:spcPts val="1100"/>
+                <a:spcPts val="1400"/>
               </a:lnSpc>
               <a:buNone/>
             </a:pPr>
             <a:r>
-              <a:rPr lang="en-US" sz="850" dirty="0">
+              <a:rPr lang="en-US" sz="1100" dirty="0">
                 <a:solidFill>
                   <a:srgbClr val="59636E"/>
                 </a:solidFill>
@@ -10619,9 +10598,9 @@
                 <a:ea typeface="Arial" pitchFamily="34" charset="-122"/>
                 <a:cs typeface="Arial" pitchFamily="34" charset="-120"/>
               </a:rPr>
-              <a:t>Free geocoding and forecast</a:t>
-            </a:r>
-            <a:endParaRPr lang="en-US" sz="850" dirty="0"/>
+              <a:t>Free weather API</a:t>
+            </a:r>
+            <a:endParaRPr lang="en-US" sz="1100" dirty="0"/>
           </a:p>
         </p:txBody>
       </p:sp>
@@ -10633,7 +10612,7 @@
         </p:nvSpPr>
         <p:spPr>
           <a:xfrm>
-            <a:off x="6239768" y="2251174"/>
+            <a:off x="6477298" y="2035373"/>
             <a:ext cx="207365" cy="238125"/>
           </a:xfrm>
           <a:prstGeom prst="rect">
@@ -10672,12 +10651,12 @@
         </p:nvSpPr>
         <p:spPr>
           <a:xfrm>
-            <a:off x="6984653" y="1870174"/>
-            <a:ext cx="507950" cy="507950"/>
+            <a:off x="7060853" y="1654373"/>
+            <a:ext cx="609600" cy="609600"/>
           </a:xfrm>
           <a:prstGeom prst="roundRect">
             <a:avLst>
-              <a:gd name="adj" fmla="val 15001"/>
+              <a:gd name="adj" fmla="val 12500"/>
             </a:avLst>
           </a:prstGeom>
           <a:solidFill>
@@ -10712,8 +10691,8 @@
         </p:blipFill>
         <p:spPr>
           <a:xfrm>
-            <a:off x="7098953" y="1984474"/>
-            <a:ext cx="279350" cy="279350"/>
+            <a:off x="7194203" y="1787723"/>
+            <a:ext cx="342900" cy="342900"/>
           </a:xfrm>
           <a:prstGeom prst="rect">
             <a:avLst/>
@@ -10728,8 +10707,8 @@
         </p:nvSpPr>
         <p:spPr>
           <a:xfrm>
-            <a:off x="6862532" y="2479625"/>
-            <a:ext cx="752192" cy="152400"/>
+            <a:off x="6900068" y="2365474"/>
+            <a:ext cx="931170" cy="200025"/>
           </a:xfrm>
           <a:prstGeom prst="rect">
             <a:avLst/>
@@ -10745,7 +10724,7 @@
               <a:buNone/>
             </a:pPr>
             <a:r>
-              <a:rPr lang="en-US" sz="1050" b="1" dirty="0">
+              <a:rPr lang="en-US" sz="1300" b="1" dirty="0">
                 <a:solidFill>
                   <a:srgbClr val="1F2328"/>
                 </a:solidFill>
@@ -10755,7 +10734,7 @@
               </a:rPr>
               <a:t>Bicep + azd</a:t>
             </a:r>
-            <a:endParaRPr lang="en-US" sz="1050" dirty="0"/>
+            <a:endParaRPr lang="en-US" sz="1300" dirty="0"/>
           </a:p>
         </p:txBody>
       </p:sp>
@@ -10767,8 +10746,8 @@
         </p:nvSpPr>
         <p:spPr>
           <a:xfrm>
-            <a:off x="6660326" y="2733526"/>
-            <a:ext cx="1156752" cy="114300"/>
+            <a:off x="6934072" y="2667000"/>
+            <a:ext cx="863161" cy="304800"/>
           </a:xfrm>
           <a:prstGeom prst="rect">
             <a:avLst/>
@@ -10784,7 +10763,7 @@
               <a:buNone/>
             </a:pPr>
             <a:r>
-              <a:rPr lang="en-US" sz="850" dirty="0">
+              <a:rPr lang="en-US" sz="1100" dirty="0">
                 <a:solidFill>
                   <a:srgbClr val="59636E"/>
                 </a:solidFill>
@@ -10792,9 +10771,26 @@
                 <a:ea typeface="Arial" pitchFamily="34" charset="-122"/>
                 <a:cs typeface="Arial" pitchFamily="34" charset="-120"/>
               </a:rPr>
-              <a:t>Generated by the agent</a:t>
-            </a:r>
-            <a:endParaRPr lang="en-US" sz="850" dirty="0"/>
+              <a:t>Generated by</a:t>
+            </a:r>
+            <a:endParaRPr lang="en-US" sz="1100" dirty="0"/>
+          </a:p>
+          <a:p>
+            <a:pPr algn="ctr" indent="0" marL="0">
+              <a:buNone/>
+            </a:pPr>
+            <a:r>
+              <a:rPr lang="en-US" sz="1100" dirty="0">
+                <a:solidFill>
+                  <a:srgbClr val="59636E"/>
+                </a:solidFill>
+                <a:latin typeface="Arial" pitchFamily="34" charset="0"/>
+                <a:ea typeface="Arial" pitchFamily="34" charset="-122"/>
+                <a:cs typeface="Arial" pitchFamily="34" charset="-120"/>
+              </a:rPr>
+              <a:t>the agent</a:t>
+            </a:r>
+            <a:endParaRPr lang="en-US" sz="1100" dirty="0"/>
           </a:p>
         </p:txBody>
       </p:sp>
@@ -10838,12 +10834,12 @@
         </p:nvSpPr>
         <p:spPr>
           <a:xfrm>
-            <a:off x="7446466" y="152400"/>
-            <a:ext cx="1113383" cy="266700"/>
+            <a:off x="7325916" y="152400"/>
+            <a:ext cx="1233934" cy="279350"/>
           </a:xfrm>
           <a:prstGeom prst="roundRect">
             <a:avLst>
-              <a:gd name="adj" fmla="val 23810"/>
+              <a:gd name="adj" fmla="val 22731"/>
             </a:avLst>
           </a:prstGeom>
           <a:solidFill>
@@ -10870,8 +10866,8 @@
         </p:nvSpPr>
         <p:spPr>
           <a:xfrm>
-            <a:off x="7564822" y="219075"/>
-            <a:ext cx="876672" cy="133350"/>
+            <a:off x="7455969" y="220563"/>
+            <a:ext cx="973827" cy="142875"/>
           </a:xfrm>
           <a:prstGeom prst="rect">
             <a:avLst/>
@@ -10887,7 +10883,7 @@
               <a:buNone/>
             </a:pPr>
             <a:r>
-              <a:rPr lang="en-US" sz="900" b="1" dirty="0">
+              <a:rPr lang="en-US" sz="1000" b="1" dirty="0">
                 <a:solidFill>
                   <a:srgbClr val="FFFFFF"/>
                 </a:solidFill>
@@ -10897,7 +10893,7 @@
               </a:rPr>
               <a:t>WEATHERVIEW</a:t>
             </a:r>
-            <a:endParaRPr lang="en-US" sz="900" dirty="0"/>
+            <a:endParaRPr lang="en-US" sz="1000" dirty="0"/>
           </a:p>
         </p:txBody>
       </p:sp>
@@ -10934,7 +10930,7 @@
         <p:spPr>
           <a:xfrm>
             <a:off x="482501" y="330101"/>
-            <a:ext cx="7772400" cy="142875"/>
+            <a:ext cx="8342275" cy="152400"/>
           </a:xfrm>
           <a:prstGeom prst="rect">
             <a:avLst/>
@@ -10950,7 +10946,7 @@
               <a:buNone/>
             </a:pPr>
             <a:r>
-              <a:rPr lang="en-US" sz="1000" b="1" dirty="0">
+              <a:rPr lang="en-US" sz="1100" b="1" dirty="0">
                 <a:solidFill>
                   <a:srgbClr val="1A7F37"/>
                 </a:solidFill>
@@ -10960,7 +10956,7 @@
               </a:rPr>
               <a:t>GENERATE INFRASTRUCTURE</a:t>
             </a:r>
-            <a:endParaRPr lang="en-US" sz="1000" dirty="0"/>
+            <a:endParaRPr lang="en-US" sz="1100" dirty="0"/>
           </a:p>
         </p:txBody>
       </p:sp>
@@ -10972,8 +10968,8 @@
         </p:nvSpPr>
         <p:spPr>
           <a:xfrm>
-            <a:off x="482501" y="523726"/>
-            <a:ext cx="7772400" cy="393650"/>
+            <a:off x="482501" y="533251"/>
+            <a:ext cx="8342275" cy="419100"/>
           </a:xfrm>
           <a:prstGeom prst="rect">
             <a:avLst/>
@@ -10987,7 +10983,7 @@
           <a:p>
             <a:pPr algn="l" indent="0" marL="0">
               <a:lnSpc>
-                <a:spcPts val="3100"/>
+                <a:spcPts val="3300"/>
               </a:lnSpc>
               <a:spcBef>
                 <a:spcPts val="400"/>
@@ -10995,7 +10991,7 @@
               <a:buNone/>
             </a:pPr>
             <a:r>
-              <a:rPr lang="en-US" sz="2600" b="1" dirty="0">
+              <a:rPr lang="en-US" sz="2800" b="1" dirty="0">
                 <a:solidFill>
                   <a:srgbClr val="1F2328"/>
                 </a:solidFill>
@@ -11005,7 +11001,7 @@
               </a:rPr>
               <a:t>Let Azure Skills write the Bicep</a:t>
             </a:r>
-            <a:endParaRPr lang="en-US" sz="2600" dirty="0"/>
+            <a:endParaRPr lang="en-US" sz="2800" dirty="0"/>
           </a:p>
         </p:txBody>
       </p:sp>
@@ -11017,12 +11013,12 @@
         </p:nvSpPr>
         <p:spPr>
           <a:xfrm>
-            <a:off x="634901" y="1864668"/>
-            <a:ext cx="7873901" cy="1934766"/>
+            <a:off x="634901" y="1604814"/>
+            <a:ext cx="7873901" cy="2429173"/>
           </a:xfrm>
           <a:prstGeom prst="roundRect">
             <a:avLst>
-              <a:gd name="adj" fmla="val 5251"/>
+              <a:gd name="adj" fmla="val 4183"/>
             </a:avLst>
           </a:prstGeom>
           <a:solidFill>
@@ -11056,7 +11052,7 @@
         </p:nvSpPr>
         <p:spPr>
           <a:xfrm>
-            <a:off x="634901" y="1869430"/>
+            <a:off x="634901" y="1609576"/>
             <a:ext cx="7873901" cy="0"/>
           </a:xfrm>
           <a:prstGeom prst="line">
@@ -11079,8 +11075,8 @@
         </p:nvSpPr>
         <p:spPr>
           <a:xfrm>
-            <a:off x="8504039" y="1864668"/>
-            <a:ext cx="0" cy="1934766"/>
+            <a:off x="8504039" y="1604814"/>
+            <a:ext cx="0" cy="2429173"/>
           </a:xfrm>
           <a:prstGeom prst="line">
             <a:avLst/>
@@ -11102,7 +11098,7 @@
         </p:nvSpPr>
         <p:spPr>
           <a:xfrm>
-            <a:off x="634901" y="3794671"/>
+            <a:off x="634901" y="4029224"/>
             <a:ext cx="7873901" cy="0"/>
           </a:xfrm>
           <a:prstGeom prst="line">
@@ -11125,8 +11121,8 @@
         </p:nvSpPr>
         <p:spPr>
           <a:xfrm>
-            <a:off x="663476" y="1864668"/>
-            <a:ext cx="0" cy="1934766"/>
+            <a:off x="663476" y="1604814"/>
+            <a:ext cx="0" cy="2429173"/>
           </a:xfrm>
           <a:prstGeom prst="line">
             <a:avLst/>
@@ -11156,8 +11152,8 @@
         </p:blipFill>
         <p:spPr>
           <a:xfrm>
-            <a:off x="945952" y="2077343"/>
-            <a:ext cx="165050" cy="165050"/>
+            <a:off x="971401" y="1842939"/>
+            <a:ext cx="190500" cy="190500"/>
           </a:xfrm>
           <a:prstGeom prst="rect">
             <a:avLst/>
@@ -11172,8 +11168,8 @@
         </p:nvSpPr>
         <p:spPr>
           <a:xfrm>
-            <a:off x="1187202" y="2093119"/>
-            <a:ext cx="498830" cy="133350"/>
+            <a:off x="1238101" y="1861989"/>
+            <a:ext cx="1423169" cy="152400"/>
           </a:xfrm>
           <a:prstGeom prst="rect">
             <a:avLst/>
@@ -11189,7 +11185,7 @@
               <a:buNone/>
             </a:pPr>
             <a:r>
-              <a:rPr lang="en-US" sz="900" b="1" dirty="0">
+              <a:rPr lang="en-US" sz="1050" dirty="0">
                 <a:solidFill>
                   <a:srgbClr val="8250DF"/>
                 </a:solidFill>
@@ -11199,7 +11195,21 @@
               </a:rPr>
               <a:t>PROMPT</a:t>
             </a:r>
-            <a:endParaRPr lang="en-US" sz="900" dirty="0"/>
+            <a:pPr algn="l" indent="0" marL="0">
+              <a:buNone/>
+            </a:pPr>
+            <a:r>
+              <a:rPr lang="en-US" sz="1050" b="1" dirty="0">
+                <a:solidFill>
+                  <a:srgbClr val="818B98"/>
+                </a:solidFill>
+                <a:latin typeface="Arial" pitchFamily="34" charset="0"/>
+                <a:ea typeface="Arial" pitchFamily="34" charset="-122"/>
+                <a:cs typeface="Arial" pitchFamily="34" charset="-120"/>
+              </a:rPr>
+              <a:t> · ABRIDGED</a:t>
+            </a:r>
+            <a:endParaRPr lang="en-US" sz="1050" dirty="0"/>
           </a:p>
         </p:txBody>
       </p:sp>
@@ -11211,8 +11221,8 @@
         </p:nvSpPr>
         <p:spPr>
           <a:xfrm>
-            <a:off x="945952" y="2343894"/>
-            <a:ext cx="7445413" cy="1217414"/>
+            <a:off x="971401" y="2147590"/>
+            <a:ext cx="7393496" cy="1622971"/>
           </a:xfrm>
           <a:prstGeom prst="rect">
             <a:avLst/>
@@ -11226,12 +11236,12 @@
           <a:p>
             <a:pPr algn="l" indent="0" marL="0">
               <a:lnSpc>
-                <a:spcPts val="1917"/>
+                <a:spcPts val="2556"/>
               </a:lnSpc>
               <a:buNone/>
             </a:pPr>
             <a:r>
-              <a:rPr lang="en-US" sz="1350" dirty="0">
+              <a:rPr lang="en-US" sz="1800" dirty="0">
                 <a:solidFill>
                   <a:srgbClr val="1F2328"/>
                 </a:solidFill>
@@ -11243,12 +11253,12 @@
             </a:r>
             <a:pPr algn="l" indent="0" marL="0">
               <a:lnSpc>
-                <a:spcPts val="1917"/>
+                <a:spcPts val="2556"/>
               </a:lnSpc>
               <a:buNone/>
             </a:pPr>
             <a:r>
-              <a:rPr lang="en-US" sz="1350" b="1" dirty="0">
+              <a:rPr lang="en-US" sz="1800" b="1" dirty="0">
                 <a:solidFill>
                   <a:srgbClr val="1F2328"/>
                 </a:solidFill>
@@ -11260,12 +11270,12 @@
             </a:r>
             <a:pPr algn="l" indent="0" marL="0">
               <a:lnSpc>
-                <a:spcPts val="1917"/>
+                <a:spcPts val="2556"/>
               </a:lnSpc>
               <a:buNone/>
             </a:pPr>
             <a:r>
-              <a:rPr lang="en-US" sz="1350" dirty="0">
+              <a:rPr lang="en-US" sz="1800" dirty="0">
                 <a:solidFill>
                   <a:srgbClr val="1F2328"/>
                 </a:solidFill>
@@ -11273,16 +11283,16 @@
                 <a:ea typeface="Arial" pitchFamily="34" charset="-122"/>
                 <a:cs typeface="Arial" pitchFamily="34" charset="-120"/>
               </a:rPr>
-              <a:t>, including current Bicep schema and azd infrastructure guidance, to create everything that section specifies: the Bicep in infra/, main.parameters.json, azure.yaml, scripts/build-static.mjs with its npm build script, and staticwebapp.config.json. Follow the section's contracts exactly, and </a:t>
+              <a:t>, including current Bicep schema and azd infrastructure guidance, to create everything that section specifies … Follow the section's contracts exactly, and </a:t>
             </a:r>
             <a:pPr algn="l" indent="0" marL="0">
               <a:lnSpc>
-                <a:spcPts val="1917"/>
+                <a:spcPts val="2556"/>
               </a:lnSpc>
               <a:buNone/>
             </a:pPr>
             <a:r>
-              <a:rPr lang="en-US" sz="1350" b="1" dirty="0">
+              <a:rPr lang="en-US" sz="1800" b="1" dirty="0">
                 <a:solidFill>
                   <a:srgbClr val="1F2328"/>
                 </a:solidFill>
@@ -11292,7 +11302,7 @@
               </a:rPr>
               <a:t>do not create anything the section prohibits.</a:t>
             </a:r>
-            <a:endParaRPr lang="en-US" sz="1350" dirty="0"/>
+            <a:endParaRPr lang="en-US" sz="1800" dirty="0"/>
           </a:p>
         </p:txBody>
       </p:sp>
@@ -11312,8 +11322,8 @@
         </p:blipFill>
         <p:spPr>
           <a:xfrm>
-            <a:off x="634901" y="4015234"/>
-            <a:ext cx="177701" cy="177701"/>
+            <a:off x="634901" y="4294287"/>
+            <a:ext cx="215801" cy="215801"/>
           </a:xfrm>
           <a:prstGeom prst="rect">
             <a:avLst/>
@@ -11328,8 +11338,8 @@
         </p:nvSpPr>
         <p:spPr>
           <a:xfrm>
-            <a:off x="914102" y="4002584"/>
-            <a:ext cx="3322094" cy="203150"/>
+            <a:off x="952202" y="4287887"/>
+            <a:ext cx="3874511" cy="228600"/>
           </a:xfrm>
           <a:prstGeom prst="rect">
             <a:avLst/>
@@ -11343,12 +11353,12 @@
           <a:p>
             <a:pPr algn="l" indent="0" marL="0">
               <a:lnSpc>
-                <a:spcPts val="1600"/>
+                <a:spcPts val="1800"/>
               </a:lnSpc>
               <a:buNone/>
             </a:pPr>
             <a:r>
-              <a:rPr lang="en-US" sz="1200" dirty="0">
+              <a:rPr lang="en-US" sz="1400" dirty="0">
                 <a:solidFill>
                   <a:srgbClr val="59636E"/>
                 </a:solidFill>
@@ -11360,12 +11370,12 @@
             </a:r>
             <a:pPr algn="l" indent="0" marL="0">
               <a:lnSpc>
-                <a:spcPts val="1600"/>
+                <a:spcPts val="1800"/>
               </a:lnSpc>
               <a:buNone/>
             </a:pPr>
             <a:r>
-              <a:rPr lang="en-US" sz="1200" b="1" dirty="0">
+              <a:rPr lang="en-US" sz="1400" b="1" dirty="0">
                 <a:solidFill>
                   <a:srgbClr val="59636E"/>
                 </a:solidFill>
@@ -11375,7 +11385,7 @@
               </a:rPr>
               <a:t>/plugin install azure@azure-skills</a:t>
             </a:r>
-            <a:endParaRPr lang="en-US" sz="1200" dirty="0"/>
+            <a:endParaRPr lang="en-US" sz="1400" dirty="0"/>
           </a:p>
         </p:txBody>
       </p:sp>
@@ -11419,12 +11429,12 @@
         </p:nvSpPr>
         <p:spPr>
           <a:xfrm>
-            <a:off x="7446466" y="152400"/>
-            <a:ext cx="1113383" cy="266700"/>
+            <a:off x="7325916" y="152400"/>
+            <a:ext cx="1233934" cy="279350"/>
           </a:xfrm>
           <a:prstGeom prst="roundRect">
             <a:avLst>
-              <a:gd name="adj" fmla="val 23810"/>
+              <a:gd name="adj" fmla="val 22731"/>
             </a:avLst>
           </a:prstGeom>
           <a:solidFill>
@@ -11451,8 +11461,8 @@
         </p:nvSpPr>
         <p:spPr>
           <a:xfrm>
-            <a:off x="7564822" y="219075"/>
-            <a:ext cx="876672" cy="133350"/>
+            <a:off x="7455969" y="220563"/>
+            <a:ext cx="973827" cy="142875"/>
           </a:xfrm>
           <a:prstGeom prst="rect">
             <a:avLst/>
@@ -11468,7 +11478,7 @@
               <a:buNone/>
             </a:pPr>
             <a:r>
-              <a:rPr lang="en-US" sz="900" b="1" dirty="0">
+              <a:rPr lang="en-US" sz="1000" b="1" dirty="0">
                 <a:solidFill>
                   <a:srgbClr val="FFFFFF"/>
                 </a:solidFill>
@@ -11478,7 +11488,7 @@
               </a:rPr>
               <a:t>WEATHERVIEW</a:t>
             </a:r>
-            <a:endParaRPr lang="en-US" sz="900" dirty="0"/>
+            <a:endParaRPr lang="en-US" sz="1000" dirty="0"/>
           </a:p>
         </p:txBody>
       </p:sp>
@@ -11515,7 +11525,7 @@
         <p:spPr>
           <a:xfrm>
             <a:off x="482501" y="330101"/>
-            <a:ext cx="7772400" cy="142875"/>
+            <a:ext cx="8342275" cy="152400"/>
           </a:xfrm>
           <a:prstGeom prst="rect">
             <a:avLst/>
@@ -11531,7 +11541,7 @@
               <a:buNone/>
             </a:pPr>
             <a:r>
-              <a:rPr lang="en-US" sz="1000" b="1" dirty="0">
+              <a:rPr lang="en-US" sz="1100" b="1" dirty="0">
                 <a:solidFill>
                   <a:srgbClr val="59636E"/>
                 </a:solidFill>
@@ -11541,7 +11551,7 @@
               </a:rPr>
               <a:t>WHERE WE ARE HEADED</a:t>
             </a:r>
-            <a:endParaRPr lang="en-US" sz="1000" dirty="0"/>
+            <a:endParaRPr lang="en-US" sz="1100" dirty="0"/>
           </a:p>
         </p:txBody>
       </p:sp>
@@ -11553,8 +11563,8 @@
         </p:nvSpPr>
         <p:spPr>
           <a:xfrm>
-            <a:off x="482501" y="523726"/>
-            <a:ext cx="7772400" cy="393650"/>
+            <a:off x="482501" y="533251"/>
+            <a:ext cx="8342275" cy="419100"/>
           </a:xfrm>
           <a:prstGeom prst="rect">
             <a:avLst/>
@@ -11568,7 +11578,7 @@
           <a:p>
             <a:pPr algn="l" indent="0" marL="0">
               <a:lnSpc>
-                <a:spcPts val="3100"/>
+                <a:spcPts val="3300"/>
               </a:lnSpc>
               <a:spcBef>
                 <a:spcPts val="400"/>
@@ -11576,7 +11586,7 @@
               <a:buNone/>
             </a:pPr>
             <a:r>
-              <a:rPr lang="en-US" sz="2600" b="1" dirty="0">
+              <a:rPr lang="en-US" sz="2800" b="1" dirty="0">
                 <a:solidFill>
                   <a:srgbClr val="1F2328"/>
                 </a:solidFill>
@@ -11586,7 +11596,7 @@
               </a:rPr>
               <a:t>A five-day forecast, built from a plan</a:t>
             </a:r>
-            <a:endParaRPr lang="en-US" sz="2600" dirty="0"/>
+            <a:endParaRPr lang="en-US" sz="2800" dirty="0"/>
           </a:p>
         </p:txBody>
       </p:sp>
@@ -11598,7 +11608,7 @@
         </p:nvSpPr>
         <p:spPr>
           <a:xfrm>
-            <a:off x="1308646" y="1222177"/>
+            <a:off x="1308646" y="1247626"/>
             <a:ext cx="6526411" cy="3575000"/>
           </a:xfrm>
           <a:prstGeom prst="roundRect">
@@ -11649,7 +11659,7 @@
         </p:blipFill>
         <p:spPr>
           <a:xfrm>
-            <a:off x="1356271" y="1269802"/>
+            <a:off x="1356271" y="1295251"/>
             <a:ext cx="6431161" cy="3479750"/>
           </a:xfrm>
           <a:prstGeom prst="rect">
@@ -11697,12 +11707,12 @@
         </p:nvSpPr>
         <p:spPr>
           <a:xfrm>
-            <a:off x="7446466" y="152400"/>
-            <a:ext cx="1113383" cy="266700"/>
+            <a:off x="7325916" y="152400"/>
+            <a:ext cx="1233934" cy="279350"/>
           </a:xfrm>
           <a:prstGeom prst="roundRect">
             <a:avLst>
-              <a:gd name="adj" fmla="val 23810"/>
+              <a:gd name="adj" fmla="val 22731"/>
             </a:avLst>
           </a:prstGeom>
           <a:solidFill>
@@ -11729,8 +11739,8 @@
         </p:nvSpPr>
         <p:spPr>
           <a:xfrm>
-            <a:off x="7564822" y="219075"/>
-            <a:ext cx="876672" cy="133350"/>
+            <a:off x="7455969" y="220563"/>
+            <a:ext cx="973827" cy="142875"/>
           </a:xfrm>
           <a:prstGeom prst="rect">
             <a:avLst/>
@@ -11746,7 +11756,7 @@
               <a:buNone/>
             </a:pPr>
             <a:r>
-              <a:rPr lang="en-US" sz="900" b="1" dirty="0">
+              <a:rPr lang="en-US" sz="1000" b="1" dirty="0">
                 <a:solidFill>
                   <a:srgbClr val="FFFFFF"/>
                 </a:solidFill>
@@ -11756,7 +11766,7 @@
               </a:rPr>
               <a:t>WEATHERVIEW</a:t>
             </a:r>
-            <a:endParaRPr lang="en-US" sz="900" dirty="0"/>
+            <a:endParaRPr lang="en-US" sz="1000" dirty="0"/>
           </a:p>
         </p:txBody>
       </p:sp>
@@ -11792,33 +11802,130 @@
         </p:nvSpPr>
         <p:spPr>
           <a:xfrm>
-            <a:off x="888950" y="1154311"/>
-            <a:ext cx="558701" cy="558701"/>
-          </a:xfrm>
-          <a:prstGeom prst="roundRect">
-            <a:avLst>
-              <a:gd name="adj" fmla="val 13639"/>
-            </a:avLst>
-          </a:prstGeom>
-          <a:solidFill>
-            <a:srgbClr val="DAFBE1"/>
-          </a:solidFill>
-          <a:ln/>
-        </p:spPr>
-        <p:txBody>
-          <a:bodyPr wrap="square" rtlCol="0" anchor="ctr"/>
-          <a:lstStyle/>
-          <a:p>
-            <a:pPr indent="0" marL="0">
-              <a:buNone/>
-            </a:pPr>
-            <a:endParaRPr lang="en-US" dirty="0"/>
+            <a:off x="482501" y="330101"/>
+            <a:ext cx="8342275" cy="152400"/>
+          </a:xfrm>
+          <a:prstGeom prst="rect">
+            <a:avLst/>
+          </a:prstGeom>
+          <a:noFill/>
+          <a:ln/>
+        </p:spPr>
+        <p:txBody>
+          <a:bodyPr wrap="square" lIns="0" tIns="0" rIns="0" bIns="0" rtlCol="0" anchor="t"/>
+          <a:lstStyle/>
+          <a:p>
+            <a:pPr algn="l" indent="0" marL="0">
+              <a:buNone/>
+            </a:pPr>
+            <a:r>
+              <a:rPr lang="en-US" sz="1100" b="1" dirty="0">
+                <a:solidFill>
+                  <a:srgbClr val="1A7F37"/>
+                </a:solidFill>
+                <a:latin typeface="Arial" pitchFamily="34" charset="0"/>
+                <a:ea typeface="Arial" pitchFamily="34" charset="-122"/>
+                <a:cs typeface="Arial" pitchFamily="34" charset="-120"/>
+              </a:rPr>
+              <a:t>BEFORE YOU DEPLOY</a:t>
+            </a:r>
+            <a:endParaRPr lang="en-US" sz="1100" dirty="0"/>
+          </a:p>
+        </p:txBody>
+      </p:sp>
+      <p:sp>
+        <p:nvSpPr>
+          <p:cNvPr id="6" name="Text 3"/>
+          <p:cNvSpPr/>
+          <p:nvPr/>
+        </p:nvSpPr>
+        <p:spPr>
+          <a:xfrm>
+            <a:off x="482501" y="533251"/>
+            <a:ext cx="8342275" cy="419100"/>
+          </a:xfrm>
+          <a:prstGeom prst="rect">
+            <a:avLst/>
+          </a:prstGeom>
+          <a:noFill/>
+          <a:ln/>
+        </p:spPr>
+        <p:txBody>
+          <a:bodyPr wrap="square" lIns="0" tIns="0" rIns="0" bIns="0" rtlCol="0" anchor="t"/>
+          <a:lstStyle/>
+          <a:p>
+            <a:pPr algn="l" indent="0" marL="0">
+              <a:lnSpc>
+                <a:spcPts val="3300"/>
+              </a:lnSpc>
+              <a:spcBef>
+                <a:spcPts val="400"/>
+              </a:spcBef>
+              <a:buNone/>
+            </a:pPr>
+            <a:r>
+              <a:rPr lang="en-US" sz="2800" b="1" dirty="0">
+                <a:solidFill>
+                  <a:srgbClr val="1F2328"/>
+                </a:solidFill>
+                <a:latin typeface="Arial" pitchFamily="34" charset="0"/>
+                <a:ea typeface="Arial" pitchFamily="34" charset="-122"/>
+                <a:cs typeface="Arial" pitchFamily="34" charset="-120"/>
+              </a:rPr>
+              <a:t>Ask for READY or NOT READY</a:t>
+            </a:r>
+            <a:endParaRPr lang="en-US" sz="2800" dirty="0"/>
+          </a:p>
+        </p:txBody>
+      </p:sp>
+      <p:sp>
+        <p:nvSpPr>
+          <p:cNvPr id="7" name="Text 4"/>
+          <p:cNvSpPr/>
+          <p:nvPr/>
+        </p:nvSpPr>
+        <p:spPr>
+          <a:xfrm>
+            <a:off x="482501" y="1028551"/>
+            <a:ext cx="8342275" cy="254050"/>
+          </a:xfrm>
+          <a:prstGeom prst="rect">
+            <a:avLst/>
+          </a:prstGeom>
+          <a:noFill/>
+          <a:ln/>
+        </p:spPr>
+        <p:txBody>
+          <a:bodyPr wrap="square" lIns="0" tIns="0" rIns="0" bIns="0" rtlCol="0" anchor="t"/>
+          <a:lstStyle/>
+          <a:p>
+            <a:pPr algn="l" indent="0" marL="0">
+              <a:lnSpc>
+                <a:spcPts val="2000"/>
+              </a:lnSpc>
+              <a:spcBef>
+                <a:spcPts val="600"/>
+              </a:spcBef>
+              <a:buNone/>
+            </a:pPr>
+            <a:r>
+              <a:rPr lang="en-US" sz="1600" dirty="0">
+                <a:solidFill>
+                  <a:srgbClr val="59636E"/>
+                </a:solidFill>
+                <a:latin typeface="Arial" pitchFamily="34" charset="0"/>
+                <a:ea typeface="Arial" pitchFamily="34" charset="-122"/>
+                <a:cs typeface="Arial" pitchFamily="34" charset="-120"/>
+              </a:rPr>
+              <a:t>A read-only review checks every requirement and runs a preview. Nothing is created.</a:t>
+            </a:r>
+            <a:endParaRPr lang="en-US" sz="1600" dirty="0"/>
           </a:p>
         </p:txBody>
       </p:sp>
       <p:pic>
         <p:nvPicPr>
-          <p:cNvPr id="6" name="Image 1" descr="/Users/danwahlin/.copilot/session-state/a2da67da-2d7a-45f2-aa6a-2a42a7b82a72/files/build/icons/GoShieldCheck-1A7F37.png">    </p:cNvPr>
+          <p:cNvPr id="8" name="Image 1" descr="/Users/danwahlin/.copilot/session-state/a2da67da-2d7a-45f2-aa6a-2a42a7b82a72/files/build/img/gen-pre-deployment-review.png">    </p:cNvPr>
           <p:cNvPicPr>
             <a:picLocks noChangeAspect="1"/>
           </p:cNvPicPr>
@@ -11832,143 +11939,14 @@
         </p:blipFill>
         <p:spPr>
           <a:xfrm>
-            <a:off x="1009501" y="1274862"/>
-            <a:ext cx="317450" cy="317450"/>
+            <a:off x="1293912" y="1498550"/>
+            <a:ext cx="6555730" cy="3352800"/>
           </a:xfrm>
           <a:prstGeom prst="rect">
             <a:avLst/>
           </a:prstGeom>
         </p:spPr>
       </p:pic>
-      <p:sp>
-        <p:nvSpPr>
-          <p:cNvPr id="7" name="Text 3"/>
-          <p:cNvSpPr/>
-          <p:nvPr/>
-        </p:nvSpPr>
-        <p:spPr>
-          <a:xfrm>
-            <a:off x="888950" y="1941612"/>
-            <a:ext cx="7513269" cy="142875"/>
-          </a:xfrm>
-          <a:prstGeom prst="rect">
-            <a:avLst/>
-          </a:prstGeom>
-          <a:noFill/>
-          <a:ln/>
-        </p:spPr>
-        <p:txBody>
-          <a:bodyPr wrap="square" lIns="0" tIns="0" rIns="0" bIns="0" rtlCol="0" anchor="t"/>
-          <a:lstStyle/>
-          <a:p>
-            <a:pPr algn="l" indent="0" marL="0">
-              <a:spcAft>
-                <a:spcPts val="1000"/>
-              </a:spcAft>
-              <a:buNone/>
-            </a:pPr>
-            <a:r>
-              <a:rPr lang="en-US" sz="1000" b="1" dirty="0">
-                <a:solidFill>
-                  <a:srgbClr val="1A7F37"/>
-                </a:solidFill>
-                <a:latin typeface="Arial" pitchFamily="34" charset="0"/>
-                <a:ea typeface="Arial" pitchFamily="34" charset="-122"/>
-                <a:cs typeface="Arial" pitchFamily="34" charset="-120"/>
-              </a:rPr>
-              <a:t>BEFORE YOU DEPLOY</a:t>
-            </a:r>
-            <a:endParaRPr lang="en-US" sz="1000" dirty="0"/>
-          </a:p>
-        </p:txBody>
-      </p:sp>
-      <p:sp>
-        <p:nvSpPr>
-          <p:cNvPr id="8" name="Text 4"/>
-          <p:cNvSpPr/>
-          <p:nvPr/>
-        </p:nvSpPr>
-        <p:spPr>
-          <a:xfrm>
-            <a:off x="888950" y="2211437"/>
-            <a:ext cx="7513269" cy="1015901"/>
-          </a:xfrm>
-          <a:prstGeom prst="rect">
-            <a:avLst/>
-          </a:prstGeom>
-          <a:noFill/>
-          <a:ln/>
-        </p:spPr>
-        <p:txBody>
-          <a:bodyPr wrap="square" lIns="0" tIns="0" rIns="0" bIns="0" rtlCol="0" anchor="t"/>
-          <a:lstStyle/>
-          <a:p>
-            <a:pPr algn="l" indent="0" marL="0">
-              <a:lnSpc>
-                <a:spcPts val="4000"/>
-              </a:lnSpc>
-              <a:buNone/>
-            </a:pPr>
-            <a:r>
-              <a:rPr lang="en-US" sz="3200" b="1" dirty="0">
-                <a:solidFill>
-                  <a:srgbClr val="1F2328"/>
-                </a:solidFill>
-                <a:latin typeface="Arial" pitchFamily="34" charset="0"/>
-                <a:ea typeface="Arial" pitchFamily="34" charset="-122"/>
-                <a:cs typeface="Arial" pitchFamily="34" charset="-120"/>
-              </a:rPr>
-              <a:t>Ask for READY or NOT READY, with evidence.</a:t>
-            </a:r>
-            <a:endParaRPr lang="en-US" sz="3200" dirty="0"/>
-          </a:p>
-        </p:txBody>
-      </p:sp>
-      <p:sp>
-        <p:nvSpPr>
-          <p:cNvPr id="9" name="Text 5"/>
-          <p:cNvSpPr/>
-          <p:nvPr/>
-        </p:nvSpPr>
-        <p:spPr>
-          <a:xfrm>
-            <a:off x="888950" y="3430488"/>
-            <a:ext cx="7513269" cy="558701"/>
-          </a:xfrm>
-          <a:prstGeom prst="rect">
-            <a:avLst/>
-          </a:prstGeom>
-          <a:noFill/>
-          <a:ln/>
-        </p:spPr>
-        <p:txBody>
-          <a:bodyPr wrap="square" lIns="0" tIns="0" rIns="0" bIns="0" rtlCol="0" anchor="t"/>
-          <a:lstStyle/>
-          <a:p>
-            <a:pPr algn="l" indent="0" marL="0">
-              <a:lnSpc>
-                <a:spcPts val="2200"/>
-              </a:lnSpc>
-              <a:spcBef>
-                <a:spcPts val="1600"/>
-              </a:spcBef>
-              <a:buNone/>
-            </a:pPr>
-            <a:r>
-              <a:rPr lang="en-US" sz="1600" dirty="0">
-                <a:solidFill>
-                  <a:srgbClr val="59636E"/>
-                </a:solidFill>
-                <a:latin typeface="Arial" pitchFamily="34" charset="0"/>
-                <a:ea typeface="Arial" pitchFamily="34" charset="-122"/>
-                <a:cs typeface="Arial" pitchFamily="34" charset="-120"/>
-              </a:rPr>
-              <a:t>A read-only pre-deployment review checks every requirement and runs azd provision --preview. Nothing is created.</a:t>
-            </a:r>
-            <a:endParaRPr lang="en-US" sz="1600" dirty="0"/>
-          </a:p>
-        </p:txBody>
-      </p:sp>
     </p:spTree>
   </p:cSld>
   <p:clrMapOvr>
@@ -12009,12 +11987,12 @@
         </p:nvSpPr>
         <p:spPr>
           <a:xfrm>
-            <a:off x="7446466" y="152400"/>
-            <a:ext cx="1113383" cy="266700"/>
+            <a:off x="7325916" y="152400"/>
+            <a:ext cx="1233934" cy="279350"/>
           </a:xfrm>
           <a:prstGeom prst="roundRect">
             <a:avLst>
-              <a:gd name="adj" fmla="val 23810"/>
+              <a:gd name="adj" fmla="val 22731"/>
             </a:avLst>
           </a:prstGeom>
           <a:solidFill>
@@ -12041,8 +12019,8 @@
         </p:nvSpPr>
         <p:spPr>
           <a:xfrm>
-            <a:off x="7564822" y="219075"/>
-            <a:ext cx="876672" cy="133350"/>
+            <a:off x="7455969" y="220563"/>
+            <a:ext cx="973827" cy="142875"/>
           </a:xfrm>
           <a:prstGeom prst="rect">
             <a:avLst/>
@@ -12058,7 +12036,7 @@
               <a:buNone/>
             </a:pPr>
             <a:r>
-              <a:rPr lang="en-US" sz="900" b="1" dirty="0">
+              <a:rPr lang="en-US" sz="1000" b="1" dirty="0">
                 <a:solidFill>
                   <a:srgbClr val="FFFFFF"/>
                 </a:solidFill>
@@ -12068,7 +12046,7 @@
               </a:rPr>
               <a:t>WEATHERVIEW</a:t>
             </a:r>
-            <a:endParaRPr lang="en-US" sz="900" dirty="0"/>
+            <a:endParaRPr lang="en-US" sz="1000" dirty="0"/>
           </a:p>
         </p:txBody>
       </p:sp>
@@ -12105,7 +12083,7 @@
         <p:spPr>
           <a:xfrm>
             <a:off x="482501" y="330101"/>
-            <a:ext cx="7772400" cy="142875"/>
+            <a:ext cx="8342275" cy="152400"/>
           </a:xfrm>
           <a:prstGeom prst="rect">
             <a:avLst/>
@@ -12121,7 +12099,7 @@
               <a:buNone/>
             </a:pPr>
             <a:r>
-              <a:rPr lang="en-US" sz="1000" b="1" dirty="0">
+              <a:rPr lang="en-US" sz="1100" b="1" dirty="0">
                 <a:solidFill>
                   <a:srgbClr val="1A7F37"/>
                 </a:solidFill>
@@ -12131,7 +12109,7 @@
               </a:rPr>
               <a:t>SHIP IT</a:t>
             </a:r>
-            <a:endParaRPr lang="en-US" sz="1000" dirty="0"/>
+            <a:endParaRPr lang="en-US" sz="1100" dirty="0"/>
           </a:p>
         </p:txBody>
       </p:sp>
@@ -12143,8 +12121,8 @@
         </p:nvSpPr>
         <p:spPr>
           <a:xfrm>
-            <a:off x="482501" y="523726"/>
-            <a:ext cx="7772400" cy="393650"/>
+            <a:off x="482501" y="533251"/>
+            <a:ext cx="8342275" cy="419100"/>
           </a:xfrm>
           <a:prstGeom prst="rect">
             <a:avLst/>
@@ -12158,7 +12136,7 @@
           <a:p>
             <a:pPr algn="l" indent="0" marL="0">
               <a:lnSpc>
-                <a:spcPts val="3100"/>
+                <a:spcPts val="3300"/>
               </a:lnSpc>
               <a:spcBef>
                 <a:spcPts val="400"/>
@@ -12166,7 +12144,7 @@
               <a:buNone/>
             </a:pPr>
             <a:r>
-              <a:rPr lang="en-US" sz="2600" b="1" dirty="0">
+              <a:rPr lang="en-US" sz="2800" b="1" dirty="0">
                 <a:solidFill>
                   <a:srgbClr val="1F2328"/>
                 </a:solidFill>
@@ -12176,7 +12154,7 @@
               </a:rPr>
               <a:t>One command to deploy</a:t>
             </a:r>
-            <a:endParaRPr lang="en-US" sz="2600" dirty="0"/>
+            <a:endParaRPr lang="en-US" sz="2800" dirty="0"/>
           </a:p>
         </p:txBody>
       </p:sp>
@@ -12188,7 +12166,7 @@
         </p:nvSpPr>
         <p:spPr>
           <a:xfrm>
-            <a:off x="1015901" y="1847701"/>
+            <a:off x="1015901" y="1835200"/>
             <a:ext cx="7111901" cy="1879402"/>
           </a:xfrm>
           <a:prstGeom prst="roundRect">
@@ -12227,7 +12205,7 @@
         </p:nvSpPr>
         <p:spPr>
           <a:xfrm>
-            <a:off x="1015901" y="1847701"/>
+            <a:off x="1015901" y="1835200"/>
             <a:ext cx="7111901" cy="253901"/>
           </a:xfrm>
           <a:prstGeom prst="roundRect">
@@ -12259,7 +12237,7 @@
         </p:nvSpPr>
         <p:spPr>
           <a:xfrm>
-            <a:off x="1142851" y="1930152"/>
+            <a:off x="1142851" y="1917650"/>
             <a:ext cx="88850" cy="88850"/>
           </a:xfrm>
           <a:prstGeom prst="roundRect">
@@ -12291,7 +12269,7 @@
         </p:nvSpPr>
         <p:spPr>
           <a:xfrm>
-            <a:off x="1295102" y="1930152"/>
+            <a:off x="1295102" y="1917650"/>
             <a:ext cx="88850" cy="88850"/>
           </a:xfrm>
           <a:prstGeom prst="roundRect">
@@ -12323,7 +12301,7 @@
         </p:nvSpPr>
         <p:spPr>
           <a:xfrm>
-            <a:off x="1447354" y="1930152"/>
+            <a:off x="1447354" y="1917650"/>
             <a:ext cx="88850" cy="88850"/>
           </a:xfrm>
           <a:prstGeom prst="roundRect">
@@ -12355,8 +12333,8 @@
         </p:nvSpPr>
         <p:spPr>
           <a:xfrm>
-            <a:off x="1701105" y="1917502"/>
-            <a:ext cx="528584" cy="114300"/>
+            <a:off x="1701105" y="1890713"/>
+            <a:ext cx="621792" cy="142875"/>
           </a:xfrm>
           <a:prstGeom prst="rect">
             <a:avLst/>
@@ -12372,7 +12350,7 @@
               <a:buNone/>
             </a:pPr>
             <a:r>
-              <a:rPr lang="en-US" sz="850" dirty="0">
+              <a:rPr lang="en-US" sz="1000" dirty="0">
                 <a:solidFill>
                   <a:srgbClr val="8B949E"/>
                 </a:solidFill>
@@ -12382,7 +12360,7 @@
               </a:rPr>
               <a:t>Terminal</a:t>
             </a:r>
-            <a:endParaRPr lang="en-US" sz="850" dirty="0"/>
+            <a:endParaRPr lang="en-US" sz="1000" dirty="0"/>
           </a:p>
         </p:txBody>
       </p:sp>
@@ -12394,7 +12372,7 @@
         </p:nvSpPr>
         <p:spPr>
           <a:xfrm>
-            <a:off x="1244501" y="2279303"/>
+            <a:off x="1244501" y="2266801"/>
             <a:ext cx="6787795" cy="275630"/>
           </a:xfrm>
           <a:prstGeom prst="rect">
@@ -12453,7 +12431,7 @@
         </p:nvSpPr>
         <p:spPr>
           <a:xfrm>
-            <a:off x="1244501" y="2697063"/>
+            <a:off x="1244501" y="2684562"/>
             <a:ext cx="6787795" cy="275630"/>
           </a:xfrm>
           <a:prstGeom prst="rect">
@@ -12512,7 +12490,7 @@
         </p:nvSpPr>
         <p:spPr>
           <a:xfrm>
-            <a:off x="1244501" y="2972693"/>
+            <a:off x="1244501" y="2960191"/>
             <a:ext cx="6787795" cy="275630"/>
           </a:xfrm>
           <a:prstGeom prst="rect">
@@ -12554,7 +12532,7 @@
         </p:nvSpPr>
         <p:spPr>
           <a:xfrm>
-            <a:off x="1244501" y="3248323"/>
+            <a:off x="1244501" y="3235821"/>
             <a:ext cx="6787795" cy="275630"/>
           </a:xfrm>
           <a:prstGeom prst="rect">
@@ -12582,7 +12560,7 @@
                 <a:ea typeface="Courier New" pitchFamily="34" charset="-122"/>
                 <a:cs typeface="Courier New" pitchFamily="34" charset="-120"/>
               </a:rPr>
-              <a:t>Open-Meteo contract verified</a:t>
+              <a:t>​ Open-Meteo contract verified</a:t>
             </a:r>
             <a:endParaRPr lang="en-US" sz="1400" dirty="0"/>
           </a:p>
@@ -12604,8 +12582,8 @@
         </p:blipFill>
         <p:spPr>
           <a:xfrm>
-            <a:off x="1015901" y="3968353"/>
-            <a:ext cx="190500" cy="190500"/>
+            <a:off x="1015901" y="4006602"/>
+            <a:ext cx="215801" cy="215801"/>
           </a:xfrm>
           <a:prstGeom prst="rect">
             <a:avLst/>
@@ -12620,8 +12598,8 @@
         </p:nvSpPr>
         <p:spPr>
           <a:xfrm>
-            <a:off x="1307902" y="3955703"/>
-            <a:ext cx="5283866" cy="215950"/>
+            <a:off x="1333202" y="3993952"/>
+            <a:ext cx="5918106" cy="241250"/>
           </a:xfrm>
           <a:prstGeom prst="rect">
             <a:avLst/>
@@ -12635,12 +12613,12 @@
           <a:p>
             <a:pPr algn="l" indent="0" marL="0">
               <a:lnSpc>
-                <a:spcPts val="1700"/>
+                <a:spcPts val="1900"/>
               </a:lnSpc>
               <a:buNone/>
             </a:pPr>
             <a:r>
-              <a:rPr lang="en-US" sz="1250" dirty="0">
+              <a:rPr lang="en-US" sz="1400" dirty="0">
                 <a:solidFill>
                   <a:srgbClr val="1F2328"/>
                 </a:solidFill>
@@ -12652,12 +12630,12 @@
             </a:r>
             <a:pPr algn="l" indent="0" marL="0">
               <a:lnSpc>
-                <a:spcPts val="1700"/>
+                <a:spcPts val="1900"/>
               </a:lnSpc>
               <a:buNone/>
             </a:pPr>
             <a:r>
-              <a:rPr lang="en-US" sz="1250" b="1" dirty="0">
+              <a:rPr lang="en-US" sz="1400" b="1" dirty="0">
                 <a:solidFill>
                   <a:srgbClr val="1F2328"/>
                 </a:solidFill>
@@ -12669,12 +12647,12 @@
             </a:r>
             <a:pPr algn="l" indent="0" marL="0">
               <a:lnSpc>
-                <a:spcPts val="1700"/>
+                <a:spcPts val="1900"/>
               </a:lnSpc>
               <a:buNone/>
             </a:pPr>
             <a:r>
-              <a:rPr lang="en-US" sz="1250" dirty="0">
+              <a:rPr lang="en-US" sz="1400" dirty="0">
                 <a:solidFill>
                   <a:srgbClr val="1F2328"/>
                 </a:solidFill>
@@ -12684,7 +12662,7 @@
               </a:rPr>
               <a:t> and click around.</a:t>
             </a:r>
-            <a:endParaRPr lang="en-US" sz="1250" dirty="0"/>
+            <a:endParaRPr lang="en-US" sz="1400" dirty="0"/>
           </a:p>
         </p:txBody>
       </p:sp>
@@ -12728,12 +12706,12 @@
         </p:nvSpPr>
         <p:spPr>
           <a:xfrm>
-            <a:off x="7446466" y="152400"/>
-            <a:ext cx="1113383" cy="266700"/>
+            <a:off x="7325916" y="152400"/>
+            <a:ext cx="1233934" cy="279350"/>
           </a:xfrm>
           <a:prstGeom prst="roundRect">
             <a:avLst>
-              <a:gd name="adj" fmla="val 23810"/>
+              <a:gd name="adj" fmla="val 22731"/>
             </a:avLst>
           </a:prstGeom>
           <a:solidFill>
@@ -12760,8 +12738,8 @@
         </p:nvSpPr>
         <p:spPr>
           <a:xfrm>
-            <a:off x="7564822" y="219075"/>
-            <a:ext cx="876672" cy="133350"/>
+            <a:off x="7455969" y="220563"/>
+            <a:ext cx="973827" cy="142875"/>
           </a:xfrm>
           <a:prstGeom prst="rect">
             <a:avLst/>
@@ -12777,7 +12755,7 @@
               <a:buNone/>
             </a:pPr>
             <a:r>
-              <a:rPr lang="en-US" sz="900" b="1" dirty="0">
+              <a:rPr lang="en-US" sz="1000" b="1" dirty="0">
                 <a:solidFill>
                   <a:srgbClr val="FFFFFF"/>
                 </a:solidFill>
@@ -12787,7 +12765,7 @@
               </a:rPr>
               <a:t>WEATHERVIEW</a:t>
             </a:r>
-            <a:endParaRPr lang="en-US" sz="900" dirty="0"/>
+            <a:endParaRPr lang="en-US" sz="1000" dirty="0"/>
           </a:p>
         </p:txBody>
       </p:sp>
@@ -12824,7 +12802,7 @@
         <p:spPr>
           <a:xfrm>
             <a:off x="482501" y="330101"/>
-            <a:ext cx="7772400" cy="142875"/>
+            <a:ext cx="8342275" cy="152400"/>
           </a:xfrm>
           <a:prstGeom prst="rect">
             <a:avLst/>
@@ -12840,7 +12818,7 @@
               <a:buNone/>
             </a:pPr>
             <a:r>
-              <a:rPr lang="en-US" sz="1000" b="1" dirty="0">
+              <a:rPr lang="en-US" sz="1100" b="1" dirty="0">
                 <a:solidFill>
                   <a:srgbClr val="1A7F37"/>
                 </a:solidFill>
@@ -12850,7 +12828,7 @@
               </a:rPr>
               <a:t>LIVE ON AZURE</a:t>
             </a:r>
-            <a:endParaRPr lang="en-US" sz="1000" dirty="0"/>
+            <a:endParaRPr lang="en-US" sz="1100" dirty="0"/>
           </a:p>
         </p:txBody>
       </p:sp>
@@ -12862,8 +12840,8 @@
         </p:nvSpPr>
         <p:spPr>
           <a:xfrm>
-            <a:off x="482501" y="523726"/>
-            <a:ext cx="7772400" cy="393650"/>
+            <a:off x="482501" y="533251"/>
+            <a:ext cx="8342275" cy="419100"/>
           </a:xfrm>
           <a:prstGeom prst="rect">
             <a:avLst/>
@@ -12877,7 +12855,7 @@
           <a:p>
             <a:pPr algn="l" indent="0" marL="0">
               <a:lnSpc>
-                <a:spcPts val="3100"/>
+                <a:spcPts val="3300"/>
               </a:lnSpc>
               <a:spcBef>
                 <a:spcPts val="400"/>
@@ -12885,7 +12863,7 @@
               <a:buNone/>
             </a:pPr>
             <a:r>
-              <a:rPr lang="en-US" sz="2600" b="1" dirty="0">
+              <a:rPr lang="en-US" sz="2800" b="1" dirty="0">
                 <a:solidFill>
                   <a:srgbClr val="1F2328"/>
                 </a:solidFill>
@@ -12895,7 +12873,7 @@
               </a:rPr>
               <a:t>Same app, now global</a:t>
             </a:r>
-            <a:endParaRPr lang="en-US" sz="2600" dirty="0"/>
+            <a:endParaRPr lang="en-US" sz="2800" dirty="0"/>
           </a:p>
         </p:txBody>
       </p:sp>
@@ -12907,7 +12885,7 @@
         </p:nvSpPr>
         <p:spPr>
           <a:xfrm>
-            <a:off x="1431131" y="1222177"/>
+            <a:off x="1431131" y="1247626"/>
             <a:ext cx="6281291" cy="3575000"/>
           </a:xfrm>
           <a:prstGeom prst="roundRect">
@@ -12958,7 +12936,7 @@
         </p:blipFill>
         <p:spPr>
           <a:xfrm>
-            <a:off x="1478756" y="1269802"/>
+            <a:off x="1478756" y="1295251"/>
             <a:ext cx="6186041" cy="3479750"/>
           </a:xfrm>
           <a:prstGeom prst="rect">
@@ -13006,12 +12984,12 @@
         </p:nvSpPr>
         <p:spPr>
           <a:xfrm>
-            <a:off x="7446466" y="152400"/>
-            <a:ext cx="1113383" cy="266700"/>
+            <a:off x="7325916" y="152400"/>
+            <a:ext cx="1233934" cy="279350"/>
           </a:xfrm>
           <a:prstGeom prst="roundRect">
             <a:avLst>
-              <a:gd name="adj" fmla="val 23810"/>
+              <a:gd name="adj" fmla="val 22731"/>
             </a:avLst>
           </a:prstGeom>
           <a:solidFill>
@@ -13038,8 +13016,8 @@
         </p:nvSpPr>
         <p:spPr>
           <a:xfrm>
-            <a:off x="7564822" y="219075"/>
-            <a:ext cx="876672" cy="133350"/>
+            <a:off x="7455969" y="220563"/>
+            <a:ext cx="973827" cy="142875"/>
           </a:xfrm>
           <a:prstGeom prst="rect">
             <a:avLst/>
@@ -13055,7 +13033,7 @@
               <a:buNone/>
             </a:pPr>
             <a:r>
-              <a:rPr lang="en-US" sz="900" b="1" dirty="0">
+              <a:rPr lang="en-US" sz="1000" b="1" dirty="0">
                 <a:solidFill>
                   <a:srgbClr val="FFFFFF"/>
                 </a:solidFill>
@@ -13065,7 +13043,7 @@
               </a:rPr>
               <a:t>WEATHERVIEW</a:t>
             </a:r>
-            <a:endParaRPr lang="en-US" sz="900" dirty="0"/>
+            <a:endParaRPr lang="en-US" sz="1000" dirty="0"/>
           </a:p>
         </p:txBody>
       </p:sp>
@@ -13102,7 +13080,7 @@
         <p:spPr>
           <a:xfrm>
             <a:off x="482501" y="330101"/>
-            <a:ext cx="7772400" cy="142875"/>
+            <a:ext cx="8342275" cy="152400"/>
           </a:xfrm>
           <a:prstGeom prst="rect">
             <a:avLst/>
@@ -13118,7 +13096,7 @@
               <a:buNone/>
             </a:pPr>
             <a:r>
-              <a:rPr lang="en-US" sz="1000" b="1" dirty="0">
+              <a:rPr lang="en-US" sz="1100" b="1" dirty="0">
                 <a:solidFill>
                   <a:srgbClr val="1A7F37"/>
                 </a:solidFill>
@@ -13128,7 +13106,7 @@
               </a:rPr>
               <a:t>CLEAN UP</a:t>
             </a:r>
-            <a:endParaRPr lang="en-US" sz="1000" dirty="0"/>
+            <a:endParaRPr lang="en-US" sz="1100" dirty="0"/>
           </a:p>
         </p:txBody>
       </p:sp>
@@ -13140,8 +13118,8 @@
         </p:nvSpPr>
         <p:spPr>
           <a:xfrm>
-            <a:off x="482501" y="523726"/>
-            <a:ext cx="7772400" cy="393650"/>
+            <a:off x="482501" y="533251"/>
+            <a:ext cx="8342275" cy="419100"/>
           </a:xfrm>
           <a:prstGeom prst="rect">
             <a:avLst/>
@@ -13155,7 +13133,7 @@
           <a:p>
             <a:pPr algn="l" indent="0" marL="0">
               <a:lnSpc>
-                <a:spcPts val="3100"/>
+                <a:spcPts val="3300"/>
               </a:lnSpc>
               <a:spcBef>
                 <a:spcPts val="400"/>
@@ -13163,7 +13141,7 @@
               <a:buNone/>
             </a:pPr>
             <a:r>
-              <a:rPr lang="en-US" sz="2600" b="1" dirty="0">
+              <a:rPr lang="en-US" sz="2800" b="1" dirty="0">
                 <a:solidFill>
                   <a:srgbClr val="1F2328"/>
                 </a:solidFill>
@@ -13173,7 +13151,7 @@
               </a:rPr>
               <a:t>Tear it down the same day</a:t>
             </a:r>
-            <a:endParaRPr lang="en-US" sz="2600" dirty="0"/>
+            <a:endParaRPr lang="en-US" sz="2800" dirty="0"/>
           </a:p>
         </p:txBody>
       </p:sp>
@@ -13185,7 +13163,7 @@
         </p:nvSpPr>
         <p:spPr>
           <a:xfrm>
-            <a:off x="1015901" y="1803350"/>
+            <a:off x="1015901" y="1790849"/>
             <a:ext cx="7111901" cy="1968252"/>
           </a:xfrm>
           <a:prstGeom prst="roundRect">
@@ -13224,7 +13202,7 @@
         </p:nvSpPr>
         <p:spPr>
           <a:xfrm>
-            <a:off x="1015901" y="1803350"/>
+            <a:off x="1015901" y="1790849"/>
             <a:ext cx="7111901" cy="253901"/>
           </a:xfrm>
           <a:prstGeom prst="roundRect">
@@ -13256,7 +13234,7 @@
         </p:nvSpPr>
         <p:spPr>
           <a:xfrm>
-            <a:off x="1142851" y="1885801"/>
+            <a:off x="1142851" y="1873300"/>
             <a:ext cx="88850" cy="88850"/>
           </a:xfrm>
           <a:prstGeom prst="roundRect">
@@ -13288,7 +13266,7 @@
         </p:nvSpPr>
         <p:spPr>
           <a:xfrm>
-            <a:off x="1295102" y="1885801"/>
+            <a:off x="1295102" y="1873300"/>
             <a:ext cx="88850" cy="88850"/>
           </a:xfrm>
           <a:prstGeom prst="roundRect">
@@ -13320,7 +13298,7 @@
         </p:nvSpPr>
         <p:spPr>
           <a:xfrm>
-            <a:off x="1447354" y="1885801"/>
+            <a:off x="1447354" y="1873300"/>
             <a:ext cx="88850" cy="88850"/>
           </a:xfrm>
           <a:prstGeom prst="roundRect">
@@ -13352,8 +13330,8 @@
         </p:nvSpPr>
         <p:spPr>
           <a:xfrm>
-            <a:off x="1701105" y="1873151"/>
-            <a:ext cx="528584" cy="114300"/>
+            <a:off x="1701105" y="1846362"/>
+            <a:ext cx="621792" cy="142875"/>
           </a:xfrm>
           <a:prstGeom prst="rect">
             <a:avLst/>
@@ -13369,7 +13347,7 @@
               <a:buNone/>
             </a:pPr>
             <a:r>
-              <a:rPr lang="en-US" sz="850" dirty="0">
+              <a:rPr lang="en-US" sz="1000" dirty="0">
                 <a:solidFill>
                   <a:srgbClr val="8B949E"/>
                 </a:solidFill>
@@ -13379,7 +13357,7 @@
               </a:rPr>
               <a:t>Terminal</a:t>
             </a:r>
-            <a:endParaRPr lang="en-US" sz="850" dirty="0"/>
+            <a:endParaRPr lang="en-US" sz="1000" dirty="0"/>
           </a:p>
         </p:txBody>
       </p:sp>
@@ -13391,7 +13369,7 @@
         </p:nvSpPr>
         <p:spPr>
           <a:xfrm>
-            <a:off x="1244501" y="2234952"/>
+            <a:off x="1244501" y="2222450"/>
             <a:ext cx="6787795" cy="295275"/>
           </a:xfrm>
           <a:prstGeom prst="rect">
@@ -13450,7 +13428,7 @@
         </p:nvSpPr>
         <p:spPr>
           <a:xfrm>
-            <a:off x="1244501" y="2682627"/>
+            <a:off x="1244501" y="2670125"/>
             <a:ext cx="6787795" cy="295275"/>
           </a:xfrm>
           <a:prstGeom prst="rect">
@@ -13492,7 +13470,7 @@
         </p:nvSpPr>
         <p:spPr>
           <a:xfrm>
-            <a:off x="1244501" y="2977902"/>
+            <a:off x="1244501" y="2965400"/>
             <a:ext cx="6787795" cy="295275"/>
           </a:xfrm>
           <a:prstGeom prst="rect">
@@ -13551,7 +13529,7 @@
         </p:nvSpPr>
         <p:spPr>
           <a:xfrm>
-            <a:off x="1244501" y="3273177"/>
+            <a:off x="1244501" y="3260675"/>
             <a:ext cx="6787795" cy="295275"/>
           </a:xfrm>
           <a:prstGeom prst="rect">
@@ -13601,8 +13579,8 @@
         </p:blipFill>
         <p:spPr>
           <a:xfrm>
-            <a:off x="1015901" y="4012853"/>
-            <a:ext cx="190500" cy="190500"/>
+            <a:off x="1015901" y="4051102"/>
+            <a:ext cx="215801" cy="215801"/>
           </a:xfrm>
           <a:prstGeom prst="rect">
             <a:avLst/>
@@ -13617,8 +13595,8 @@
         </p:nvSpPr>
         <p:spPr>
           <a:xfrm>
-            <a:off x="1307902" y="4000202"/>
-            <a:ext cx="4822380" cy="215950"/>
+            <a:off x="1333202" y="4038451"/>
+            <a:ext cx="5401363" cy="241250"/>
           </a:xfrm>
           <a:prstGeom prst="rect">
             <a:avLst/>
@@ -13632,12 +13610,12 @@
           <a:p>
             <a:pPr algn="l" indent="0" marL="0">
               <a:lnSpc>
-                <a:spcPts val="1700"/>
+                <a:spcPts val="1900"/>
               </a:lnSpc>
               <a:buNone/>
             </a:pPr>
             <a:r>
-              <a:rPr lang="en-US" sz="1250" dirty="0">
+              <a:rPr lang="en-US" sz="1400" dirty="0">
                 <a:solidFill>
                   <a:srgbClr val="1F2328"/>
                 </a:solidFill>
@@ -13647,7 +13625,7 @@
               </a:rPr>
               <a:t>The Free tier costs $0, but cleaning up is still a habit worth building.</a:t>
             </a:r>
-            <a:endParaRPr lang="en-US" sz="1250" dirty="0"/>
+            <a:endParaRPr lang="en-US" sz="1400" dirty="0"/>
           </a:p>
         </p:txBody>
       </p:sp>
@@ -13691,12 +13669,12 @@
         </p:nvSpPr>
         <p:spPr>
           <a:xfrm>
-            <a:off x="7446466" y="152400"/>
-            <a:ext cx="1113383" cy="266700"/>
+            <a:off x="7325916" y="152400"/>
+            <a:ext cx="1233934" cy="279350"/>
           </a:xfrm>
           <a:prstGeom prst="roundRect">
             <a:avLst>
-              <a:gd name="adj" fmla="val 23810"/>
+              <a:gd name="adj" fmla="val 22731"/>
             </a:avLst>
           </a:prstGeom>
           <a:solidFill>
@@ -13723,8 +13701,8 @@
         </p:nvSpPr>
         <p:spPr>
           <a:xfrm>
-            <a:off x="7564822" y="219075"/>
-            <a:ext cx="876672" cy="133350"/>
+            <a:off x="7455969" y="220563"/>
+            <a:ext cx="973827" cy="142875"/>
           </a:xfrm>
           <a:prstGeom prst="rect">
             <a:avLst/>
@@ -13740,7 +13718,7 @@
               <a:buNone/>
             </a:pPr>
             <a:r>
-              <a:rPr lang="en-US" sz="900" b="1" dirty="0">
+              <a:rPr lang="en-US" sz="1000" b="1" dirty="0">
                 <a:solidFill>
                   <a:srgbClr val="FFFFFF"/>
                 </a:solidFill>
@@ -13750,7 +13728,7 @@
               </a:rPr>
               <a:t>WEATHERVIEW</a:t>
             </a:r>
-            <a:endParaRPr lang="en-US" sz="900" dirty="0"/>
+            <a:endParaRPr lang="en-US" sz="1000" dirty="0"/>
           </a:p>
         </p:txBody>
       </p:sp>
@@ -13787,7 +13765,7 @@
         <p:spPr>
           <a:xfrm>
             <a:off x="482501" y="330101"/>
-            <a:ext cx="7772400" cy="142875"/>
+            <a:ext cx="8342275" cy="152400"/>
           </a:xfrm>
           <a:prstGeom prst="rect">
             <a:avLst/>
@@ -13803,7 +13781,7 @@
               <a:buNone/>
             </a:pPr>
             <a:r>
-              <a:rPr lang="en-US" sz="1000" b="1" dirty="0">
+              <a:rPr lang="en-US" sz="1100" b="1" dirty="0">
                 <a:solidFill>
                   <a:srgbClr val="1A7F37"/>
                 </a:solidFill>
@@ -13813,7 +13791,7 @@
               </a:rPr>
               <a:t>KEY TAKEAWAYS</a:t>
             </a:r>
-            <a:endParaRPr lang="en-US" sz="1000" dirty="0"/>
+            <a:endParaRPr lang="en-US" sz="1100" dirty="0"/>
           </a:p>
         </p:txBody>
       </p:sp>
@@ -13825,8 +13803,8 @@
         </p:nvSpPr>
         <p:spPr>
           <a:xfrm>
-            <a:off x="482501" y="523726"/>
-            <a:ext cx="7772400" cy="393650"/>
+            <a:off x="482501" y="533251"/>
+            <a:ext cx="8342275" cy="419100"/>
           </a:xfrm>
           <a:prstGeom prst="rect">
             <a:avLst/>
@@ -13840,7 +13818,7 @@
           <a:p>
             <a:pPr algn="l" indent="0" marL="0">
               <a:lnSpc>
-                <a:spcPts val="3100"/>
+                <a:spcPts val="3300"/>
               </a:lnSpc>
               <a:spcBef>
                 <a:spcPts val="400"/>
@@ -13848,7 +13826,7 @@
               <a:buNone/>
             </a:pPr>
             <a:r>
-              <a:rPr lang="en-US" sz="2600" b="1" dirty="0">
+              <a:rPr lang="en-US" sz="2800" b="1" dirty="0">
                 <a:solidFill>
                   <a:srgbClr val="1F2328"/>
                 </a:solidFill>
@@ -13858,7 +13836,7 @@
               </a:rPr>
               <a:t>What to remember</a:t>
             </a:r>
-            <a:endParaRPr lang="en-US" sz="2600" dirty="0"/>
+            <a:endParaRPr lang="en-US" sz="2800" dirty="0"/>
           </a:p>
         </p:txBody>
       </p:sp>
@@ -13870,12 +13848,12 @@
         </p:nvSpPr>
         <p:spPr>
           <a:xfrm>
-            <a:off x="482501" y="1320701"/>
-            <a:ext cx="431750" cy="431750"/>
+            <a:off x="482501" y="1422350"/>
+            <a:ext cx="507950" cy="507950"/>
           </a:xfrm>
           <a:prstGeom prst="roundRect">
             <a:avLst>
-              <a:gd name="adj" fmla="val 17649"/>
+              <a:gd name="adj" fmla="val 15001"/>
             </a:avLst>
           </a:prstGeom>
           <a:solidFill>
@@ -13910,8 +13888,8 @@
         </p:blipFill>
         <p:spPr>
           <a:xfrm>
-            <a:off x="577751" y="1415951"/>
-            <a:ext cx="241250" cy="241250"/>
+            <a:off x="596801" y="1536650"/>
+            <a:ext cx="279350" cy="279350"/>
           </a:xfrm>
           <a:prstGeom prst="rect">
             <a:avLst/>
@@ -13926,8 +13904,8 @@
         </p:nvSpPr>
         <p:spPr>
           <a:xfrm>
-            <a:off x="1066651" y="1320701"/>
-            <a:ext cx="3355035" cy="431899"/>
+            <a:off x="1155502" y="1435001"/>
+            <a:ext cx="3290367" cy="482501"/>
           </a:xfrm>
           <a:prstGeom prst="rect">
             <a:avLst/>
@@ -13941,12 +13919,12 @@
           <a:p>
             <a:pPr algn="l" indent="0" marL="0">
               <a:lnSpc>
-                <a:spcPts val="1700"/>
+                <a:spcPts val="1900"/>
               </a:lnSpc>
               <a:buNone/>
             </a:pPr>
             <a:r>
-              <a:rPr lang="en-US" sz="1300" dirty="0">
+              <a:rPr lang="en-US" sz="1500" dirty="0">
                 <a:solidFill>
                   <a:srgbClr val="1F2328"/>
                 </a:solidFill>
@@ -13956,7 +13934,7 @@
               </a:rPr>
               <a:t>A clear plan turns into small, reviewable prompts.</a:t>
             </a:r>
-            <a:endParaRPr lang="en-US" sz="1300" dirty="0"/>
+            <a:endParaRPr lang="en-US" sz="1500" dirty="0"/>
           </a:p>
         </p:txBody>
       </p:sp>
@@ -13968,12 +13946,12 @@
         </p:nvSpPr>
         <p:spPr>
           <a:xfrm>
-            <a:off x="4736902" y="1320701"/>
-            <a:ext cx="431750" cy="431750"/>
+            <a:off x="4762351" y="1422350"/>
+            <a:ext cx="507950" cy="507950"/>
           </a:xfrm>
           <a:prstGeom prst="roundRect">
             <a:avLst>
-              <a:gd name="adj" fmla="val 17649"/>
+              <a:gd name="adj" fmla="val 15001"/>
             </a:avLst>
           </a:prstGeom>
           <a:solidFill>
@@ -14008,8 +13986,8 @@
         </p:blipFill>
         <p:spPr>
           <a:xfrm>
-            <a:off x="4832152" y="1415951"/>
-            <a:ext cx="241250" cy="241250"/>
+            <a:off x="4876651" y="1536650"/>
+            <a:ext cx="279350" cy="279350"/>
           </a:xfrm>
           <a:prstGeom prst="rect">
             <a:avLst/>
@@ -14024,8 +14002,8 @@
         </p:nvSpPr>
         <p:spPr>
           <a:xfrm>
-            <a:off x="5321052" y="1320701"/>
-            <a:ext cx="3355035" cy="431899"/>
+            <a:off x="5435352" y="1435001"/>
+            <a:ext cx="3290367" cy="482501"/>
           </a:xfrm>
           <a:prstGeom prst="rect">
             <a:avLst/>
@@ -14039,12 +14017,12 @@
           <a:p>
             <a:pPr algn="l" indent="0" marL="0">
               <a:lnSpc>
-                <a:spcPts val="1700"/>
+                <a:spcPts val="1900"/>
               </a:lnSpc>
               <a:buNone/>
             </a:pPr>
             <a:r>
-              <a:rPr lang="en-US" sz="1300" dirty="0">
+              <a:rPr lang="en-US" sz="1500" dirty="0">
                 <a:solidFill>
                   <a:srgbClr val="1F2328"/>
                 </a:solidFill>
@@ -14054,7 +14032,7 @@
               </a:rPr>
               <a:t>Plan before code. Rewind freely when you experiment.</a:t>
             </a:r>
-            <a:endParaRPr lang="en-US" sz="1300" dirty="0"/>
+            <a:endParaRPr lang="en-US" sz="1500" dirty="0"/>
           </a:p>
         </p:txBody>
       </p:sp>
@@ -14066,12 +14044,12 @@
         </p:nvSpPr>
         <p:spPr>
           <a:xfrm>
-            <a:off x="482501" y="2082701"/>
-            <a:ext cx="431750" cy="431750"/>
+            <a:off x="482501" y="2311301"/>
+            <a:ext cx="507950" cy="507950"/>
           </a:xfrm>
           <a:prstGeom prst="roundRect">
             <a:avLst>
-              <a:gd name="adj" fmla="val 17649"/>
+              <a:gd name="adj" fmla="val 15001"/>
             </a:avLst>
           </a:prstGeom>
           <a:solidFill>
@@ -14106,8 +14084,8 @@
         </p:blipFill>
         <p:spPr>
           <a:xfrm>
-            <a:off x="577751" y="2177951"/>
-            <a:ext cx="241250" cy="241250"/>
+            <a:off x="596801" y="2425601"/>
+            <a:ext cx="279350" cy="279350"/>
           </a:xfrm>
           <a:prstGeom prst="rect">
             <a:avLst/>
@@ -14122,8 +14100,8 @@
         </p:nvSpPr>
         <p:spPr>
           <a:xfrm>
-            <a:off x="1066651" y="2082701"/>
-            <a:ext cx="3355035" cy="431899"/>
+            <a:off x="1155502" y="2323951"/>
+            <a:ext cx="3290367" cy="482501"/>
           </a:xfrm>
           <a:prstGeom prst="rect">
             <a:avLst/>
@@ -14137,12 +14115,12 @@
           <a:p>
             <a:pPr algn="l" indent="0" marL="0">
               <a:lnSpc>
-                <a:spcPts val="1700"/>
+                <a:spcPts val="1900"/>
               </a:lnSpc>
               <a:buNone/>
             </a:pPr>
             <a:r>
-              <a:rPr lang="en-US" sz="1300" dirty="0">
+              <a:rPr lang="en-US" sz="1500" dirty="0">
                 <a:solidFill>
                   <a:srgbClr val="1F2328"/>
                 </a:solidFill>
@@ -14152,7 +14130,7 @@
               </a:rPr>
               <a:t>Tests and a verifier are the evidence, not the agent's confidence.</a:t>
             </a:r>
-            <a:endParaRPr lang="en-US" sz="1300" dirty="0"/>
+            <a:endParaRPr lang="en-US" sz="1500" dirty="0"/>
           </a:p>
         </p:txBody>
       </p:sp>
@@ -14164,12 +14142,12 @@
         </p:nvSpPr>
         <p:spPr>
           <a:xfrm>
-            <a:off x="4736902" y="2082701"/>
-            <a:ext cx="431750" cy="431750"/>
+            <a:off x="4762351" y="2311301"/>
+            <a:ext cx="507950" cy="507950"/>
           </a:xfrm>
           <a:prstGeom prst="roundRect">
             <a:avLst>
-              <a:gd name="adj" fmla="val 17649"/>
+              <a:gd name="adj" fmla="val 15001"/>
             </a:avLst>
           </a:prstGeom>
           <a:solidFill>
@@ -14204,8 +14182,8 @@
         </p:blipFill>
         <p:spPr>
           <a:xfrm>
-            <a:off x="4832152" y="2177951"/>
-            <a:ext cx="241250" cy="241250"/>
+            <a:off x="4876651" y="2425601"/>
+            <a:ext cx="279350" cy="279350"/>
           </a:xfrm>
           <a:prstGeom prst="rect">
             <a:avLst/>
@@ -14220,8 +14198,8 @@
         </p:nvSpPr>
         <p:spPr>
           <a:xfrm>
-            <a:off x="5321052" y="2082701"/>
-            <a:ext cx="3355035" cy="431899"/>
+            <a:off x="5435352" y="2323951"/>
+            <a:ext cx="3290367" cy="482501"/>
           </a:xfrm>
           <a:prstGeom prst="rect">
             <a:avLst/>
@@ -14235,12 +14213,12 @@
           <a:p>
             <a:pPr algn="l" indent="0" marL="0">
               <a:lnSpc>
-                <a:spcPts val="1700"/>
+                <a:spcPts val="1900"/>
               </a:lnSpc>
               <a:buNone/>
             </a:pPr>
             <a:r>
-              <a:rPr lang="en-US" sz="1300" dirty="0">
+              <a:rPr lang="en-US" sz="1500" dirty="0">
                 <a:solidFill>
                   <a:srgbClr val="1F2328"/>
                 </a:solidFill>
@@ -14250,7 +14228,7 @@
               </a:rPr>
               <a:t>Review before you deploy. Verify after. Clean up the same day.</a:t>
             </a:r>
-            <a:endParaRPr lang="en-US" sz="1300" dirty="0"/>
+            <a:endParaRPr lang="en-US" sz="1500" dirty="0"/>
           </a:p>
         </p:txBody>
       </p:sp>
@@ -14262,12 +14240,12 @@
         </p:nvSpPr>
         <p:spPr>
           <a:xfrm>
-            <a:off x="482501" y="3886200"/>
-            <a:ext cx="8178701" cy="711101"/>
+            <a:off x="482501" y="3810000"/>
+            <a:ext cx="8178701" cy="787301"/>
           </a:xfrm>
           <a:prstGeom prst="roundRect">
             <a:avLst>
-              <a:gd name="adj" fmla="val 14288"/>
+              <a:gd name="adj" fmla="val 12905"/>
             </a:avLst>
           </a:prstGeom>
           <a:solidFill>
@@ -14298,12 +14276,12 @@
         </p:nvSpPr>
         <p:spPr>
           <a:xfrm>
-            <a:off x="669727" y="4051250"/>
-            <a:ext cx="381000" cy="381000"/>
+            <a:off x="669727" y="3987701"/>
+            <a:ext cx="431750" cy="431750"/>
           </a:xfrm>
           <a:prstGeom prst="roundRect">
             <a:avLst>
-              <a:gd name="adj" fmla="val 20000"/>
+              <a:gd name="adj" fmla="val 17649"/>
             </a:avLst>
           </a:prstGeom>
           <a:solidFill>
@@ -14338,8 +14316,8 @@
         </p:blipFill>
         <p:spPr>
           <a:xfrm>
-            <a:off x="752326" y="4133850"/>
-            <a:ext cx="215801" cy="215801"/>
+            <a:off x="764977" y="4082951"/>
+            <a:ext cx="241250" cy="241250"/>
           </a:xfrm>
           <a:prstGeom prst="rect">
             <a:avLst/>
@@ -14354,8 +14332,8 @@
         </p:nvSpPr>
         <p:spPr>
           <a:xfrm>
-            <a:off x="1203127" y="4067175"/>
-            <a:ext cx="4750880" cy="133350"/>
+            <a:off x="1253877" y="4008388"/>
+            <a:ext cx="5321210" cy="142875"/>
           </a:xfrm>
           <a:prstGeom prst="rect">
             <a:avLst/>
@@ -14371,7 +14349,7 @@
               <a:buNone/>
             </a:pPr>
             <a:r>
-              <a:rPr lang="en-US" sz="900" b="1" dirty="0">
+              <a:rPr lang="en-US" sz="1000" b="1" dirty="0">
                 <a:solidFill>
                   <a:srgbClr val="0969DA"/>
                 </a:solidFill>
@@ -14381,7 +14359,7 @@
               </a:rPr>
               <a:t>NEXT JOURNEY</a:t>
             </a:r>
-            <a:endParaRPr lang="en-US" sz="900" dirty="0"/>
+            <a:endParaRPr lang="en-US" sz="1000" dirty="0"/>
           </a:p>
         </p:txBody>
       </p:sp>
@@ -14393,8 +14371,8 @@
         </p:nvSpPr>
         <p:spPr>
           <a:xfrm>
-            <a:off x="1203127" y="4225826"/>
-            <a:ext cx="4750880" cy="190500"/>
+            <a:off x="1253877" y="4189363"/>
+            <a:ext cx="5321210" cy="209550"/>
           </a:xfrm>
           <a:prstGeom prst="rect">
             <a:avLst/>
@@ -14410,7 +14388,7 @@
               <a:buNone/>
             </a:pPr>
             <a:r>
-              <a:rPr lang="en-US" sz="1250" b="1" dirty="0">
+              <a:rPr lang="en-US" sz="1400" b="1" dirty="0">
                 <a:solidFill>
                   <a:srgbClr val="1F2328"/>
                 </a:solidFill>
@@ -14424,7 +14402,7 @@
               <a:buNone/>
             </a:pPr>
             <a:r>
-              <a:rPr lang="en-US" sz="1250" dirty="0">
+              <a:rPr lang="en-US" sz="1400" dirty="0">
                 <a:solidFill>
                   <a:srgbClr val="1F2328"/>
                 </a:solidFill>
@@ -14438,7 +14416,7 @@
               <a:buNone/>
             </a:pPr>
             <a:r>
-              <a:rPr lang="en-US" sz="1250" dirty="0">
+              <a:rPr lang="en-US" sz="1400" dirty="0">
                 <a:solidFill>
                   <a:srgbClr val="59636E"/>
                 </a:solidFill>
@@ -14448,7 +14426,7 @@
               </a:rPr>
               <a:t>· Add an API, a React storefront, and AI search and chat</a:t>
             </a:r>
-            <a:endParaRPr lang="en-US" sz="1250" dirty="0"/>
+            <a:endParaRPr lang="en-US" sz="1400" dirty="0"/>
           </a:p>
         </p:txBody>
       </p:sp>
@@ -14492,12 +14470,12 @@
         </p:nvSpPr>
         <p:spPr>
           <a:xfrm>
-            <a:off x="7446466" y="152400"/>
-            <a:ext cx="1113383" cy="266700"/>
+            <a:off x="7325916" y="152400"/>
+            <a:ext cx="1233934" cy="279350"/>
           </a:xfrm>
           <a:prstGeom prst="roundRect">
             <a:avLst>
-              <a:gd name="adj" fmla="val 23810"/>
+              <a:gd name="adj" fmla="val 22731"/>
             </a:avLst>
           </a:prstGeom>
           <a:solidFill>
@@ -14524,8 +14502,8 @@
         </p:nvSpPr>
         <p:spPr>
           <a:xfrm>
-            <a:off x="7564822" y="219075"/>
-            <a:ext cx="876672" cy="133350"/>
+            <a:off x="7455969" y="220563"/>
+            <a:ext cx="973827" cy="142875"/>
           </a:xfrm>
           <a:prstGeom prst="rect">
             <a:avLst/>
@@ -14541,7 +14519,7 @@
               <a:buNone/>
             </a:pPr>
             <a:r>
-              <a:rPr lang="en-US" sz="900" b="1" dirty="0">
+              <a:rPr lang="en-US" sz="1000" b="1" dirty="0">
                 <a:solidFill>
                   <a:srgbClr val="FFFFFF"/>
                 </a:solidFill>
@@ -14551,7 +14529,7 @@
               </a:rPr>
               <a:t>WEATHERVIEW</a:t>
             </a:r>
-            <a:endParaRPr lang="en-US" sz="900" dirty="0"/>
+            <a:endParaRPr lang="en-US" sz="1000" dirty="0"/>
           </a:p>
         </p:txBody>
       </p:sp>
@@ -14588,7 +14566,7 @@
         <p:spPr>
           <a:xfrm>
             <a:off x="482501" y="330101"/>
-            <a:ext cx="7772400" cy="142875"/>
+            <a:ext cx="8342275" cy="152400"/>
           </a:xfrm>
           <a:prstGeom prst="rect">
             <a:avLst/>
@@ -14604,7 +14582,7 @@
               <a:buNone/>
             </a:pPr>
             <a:r>
-              <a:rPr lang="en-US" sz="1000" b="1" dirty="0">
+              <a:rPr lang="en-US" sz="1100" b="1" dirty="0">
                 <a:solidFill>
                   <a:srgbClr val="59636E"/>
                 </a:solidFill>
@@ -14614,7 +14592,7 @@
               </a:rPr>
               <a:t>THE JOURNEY</a:t>
             </a:r>
-            <a:endParaRPr lang="en-US" sz="1000" dirty="0"/>
+            <a:endParaRPr lang="en-US" sz="1100" dirty="0"/>
           </a:p>
         </p:txBody>
       </p:sp>
@@ -14626,8 +14604,8 @@
         </p:nvSpPr>
         <p:spPr>
           <a:xfrm>
-            <a:off x="482501" y="523726"/>
-            <a:ext cx="7772400" cy="393650"/>
+            <a:off x="482501" y="533251"/>
+            <a:ext cx="8342275" cy="419100"/>
           </a:xfrm>
           <a:prstGeom prst="rect">
             <a:avLst/>
@@ -14641,7 +14619,7 @@
           <a:p>
             <a:pPr algn="l" indent="0" marL="0">
               <a:lnSpc>
-                <a:spcPts val="3100"/>
+                <a:spcPts val="3300"/>
               </a:lnSpc>
               <a:spcBef>
                 <a:spcPts val="400"/>
@@ -14649,7 +14627,7 @@
               <a:buNone/>
             </a:pPr>
             <a:r>
-              <a:rPr lang="en-US" sz="2600" b="1" dirty="0">
+              <a:rPr lang="en-US" sz="2800" b="1" dirty="0">
                 <a:solidFill>
                   <a:srgbClr val="1F2328"/>
                 </a:solidFill>
@@ -14659,7 +14637,7 @@
               </a:rPr>
               <a:t>Five steps from plan to Azure</a:t>
             </a:r>
-            <a:endParaRPr lang="en-US" sz="2600" dirty="0"/>
+            <a:endParaRPr lang="en-US" sz="2800" dirty="0"/>
           </a:p>
         </p:txBody>
       </p:sp>
@@ -14679,7 +14657,7 @@
         </p:blipFill>
         <p:spPr>
           <a:xfrm>
-            <a:off x="486966" y="1219051"/>
+            <a:off x="486966" y="1244501"/>
             <a:ext cx="8169771" cy="3581400"/>
           </a:xfrm>
           <a:prstGeom prst="rect">
@@ -14727,12 +14705,12 @@
         </p:nvSpPr>
         <p:spPr>
           <a:xfrm>
-            <a:off x="7446466" y="152400"/>
-            <a:ext cx="1113383" cy="266700"/>
+            <a:off x="7325916" y="152400"/>
+            <a:ext cx="1233934" cy="279350"/>
           </a:xfrm>
           <a:prstGeom prst="roundRect">
             <a:avLst>
-              <a:gd name="adj" fmla="val 23810"/>
+              <a:gd name="adj" fmla="val 22731"/>
             </a:avLst>
           </a:prstGeom>
           <a:solidFill>
@@ -14759,8 +14737,8 @@
         </p:nvSpPr>
         <p:spPr>
           <a:xfrm>
-            <a:off x="7564822" y="219075"/>
-            <a:ext cx="876672" cy="133350"/>
+            <a:off x="7455969" y="220563"/>
+            <a:ext cx="973827" cy="142875"/>
           </a:xfrm>
           <a:prstGeom prst="rect">
             <a:avLst/>
@@ -14776,7 +14754,7 @@
               <a:buNone/>
             </a:pPr>
             <a:r>
-              <a:rPr lang="en-US" sz="900" b="1" dirty="0">
+              <a:rPr lang="en-US" sz="1000" b="1" dirty="0">
                 <a:solidFill>
                   <a:srgbClr val="FFFFFF"/>
                 </a:solidFill>
@@ -14786,7 +14764,7 @@
               </a:rPr>
               <a:t>WEATHERVIEW</a:t>
             </a:r>
-            <a:endParaRPr lang="en-US" sz="900" dirty="0"/>
+            <a:endParaRPr lang="en-US" sz="1000" dirty="0"/>
           </a:p>
         </p:txBody>
       </p:sp>
@@ -14823,7 +14801,7 @@
         <p:spPr>
           <a:xfrm>
             <a:off x="482501" y="330101"/>
-            <a:ext cx="7772400" cy="142875"/>
+            <a:ext cx="8342275" cy="152400"/>
           </a:xfrm>
           <a:prstGeom prst="rect">
             <a:avLst/>
@@ -14839,7 +14817,7 @@
               <a:buNone/>
             </a:pPr>
             <a:r>
-              <a:rPr lang="en-US" sz="1000" b="1" dirty="0">
+              <a:rPr lang="en-US" sz="1100" b="1" dirty="0">
                 <a:solidFill>
                   <a:srgbClr val="59636E"/>
                 </a:solidFill>
@@ -14849,7 +14827,7 @@
               </a:rPr>
               <a:t>THE AGENTIC LOOP</a:t>
             </a:r>
-            <a:endParaRPr lang="en-US" sz="1000" dirty="0"/>
+            <a:endParaRPr lang="en-US" sz="1100" dirty="0"/>
           </a:p>
         </p:txBody>
       </p:sp>
@@ -14861,8 +14839,8 @@
         </p:nvSpPr>
         <p:spPr>
           <a:xfrm>
-            <a:off x="482501" y="523726"/>
-            <a:ext cx="7772400" cy="393650"/>
+            <a:off x="482501" y="533251"/>
+            <a:ext cx="8342275" cy="419100"/>
           </a:xfrm>
           <a:prstGeom prst="rect">
             <a:avLst/>
@@ -14876,7 +14854,7 @@
           <a:p>
             <a:pPr algn="l" indent="0" marL="0">
               <a:lnSpc>
-                <a:spcPts val="3100"/>
+                <a:spcPts val="3300"/>
               </a:lnSpc>
               <a:spcBef>
                 <a:spcPts val="400"/>
@@ -14884,7 +14862,7 @@
               <a:buNone/>
             </a:pPr>
             <a:r>
-              <a:rPr lang="en-US" sz="2600" b="1" dirty="0">
+              <a:rPr lang="en-US" sz="2800" b="1" dirty="0">
                 <a:solidFill>
                   <a:srgbClr val="1F2328"/>
                 </a:solidFill>
@@ -14894,7 +14872,7 @@
               </a:rPr>
               <a:t>Generate. Inspect. Test. Refine.</a:t>
             </a:r>
-            <a:endParaRPr lang="en-US" sz="2600" dirty="0"/>
+            <a:endParaRPr lang="en-US" sz="2800" dirty="0"/>
           </a:p>
         </p:txBody>
       </p:sp>
@@ -14906,8 +14884,8 @@
         </p:nvSpPr>
         <p:spPr>
           <a:xfrm>
-            <a:off x="482501" y="980777"/>
-            <a:ext cx="7772400" cy="228600"/>
+            <a:off x="482501" y="1028551"/>
+            <a:ext cx="8342275" cy="254050"/>
           </a:xfrm>
           <a:prstGeom prst="rect">
             <a:avLst/>
@@ -14921,15 +14899,15 @@
           <a:p>
             <a:pPr algn="l" indent="0" marL="0">
               <a:lnSpc>
-                <a:spcPts val="1800"/>
+                <a:spcPts val="2000"/>
               </a:lnSpc>
               <a:spcBef>
-                <a:spcPts val="500"/>
+                <a:spcPts val="600"/>
               </a:spcBef>
               <a:buNone/>
             </a:pPr>
             <a:r>
-              <a:rPr lang="en-US" sz="1400" dirty="0">
+              <a:rPr lang="en-US" sz="1600" dirty="0">
                 <a:solidFill>
                   <a:srgbClr val="59636E"/>
                 </a:solidFill>
@@ -14939,7 +14917,7 @@
               </a:rPr>
               <a:t>You stay in the loop the whole way.</a:t>
             </a:r>
-            <a:endParaRPr lang="en-US" sz="1400" dirty="0"/>
+            <a:endParaRPr lang="en-US" sz="1600" dirty="0"/>
           </a:p>
         </p:txBody>
       </p:sp>
@@ -14959,7 +14937,7 @@
         </p:blipFill>
         <p:spPr>
           <a:xfrm>
-            <a:off x="2501801" y="1549301"/>
+            <a:off x="2501801" y="1587401"/>
             <a:ext cx="4140101" cy="3174950"/>
           </a:xfrm>
           <a:prstGeom prst="rect">
@@ -15007,12 +14985,12 @@
         </p:nvSpPr>
         <p:spPr>
           <a:xfrm>
-            <a:off x="7446466" y="152400"/>
-            <a:ext cx="1113383" cy="266700"/>
+            <a:off x="7325916" y="152400"/>
+            <a:ext cx="1233934" cy="279350"/>
           </a:xfrm>
           <a:prstGeom prst="roundRect">
             <a:avLst>
-              <a:gd name="adj" fmla="val 23810"/>
+              <a:gd name="adj" fmla="val 22731"/>
             </a:avLst>
           </a:prstGeom>
           <a:solidFill>
@@ -15039,8 +15017,8 @@
         </p:nvSpPr>
         <p:spPr>
           <a:xfrm>
-            <a:off x="7564822" y="219075"/>
-            <a:ext cx="876672" cy="133350"/>
+            <a:off x="7455969" y="220563"/>
+            <a:ext cx="973827" cy="142875"/>
           </a:xfrm>
           <a:prstGeom prst="rect">
             <a:avLst/>
@@ -15056,7 +15034,7 @@
               <a:buNone/>
             </a:pPr>
             <a:r>
-              <a:rPr lang="en-US" sz="900" b="1" dirty="0">
+              <a:rPr lang="en-US" sz="1000" b="1" dirty="0">
                 <a:solidFill>
                   <a:srgbClr val="FFFFFF"/>
                 </a:solidFill>
@@ -15066,7 +15044,7 @@
               </a:rPr>
               <a:t>WEATHERVIEW</a:t>
             </a:r>
-            <a:endParaRPr lang="en-US" sz="900" dirty="0"/>
+            <a:endParaRPr lang="en-US" sz="1000" dirty="0"/>
           </a:p>
         </p:txBody>
       </p:sp>
@@ -15175,7 +15153,7 @@
         <p:spPr>
           <a:xfrm>
             <a:off x="558701" y="1828651"/>
-            <a:ext cx="3886200" cy="142875"/>
+            <a:ext cx="3886200" cy="152400"/>
           </a:xfrm>
           <a:prstGeom prst="rect">
             <a:avLst/>
@@ -15194,7 +15172,7 @@
               <a:buNone/>
             </a:pPr>
             <a:r>
-              <a:rPr lang="en-US" sz="1000" b="1" dirty="0">
+              <a:rPr lang="en-US" sz="1100" b="1" dirty="0">
                 <a:solidFill>
                   <a:srgbClr val="59636E"/>
                 </a:solidFill>
@@ -15204,7 +15182,7 @@
               </a:rPr>
               <a:t>SECTION 1 OF 3</a:t>
             </a:r>
-            <a:endParaRPr lang="en-US" sz="1000" dirty="0"/>
+            <a:endParaRPr lang="en-US" sz="1100" dirty="0"/>
           </a:p>
         </p:txBody>
       </p:sp>
@@ -15216,8 +15194,8 @@
         </p:nvSpPr>
         <p:spPr>
           <a:xfrm>
-            <a:off x="558701" y="2034927"/>
-            <a:ext cx="3886200" cy="444550"/>
+            <a:off x="558701" y="2044452"/>
+            <a:ext cx="3886200" cy="469850"/>
           </a:xfrm>
           <a:prstGeom prst="rect">
             <a:avLst/>
@@ -15231,7 +15209,7 @@
           <a:p>
             <a:pPr algn="l" indent="0" marL="0">
               <a:lnSpc>
-                <a:spcPts val="3500"/>
+                <a:spcPts val="3700"/>
               </a:lnSpc>
               <a:spcBef>
                 <a:spcPts val="500"/>
@@ -15239,7 +15217,7 @@
               <a:buNone/>
             </a:pPr>
             <a:r>
-              <a:rPr lang="en-US" sz="3000" b="1" dirty="0">
+              <a:rPr lang="en-US" sz="3200" b="1" dirty="0">
                 <a:solidFill>
                   <a:srgbClr val="1F2328"/>
                 </a:solidFill>
@@ -15249,7 +15227,7 @@
               </a:rPr>
               <a:t>Plan and build</a:t>
             </a:r>
-            <a:endParaRPr lang="en-US" sz="3000" dirty="0"/>
+            <a:endParaRPr lang="en-US" sz="3200" dirty="0"/>
           </a:p>
         </p:txBody>
       </p:sp>
@@ -15261,8 +15239,8 @@
         </p:nvSpPr>
         <p:spPr>
           <a:xfrm>
-            <a:off x="558701" y="2606427"/>
-            <a:ext cx="3886200" cy="482501"/>
+            <a:off x="558701" y="2666702"/>
+            <a:ext cx="3886200" cy="800100"/>
           </a:xfrm>
           <a:prstGeom prst="rect">
             <a:avLst/>
@@ -15276,15 +15254,15 @@
           <a:p>
             <a:pPr algn="l" indent="0" marL="0">
               <a:lnSpc>
-                <a:spcPts val="1900"/>
+                <a:spcPts val="2100"/>
               </a:lnSpc>
               <a:spcBef>
-                <a:spcPts val="1000"/>
+                <a:spcPts val="1200"/>
               </a:spcBef>
               <a:buNone/>
             </a:pPr>
             <a:r>
-              <a:rPr lang="en-US" sz="1400" dirty="0">
+              <a:rPr lang="en-US" sz="1600" dirty="0">
                 <a:solidFill>
                   <a:srgbClr val="59636E"/>
                 </a:solidFill>
@@ -15294,7 +15272,7 @@
               </a:rPr>
               <a:t>Start from the plan. Ask for a plan before any code, then build in small, reviewable steps.</a:t>
             </a:r>
-            <a:endParaRPr lang="en-US" sz="1400" dirty="0"/>
+            <a:endParaRPr lang="en-US" sz="1600" dirty="0"/>
           </a:p>
         </p:txBody>
       </p:sp>
@@ -15363,11 +15341,11 @@
         <p:spPr>
           <a:xfrm>
             <a:off x="558701" y="4368701"/>
-            <a:ext cx="1270099" cy="336352"/>
+            <a:ext cx="1394520" cy="361652"/>
           </a:xfrm>
           <a:prstGeom prst="roundRect">
             <a:avLst>
-              <a:gd name="adj" fmla="val 52861"/>
+              <a:gd name="adj" fmla="val 52675"/>
             </a:avLst>
           </a:prstGeom>
           <a:solidFill>
@@ -15399,11 +15377,11 @@
         <p:spPr>
           <a:xfrm>
             <a:off x="644426" y="4441627"/>
-            <a:ext cx="190500" cy="190500"/>
+            <a:ext cx="215801" cy="215801"/>
           </a:xfrm>
           <a:prstGeom prst="roundRect">
             <a:avLst>
-              <a:gd name="adj" fmla="val 480000"/>
+              <a:gd name="adj" fmla="val 423724"/>
             </a:avLst>
           </a:prstGeom>
           <a:solidFill>
@@ -15430,8 +15408,8 @@
         </p:nvSpPr>
         <p:spPr>
           <a:xfrm>
-            <a:off x="710833" y="4479727"/>
-            <a:ext cx="57686" cy="114300"/>
+            <a:off x="719840" y="4482852"/>
+            <a:ext cx="64972" cy="133350"/>
           </a:xfrm>
           <a:prstGeom prst="rect">
             <a:avLst/>
@@ -15447,7 +15425,7 @@
               <a:buNone/>
             </a:pPr>
             <a:r>
-              <a:rPr lang="en-US" sz="800" b="1" dirty="0">
+              <a:rPr lang="en-US" sz="900" b="1" dirty="0">
                 <a:solidFill>
                   <a:srgbClr val="0969DA"/>
                 </a:solidFill>
@@ -15457,7 +15435,7 @@
               </a:rPr>
               <a:t>1</a:t>
             </a:r>
-            <a:endParaRPr lang="en-US" sz="800" dirty="0"/>
+            <a:endParaRPr lang="en-US" sz="900" dirty="0"/>
           </a:p>
         </p:txBody>
       </p:sp>
@@ -15469,8 +15447,8 @@
         </p:nvSpPr>
         <p:spPr>
           <a:xfrm>
-            <a:off x="911126" y="4470202"/>
-            <a:ext cx="796823" cy="133350"/>
+            <a:off x="936427" y="4478089"/>
+            <a:ext cx="885021" cy="142875"/>
           </a:xfrm>
           <a:prstGeom prst="rect">
             <a:avLst/>
@@ -15486,7 +15464,7 @@
               <a:buNone/>
             </a:pPr>
             <a:r>
-              <a:rPr lang="en-US" sz="900" b="1" dirty="0">
+              <a:rPr lang="en-US" sz="1000" b="1" dirty="0">
                 <a:solidFill>
                   <a:srgbClr val="FFFFFF"/>
                 </a:solidFill>
@@ -15496,7 +15474,7 @@
               </a:rPr>
               <a:t>Plan and build</a:t>
             </a:r>
-            <a:endParaRPr lang="en-US" sz="900" dirty="0"/>
+            <a:endParaRPr lang="en-US" sz="1000" dirty="0"/>
           </a:p>
         </p:txBody>
       </p:sp>
@@ -15508,12 +15486,12 @@
         </p:nvSpPr>
         <p:spPr>
           <a:xfrm>
-            <a:off x="1930301" y="4368701"/>
-            <a:ext cx="1287214" cy="336352"/>
+            <a:off x="2054721" y="4368701"/>
+            <a:ext cx="1413718" cy="361652"/>
           </a:xfrm>
           <a:prstGeom prst="roundRect">
             <a:avLst>
-              <a:gd name="adj" fmla="val 52861"/>
+              <a:gd name="adj" fmla="val 52675"/>
             </a:avLst>
           </a:prstGeom>
           <a:solidFill>
@@ -15544,12 +15522,12 @@
         </p:nvSpPr>
         <p:spPr>
           <a:xfrm>
-            <a:off x="2016026" y="4441627"/>
-            <a:ext cx="190500" cy="190500"/>
+            <a:off x="2140446" y="4441627"/>
+            <a:ext cx="215801" cy="215801"/>
           </a:xfrm>
           <a:prstGeom prst="roundRect">
             <a:avLst>
-              <a:gd name="adj" fmla="val 480000"/>
+              <a:gd name="adj" fmla="val 423724"/>
             </a:avLst>
           </a:prstGeom>
           <a:solidFill>
@@ -15576,8 +15554,8 @@
         </p:nvSpPr>
         <p:spPr>
           <a:xfrm>
-            <a:off x="2082433" y="4479727"/>
-            <a:ext cx="57686" cy="114300"/>
+            <a:off x="2215860" y="4482852"/>
+            <a:ext cx="64972" cy="133350"/>
           </a:xfrm>
           <a:prstGeom prst="rect">
             <a:avLst/>
@@ -15593,7 +15571,7 @@
               <a:buNone/>
             </a:pPr>
             <a:r>
-              <a:rPr lang="en-US" sz="800" b="1" dirty="0">
+              <a:rPr lang="en-US" sz="900" b="1" dirty="0">
                 <a:solidFill>
                   <a:srgbClr val="818B98"/>
                 </a:solidFill>
@@ -15603,7 +15581,7 @@
               </a:rPr>
               <a:t>2</a:t>
             </a:r>
-            <a:endParaRPr lang="en-US" sz="800" dirty="0"/>
+            <a:endParaRPr lang="en-US" sz="900" dirty="0"/>
           </a:p>
         </p:txBody>
       </p:sp>
@@ -15615,8 +15593,8 @@
         </p:nvSpPr>
         <p:spPr>
           <a:xfrm>
-            <a:off x="2282726" y="4470202"/>
-            <a:ext cx="814280" cy="133350"/>
+            <a:off x="2432447" y="4478089"/>
+            <a:ext cx="904604" cy="142875"/>
           </a:xfrm>
           <a:prstGeom prst="rect">
             <a:avLst/>
@@ -15632,7 +15610,7 @@
               <a:buNone/>
             </a:pPr>
             <a:r>
-              <a:rPr lang="en-US" sz="900" b="1" dirty="0">
+              <a:rPr lang="en-US" sz="1000" b="1" dirty="0">
                 <a:solidFill>
                   <a:srgbClr val="818B98"/>
                 </a:solidFill>
@@ -15642,7 +15620,7 @@
               </a:rPr>
               <a:t>Test and verify</a:t>
             </a:r>
-            <a:endParaRPr lang="en-US" sz="900" dirty="0"/>
+            <a:endParaRPr lang="en-US" sz="1000" dirty="0"/>
           </a:p>
         </p:txBody>
       </p:sp>
@@ -15654,12 +15632,12 @@
         </p:nvSpPr>
         <p:spPr>
           <a:xfrm>
-            <a:off x="3319016" y="4368701"/>
-            <a:ext cx="1354782" cy="336352"/>
+            <a:off x="3569940" y="4368701"/>
+            <a:ext cx="1488728" cy="361652"/>
           </a:xfrm>
           <a:prstGeom prst="roundRect">
             <a:avLst>
-              <a:gd name="adj" fmla="val 52861"/>
+              <a:gd name="adj" fmla="val 52675"/>
             </a:avLst>
           </a:prstGeom>
           <a:solidFill>
@@ -15690,12 +15668,12 @@
         </p:nvSpPr>
         <p:spPr>
           <a:xfrm>
-            <a:off x="3404741" y="4441627"/>
-            <a:ext cx="190500" cy="190500"/>
+            <a:off x="3655665" y="4441627"/>
+            <a:ext cx="215801" cy="215801"/>
           </a:xfrm>
           <a:prstGeom prst="roundRect">
             <a:avLst>
-              <a:gd name="adj" fmla="val 480000"/>
+              <a:gd name="adj" fmla="val 423724"/>
             </a:avLst>
           </a:prstGeom>
           <a:solidFill>
@@ -15722,8 +15700,8 @@
         </p:nvSpPr>
         <p:spPr>
           <a:xfrm>
-            <a:off x="3471148" y="4479727"/>
-            <a:ext cx="57686" cy="114300"/>
+            <a:off x="3731079" y="4482852"/>
+            <a:ext cx="64972" cy="133350"/>
           </a:xfrm>
           <a:prstGeom prst="rect">
             <a:avLst/>
@@ -15739,7 +15717,7 @@
               <a:buNone/>
             </a:pPr>
             <a:r>
-              <a:rPr lang="en-US" sz="800" b="1" dirty="0">
+              <a:rPr lang="en-US" sz="900" b="1" dirty="0">
                 <a:solidFill>
                   <a:srgbClr val="818B98"/>
                 </a:solidFill>
@@ -15749,7 +15727,7 @@
               </a:rPr>
               <a:t>3</a:t>
             </a:r>
-            <a:endParaRPr lang="en-US" sz="800" dirty="0"/>
+            <a:endParaRPr lang="en-US" sz="900" dirty="0"/>
           </a:p>
         </p:txBody>
       </p:sp>
@@ -15761,8 +15739,8 @@
         </p:nvSpPr>
         <p:spPr>
           <a:xfrm>
-            <a:off x="3671441" y="4470202"/>
-            <a:ext cx="883200" cy="133350"/>
+            <a:off x="3947666" y="4478089"/>
+            <a:ext cx="981114" cy="142875"/>
           </a:xfrm>
           <a:prstGeom prst="rect">
             <a:avLst/>
@@ -15778,7 +15756,7 @@
               <a:buNone/>
             </a:pPr>
             <a:r>
-              <a:rPr lang="en-US" sz="900" b="1" dirty="0">
+              <a:rPr lang="en-US" sz="1000" b="1" dirty="0">
                 <a:solidFill>
                   <a:srgbClr val="818B98"/>
                 </a:solidFill>
@@ -15788,7 +15766,7 @@
               </a:rPr>
               <a:t>Deploy to Azure</a:t>
             </a:r>
-            <a:endParaRPr lang="en-US" sz="900" dirty="0"/>
+            <a:endParaRPr lang="en-US" sz="1000" dirty="0"/>
           </a:p>
         </p:txBody>
       </p:sp>
@@ -15832,12 +15810,12 @@
         </p:nvSpPr>
         <p:spPr>
           <a:xfrm>
-            <a:off x="7446466" y="152400"/>
-            <a:ext cx="1113383" cy="266700"/>
+            <a:off x="7325916" y="152400"/>
+            <a:ext cx="1233934" cy="279350"/>
           </a:xfrm>
           <a:prstGeom prst="roundRect">
             <a:avLst>
-              <a:gd name="adj" fmla="val 23810"/>
+              <a:gd name="adj" fmla="val 22731"/>
             </a:avLst>
           </a:prstGeom>
           <a:solidFill>
@@ -15864,8 +15842,8 @@
         </p:nvSpPr>
         <p:spPr>
           <a:xfrm>
-            <a:off x="7564822" y="219075"/>
-            <a:ext cx="876672" cy="133350"/>
+            <a:off x="7455969" y="220563"/>
+            <a:ext cx="973827" cy="142875"/>
           </a:xfrm>
           <a:prstGeom prst="rect">
             <a:avLst/>
@@ -15881,7 +15859,7 @@
               <a:buNone/>
             </a:pPr>
             <a:r>
-              <a:rPr lang="en-US" sz="900" b="1" dirty="0">
+              <a:rPr lang="en-US" sz="1000" b="1" dirty="0">
                 <a:solidFill>
                   <a:srgbClr val="FFFFFF"/>
                 </a:solidFill>
@@ -15891,7 +15869,7 @@
               </a:rPr>
               <a:t>WEATHERVIEW</a:t>
             </a:r>
-            <a:endParaRPr lang="en-US" sz="900" dirty="0"/>
+            <a:endParaRPr lang="en-US" sz="1000" dirty="0"/>
           </a:p>
         </p:txBody>
       </p:sp>
@@ -15928,7 +15906,7 @@
         <p:spPr>
           <a:xfrm>
             <a:off x="482501" y="330101"/>
-            <a:ext cx="7772400" cy="142875"/>
+            <a:ext cx="8342275" cy="152400"/>
           </a:xfrm>
           <a:prstGeom prst="rect">
             <a:avLst/>
@@ -15944,7 +15922,7 @@
               <a:buNone/>
             </a:pPr>
             <a:r>
-              <a:rPr lang="en-US" sz="1000" b="1" dirty="0">
+              <a:rPr lang="en-US" sz="1100" b="1" dirty="0">
                 <a:solidFill>
                   <a:srgbClr val="0969DA"/>
                 </a:solidFill>
@@ -15954,7 +15932,7 @@
               </a:rPr>
               <a:t>GET STARTED</a:t>
             </a:r>
-            <a:endParaRPr lang="en-US" sz="1000" dirty="0"/>
+            <a:endParaRPr lang="en-US" sz="1100" dirty="0"/>
           </a:p>
         </p:txBody>
       </p:sp>
@@ -15966,8 +15944,8 @@
         </p:nvSpPr>
         <p:spPr>
           <a:xfrm>
-            <a:off x="482501" y="523726"/>
-            <a:ext cx="7772400" cy="393650"/>
+            <a:off x="482501" y="533251"/>
+            <a:ext cx="8342275" cy="419100"/>
           </a:xfrm>
           <a:prstGeom prst="rect">
             <a:avLst/>
@@ -15981,7 +15959,7 @@
           <a:p>
             <a:pPr algn="l" indent="0" marL="0">
               <a:lnSpc>
-                <a:spcPts val="3100"/>
+                <a:spcPts val="3300"/>
               </a:lnSpc>
               <a:spcBef>
                 <a:spcPts val="400"/>
@@ -15989,7 +15967,7 @@
               <a:buNone/>
             </a:pPr>
             <a:r>
-              <a:rPr lang="en-US" sz="2600" b="1" dirty="0">
+              <a:rPr lang="en-US" sz="2800" b="1" dirty="0">
                 <a:solidFill>
                   <a:srgbClr val="1F2328"/>
                 </a:solidFill>
@@ -15999,7 +15977,7 @@
               </a:rPr>
               <a:t>Work in your own copy</a:t>
             </a:r>
-            <a:endParaRPr lang="en-US" sz="2600" dirty="0"/>
+            <a:endParaRPr lang="en-US" sz="2800" dirty="0"/>
           </a:p>
         </p:txBody>
       </p:sp>
@@ -16011,7 +15989,7 @@
         </p:nvSpPr>
         <p:spPr>
           <a:xfrm>
-            <a:off x="888802" y="2071390"/>
+            <a:off x="888802" y="2058888"/>
             <a:ext cx="7365950" cy="1432173"/>
           </a:xfrm>
           <a:prstGeom prst="roundRect">
@@ -16050,7 +16028,7 @@
         </p:nvSpPr>
         <p:spPr>
           <a:xfrm>
-            <a:off x="888802" y="2071390"/>
+            <a:off x="888802" y="2058888"/>
             <a:ext cx="7365950" cy="253901"/>
           </a:xfrm>
           <a:prstGeom prst="roundRect">
@@ -16082,7 +16060,7 @@
         </p:nvSpPr>
         <p:spPr>
           <a:xfrm>
-            <a:off x="1015752" y="2153841"/>
+            <a:off x="1015752" y="2141339"/>
             <a:ext cx="88850" cy="88850"/>
           </a:xfrm>
           <a:prstGeom prst="roundRect">
@@ -16114,7 +16092,7 @@
         </p:nvSpPr>
         <p:spPr>
           <a:xfrm>
-            <a:off x="1168003" y="2153841"/>
+            <a:off x="1168003" y="2141339"/>
             <a:ext cx="88850" cy="88850"/>
           </a:xfrm>
           <a:prstGeom prst="roundRect">
@@ -16146,7 +16124,7 @@
         </p:nvSpPr>
         <p:spPr>
           <a:xfrm>
-            <a:off x="1320254" y="2153841"/>
+            <a:off x="1320254" y="2141339"/>
             <a:ext cx="88850" cy="88850"/>
           </a:xfrm>
           <a:prstGeom prst="roundRect">
@@ -16178,8 +16156,8 @@
         </p:nvSpPr>
         <p:spPr>
           <a:xfrm>
-            <a:off x="1574006" y="2141190"/>
-            <a:ext cx="528584" cy="114300"/>
+            <a:off x="1574006" y="2114401"/>
+            <a:ext cx="621792" cy="142875"/>
           </a:xfrm>
           <a:prstGeom prst="rect">
             <a:avLst/>
@@ -16195,7 +16173,7 @@
               <a:buNone/>
             </a:pPr>
             <a:r>
-              <a:rPr lang="en-US" sz="850" dirty="0">
+              <a:rPr lang="en-US" sz="1000" dirty="0">
                 <a:solidFill>
                   <a:srgbClr val="8B949E"/>
                 </a:solidFill>
@@ -16205,7 +16183,7 @@
               </a:rPr>
               <a:t>Terminal</a:t>
             </a:r>
-            <a:endParaRPr lang="en-US" sz="850" dirty="0"/>
+            <a:endParaRPr lang="en-US" sz="1000" dirty="0"/>
           </a:p>
         </p:txBody>
       </p:sp>
@@ -16217,7 +16195,7 @@
         </p:nvSpPr>
         <p:spPr>
           <a:xfrm>
-            <a:off x="1117402" y="2502991"/>
+            <a:off x="1117402" y="2490490"/>
             <a:ext cx="7046925" cy="265807"/>
           </a:xfrm>
           <a:prstGeom prst="rect">
@@ -16276,7 +16254,7 @@
         </p:nvSpPr>
         <p:spPr>
           <a:xfrm>
-            <a:off x="1117402" y="2768798"/>
+            <a:off x="1117402" y="2756297"/>
             <a:ext cx="7046925" cy="265807"/>
           </a:xfrm>
           <a:prstGeom prst="rect">
@@ -16335,7 +16313,7 @@
         </p:nvSpPr>
         <p:spPr>
           <a:xfrm>
-            <a:off x="1117402" y="3034605"/>
+            <a:off x="1117402" y="3022104"/>
             <a:ext cx="7046925" cy="265807"/>
           </a:xfrm>
           <a:prstGeom prst="rect">
@@ -16402,8 +16380,8 @@
         </p:blipFill>
         <p:spPr>
           <a:xfrm>
-            <a:off x="888802" y="3744813"/>
-            <a:ext cx="190500" cy="190500"/>
+            <a:off x="888802" y="3783062"/>
+            <a:ext cx="215801" cy="215801"/>
           </a:xfrm>
           <a:prstGeom prst="rect">
             <a:avLst/>
@@ -16418,8 +16396,8 @@
         </p:nvSpPr>
         <p:spPr>
           <a:xfrm>
-            <a:off x="1180802" y="3732163"/>
-            <a:ext cx="5439921" cy="215950"/>
+            <a:off x="1206103" y="3770412"/>
+            <a:ext cx="6092985" cy="241250"/>
           </a:xfrm>
           <a:prstGeom prst="rect">
             <a:avLst/>
@@ -16433,12 +16411,12 @@
           <a:p>
             <a:pPr algn="l" indent="0" marL="0">
               <a:lnSpc>
-                <a:spcPts val="1700"/>
+                <a:spcPts val="1900"/>
               </a:lnSpc>
               <a:buNone/>
             </a:pPr>
             <a:r>
-              <a:rPr lang="en-US" sz="1250" dirty="0">
+              <a:rPr lang="en-US" sz="1400" dirty="0">
                 <a:solidFill>
                   <a:srgbClr val="1F2328"/>
                 </a:solidFill>
@@ -16448,7 +16426,7 @@
               </a:rPr>
               <a:t>An isolated workspace keeps experiments away from the original repository.</a:t>
             </a:r>
-            <a:endParaRPr lang="en-US" sz="1250" dirty="0"/>
+            <a:endParaRPr lang="en-US" sz="1400" dirty="0"/>
           </a:p>
         </p:txBody>
       </p:sp>
@@ -16492,12 +16470,12 @@
         </p:nvSpPr>
         <p:spPr>
           <a:xfrm>
-            <a:off x="7446466" y="152400"/>
-            <a:ext cx="1113383" cy="266700"/>
+            <a:off x="7325916" y="152400"/>
+            <a:ext cx="1233934" cy="279350"/>
           </a:xfrm>
           <a:prstGeom prst="roundRect">
             <a:avLst>
-              <a:gd name="adj" fmla="val 23810"/>
+              <a:gd name="adj" fmla="val 22731"/>
             </a:avLst>
           </a:prstGeom>
           <a:solidFill>
@@ -16524,8 +16502,8 @@
         </p:nvSpPr>
         <p:spPr>
           <a:xfrm>
-            <a:off x="7564822" y="219075"/>
-            <a:ext cx="876672" cy="133350"/>
+            <a:off x="7455969" y="220563"/>
+            <a:ext cx="973827" cy="142875"/>
           </a:xfrm>
           <a:prstGeom prst="rect">
             <a:avLst/>
@@ -16541,7 +16519,7 @@
               <a:buNone/>
             </a:pPr>
             <a:r>
-              <a:rPr lang="en-US" sz="900" b="1" dirty="0">
+              <a:rPr lang="en-US" sz="1000" b="1" dirty="0">
                 <a:solidFill>
                   <a:srgbClr val="FFFFFF"/>
                 </a:solidFill>
@@ -16551,7 +16529,7 @@
               </a:rPr>
               <a:t>WEATHERVIEW</a:t>
             </a:r>
-            <a:endParaRPr lang="en-US" sz="900" dirty="0"/>
+            <a:endParaRPr lang="en-US" sz="1000" dirty="0"/>
           </a:p>
         </p:txBody>
       </p:sp>
@@ -16588,7 +16566,7 @@
         <p:spPr>
           <a:xfrm>
             <a:off x="482501" y="330101"/>
-            <a:ext cx="7772400" cy="142875"/>
+            <a:ext cx="8342275" cy="152400"/>
           </a:xfrm>
           <a:prstGeom prst="rect">
             <a:avLst/>
@@ -16604,7 +16582,7 @@
               <a:buNone/>
             </a:pPr>
             <a:r>
-              <a:rPr lang="en-US" sz="1000" b="1" dirty="0">
+              <a:rPr lang="en-US" sz="1100" b="1" dirty="0">
                 <a:solidFill>
                   <a:srgbClr val="0969DA"/>
                 </a:solidFill>
@@ -16614,7 +16592,7 @@
               </a:rPr>
               <a:t>THE STACK</a:t>
             </a:r>
-            <a:endParaRPr lang="en-US" sz="1000" dirty="0"/>
+            <a:endParaRPr lang="en-US" sz="1100" dirty="0"/>
           </a:p>
         </p:txBody>
       </p:sp>
@@ -16626,8 +16604,8 @@
         </p:nvSpPr>
         <p:spPr>
           <a:xfrm>
-            <a:off x="482501" y="523726"/>
-            <a:ext cx="7772400" cy="393650"/>
+            <a:off x="482501" y="533251"/>
+            <a:ext cx="8342275" cy="419100"/>
           </a:xfrm>
           <a:prstGeom prst="rect">
             <a:avLst/>
@@ -16641,7 +16619,7 @@
           <a:p>
             <a:pPr algn="l" indent="0" marL="0">
               <a:lnSpc>
-                <a:spcPts val="3100"/>
+                <a:spcPts val="3300"/>
               </a:lnSpc>
               <a:spcBef>
                 <a:spcPts val="400"/>
@@ -16649,7 +16627,7 @@
               <a:buNone/>
             </a:pPr>
             <a:r>
-              <a:rPr lang="en-US" sz="2600" b="1" dirty="0">
+              <a:rPr lang="en-US" sz="2800" b="1" dirty="0">
                 <a:solidFill>
                   <a:srgbClr val="1F2328"/>
                 </a:solidFill>
@@ -16659,7 +16637,7 @@
               </a:rPr>
               <a:t>No framework. No backend. No API key.</a:t>
             </a:r>
-            <a:endParaRPr lang="en-US" sz="2600" dirty="0"/>
+            <a:endParaRPr lang="en-US" sz="2800" dirty="0"/>
           </a:p>
         </p:txBody>
       </p:sp>
@@ -16679,7 +16657,7 @@
         </p:blipFill>
         <p:spPr>
           <a:xfrm>
-            <a:off x="482501" y="2113806"/>
+            <a:off x="482501" y="2139255"/>
             <a:ext cx="8178701" cy="1791891"/>
           </a:xfrm>
           <a:prstGeom prst="rect">
@@ -16727,12 +16705,12 @@
         </p:nvSpPr>
         <p:spPr>
           <a:xfrm>
-            <a:off x="7446466" y="152400"/>
-            <a:ext cx="1113383" cy="266700"/>
+            <a:off x="7325916" y="152400"/>
+            <a:ext cx="1233934" cy="279350"/>
           </a:xfrm>
           <a:prstGeom prst="roundRect">
             <a:avLst>
-              <a:gd name="adj" fmla="val 23810"/>
+              <a:gd name="adj" fmla="val 22731"/>
             </a:avLst>
           </a:prstGeom>
           <a:solidFill>
@@ -16759,8 +16737,8 @@
         </p:nvSpPr>
         <p:spPr>
           <a:xfrm>
-            <a:off x="7564822" y="219075"/>
-            <a:ext cx="876672" cy="133350"/>
+            <a:off x="7455969" y="220563"/>
+            <a:ext cx="973827" cy="142875"/>
           </a:xfrm>
           <a:prstGeom prst="rect">
             <a:avLst/>
@@ -16776,7 +16754,7 @@
               <a:buNone/>
             </a:pPr>
             <a:r>
-              <a:rPr lang="en-US" sz="900" b="1" dirty="0">
+              <a:rPr lang="en-US" sz="1000" b="1" dirty="0">
                 <a:solidFill>
                   <a:srgbClr val="FFFFFF"/>
                 </a:solidFill>
@@ -16786,7 +16764,7 @@
               </a:rPr>
               <a:t>WEATHERVIEW</a:t>
             </a:r>
-            <a:endParaRPr lang="en-US" sz="900" dirty="0"/>
+            <a:endParaRPr lang="en-US" sz="1000" dirty="0"/>
           </a:p>
         </p:txBody>
       </p:sp>
@@ -16823,7 +16801,7 @@
         <p:spPr>
           <a:xfrm>
             <a:off x="482501" y="330101"/>
-            <a:ext cx="7772400" cy="142875"/>
+            <a:ext cx="8342275" cy="152400"/>
           </a:xfrm>
           <a:prstGeom prst="rect">
             <a:avLst/>
@@ -16839,7 +16817,7 @@
               <a:buNone/>
             </a:pPr>
             <a:r>
-              <a:rPr lang="en-US" sz="1000" b="1" dirty="0">
+              <a:rPr lang="en-US" sz="1100" b="1" dirty="0">
                 <a:solidFill>
                   <a:srgbClr val="0969DA"/>
                 </a:solidFill>
@@ -16849,7 +16827,7 @@
               </a:rPr>
               <a:t>PLAN FIRST</a:t>
             </a:r>
-            <a:endParaRPr lang="en-US" sz="1000" dirty="0"/>
+            <a:endParaRPr lang="en-US" sz="1100" dirty="0"/>
           </a:p>
         </p:txBody>
       </p:sp>
@@ -16861,8 +16839,8 @@
         </p:nvSpPr>
         <p:spPr>
           <a:xfrm>
-            <a:off x="482501" y="523726"/>
-            <a:ext cx="7772400" cy="393650"/>
+            <a:off x="482501" y="533251"/>
+            <a:ext cx="8342275" cy="419100"/>
           </a:xfrm>
           <a:prstGeom prst="rect">
             <a:avLst/>
@@ -16876,7 +16854,7 @@
           <a:p>
             <a:pPr algn="l" indent="0" marL="0">
               <a:lnSpc>
-                <a:spcPts val="3100"/>
+                <a:spcPts val="3300"/>
               </a:lnSpc>
               <a:spcBef>
                 <a:spcPts val="400"/>
@@ -16884,7 +16862,7 @@
               <a:buNone/>
             </a:pPr>
             <a:r>
-              <a:rPr lang="en-US" sz="2600" b="1" dirty="0">
+              <a:rPr lang="en-US" sz="2800" b="1" dirty="0">
                 <a:solidFill>
                   <a:srgbClr val="1F2328"/>
                 </a:solidFill>
@@ -16894,7 +16872,7 @@
               </a:rPr>
               <a:t>Ask for a plan, not code</a:t>
             </a:r>
-            <a:endParaRPr lang="en-US" sz="2600" dirty="0"/>
+            <a:endParaRPr lang="en-US" sz="2800" dirty="0"/>
           </a:p>
         </p:txBody>
       </p:sp>
@@ -16906,12 +16884,12 @@
         </p:nvSpPr>
         <p:spPr>
           <a:xfrm>
-            <a:off x="634901" y="1853952"/>
-            <a:ext cx="7873901" cy="1956346"/>
+            <a:off x="634901" y="1767036"/>
+            <a:ext cx="7873901" cy="2104579"/>
           </a:xfrm>
           <a:prstGeom prst="roundRect">
             <a:avLst>
-              <a:gd name="adj" fmla="val 5193"/>
+              <a:gd name="adj" fmla="val 4828"/>
             </a:avLst>
           </a:prstGeom>
           <a:solidFill>
@@ -16945,7 +16923,7 @@
         </p:nvSpPr>
         <p:spPr>
           <a:xfrm>
-            <a:off x="634901" y="1858714"/>
+            <a:off x="634901" y="1771799"/>
             <a:ext cx="7873901" cy="0"/>
           </a:xfrm>
           <a:prstGeom prst="line">
@@ -16968,8 +16946,8 @@
         </p:nvSpPr>
         <p:spPr>
           <a:xfrm>
-            <a:off x="8504039" y="1853952"/>
-            <a:ext cx="0" cy="1956346"/>
+            <a:off x="8504039" y="1767036"/>
+            <a:ext cx="0" cy="2104579"/>
           </a:xfrm>
           <a:prstGeom prst="line">
             <a:avLst/>
@@ -16991,7 +16969,7 @@
         </p:nvSpPr>
         <p:spPr>
           <a:xfrm>
-            <a:off x="634901" y="3805535"/>
+            <a:off x="634901" y="3866852"/>
             <a:ext cx="7873901" cy="0"/>
           </a:xfrm>
           <a:prstGeom prst="line">
@@ -17014,8 +16992,8 @@
         </p:nvSpPr>
         <p:spPr>
           <a:xfrm>
-            <a:off x="663476" y="1853952"/>
-            <a:ext cx="0" cy="1956346"/>
+            <a:off x="663476" y="1767036"/>
+            <a:ext cx="0" cy="2104579"/>
           </a:xfrm>
           <a:prstGeom prst="line">
             <a:avLst/>
@@ -17045,8 +17023,8 @@
         </p:blipFill>
         <p:spPr>
           <a:xfrm>
-            <a:off x="945952" y="2066627"/>
-            <a:ext cx="165050" cy="165050"/>
+            <a:off x="971401" y="2005161"/>
+            <a:ext cx="190500" cy="190500"/>
           </a:xfrm>
           <a:prstGeom prst="rect">
             <a:avLst/>
@@ -17061,8 +17039,8 @@
         </p:nvSpPr>
         <p:spPr>
           <a:xfrm>
-            <a:off x="1187202" y="2082403"/>
-            <a:ext cx="498830" cy="133350"/>
+            <a:off x="1238101" y="2024211"/>
+            <a:ext cx="581867" cy="152400"/>
           </a:xfrm>
           <a:prstGeom prst="rect">
             <a:avLst/>
@@ -17078,7 +17056,7 @@
               <a:buNone/>
             </a:pPr>
             <a:r>
-              <a:rPr lang="en-US" sz="900" b="1" dirty="0">
+              <a:rPr lang="en-US" sz="1050" b="1" dirty="0">
                 <a:solidFill>
                   <a:srgbClr val="8250DF"/>
                 </a:solidFill>
@@ -17088,7 +17066,7 @@
               </a:rPr>
               <a:t>PROMPT</a:t>
             </a:r>
-            <a:endParaRPr lang="en-US" sz="900" dirty="0"/>
+            <a:endParaRPr lang="en-US" sz="1050" dirty="0"/>
           </a:p>
         </p:txBody>
       </p:sp>
@@ -17100,8 +17078,8 @@
         </p:nvSpPr>
         <p:spPr>
           <a:xfrm>
-            <a:off x="945952" y="2345829"/>
-            <a:ext cx="7445413" cy="1226344"/>
+            <a:off x="971401" y="2309813"/>
+            <a:ext cx="7393496" cy="1298377"/>
           </a:xfrm>
           <a:prstGeom prst="rect">
             <a:avLst/>
@@ -17115,12 +17093,12 @@
           <a:p>
             <a:pPr algn="l" indent="0" marL="0">
               <a:lnSpc>
-                <a:spcPts val="2414"/>
+                <a:spcPts val="2556"/>
               </a:lnSpc>
               <a:buNone/>
             </a:pPr>
             <a:r>
-              <a:rPr lang="en-US" sz="1700" b="1" dirty="0">
+              <a:rPr lang="en-US" sz="1800" b="1" dirty="0">
                 <a:solidFill>
                   <a:srgbClr val="1F2328"/>
                 </a:solidFill>
@@ -17132,12 +17110,12 @@
             </a:r>
             <a:pPr algn="l" indent="0" marL="0">
               <a:lnSpc>
-                <a:spcPts val="2414"/>
+                <a:spcPts val="2556"/>
               </a:lnSpc>
               <a:buNone/>
             </a:pPr>
             <a:r>
-              <a:rPr lang="en-US" sz="1700" dirty="0">
+              <a:rPr lang="en-US" sz="1800" dirty="0">
                 <a:solidFill>
                   <a:srgbClr val="1F2328"/>
                 </a:solidFill>
@@ -17149,12 +17127,12 @@
             </a:r>
             <a:pPr algn="l" indent="0" marL="0">
               <a:lnSpc>
-                <a:spcPts val="2414"/>
+                <a:spcPts val="2556"/>
               </a:lnSpc>
               <a:buNone/>
             </a:pPr>
             <a:r>
-              <a:rPr lang="en-US" sz="1700" b="1" dirty="0">
+              <a:rPr lang="en-US" sz="1800" b="1" dirty="0">
                 <a:solidFill>
                   <a:srgbClr val="1F2328"/>
                 </a:solidFill>
@@ -17164,7 +17142,7 @@
               </a:rPr>
               <a:t>Don't write any code yet.</a:t>
             </a:r>
-            <a:endParaRPr lang="en-US" sz="1700" dirty="0"/>
+            <a:endParaRPr lang="en-US" sz="1800" dirty="0"/>
           </a:p>
         </p:txBody>
       </p:sp>
@@ -17184,8 +17162,8 @@
         </p:blipFill>
         <p:spPr>
           <a:xfrm>
-            <a:off x="634901" y="4026098"/>
-            <a:ext cx="177701" cy="177701"/>
+            <a:off x="634901" y="4131915"/>
+            <a:ext cx="215801" cy="215801"/>
           </a:xfrm>
           <a:prstGeom prst="rect">
             <a:avLst/>
@@ -17200,8 +17178,8 @@
         </p:nvSpPr>
         <p:spPr>
           <a:xfrm>
-            <a:off x="914102" y="4013448"/>
-            <a:ext cx="5646375" cy="203150"/>
+            <a:off x="952202" y="4125516"/>
+            <a:ext cx="6585136" cy="228600"/>
           </a:xfrm>
           <a:prstGeom prst="rect">
             <a:avLst/>
@@ -17215,12 +17193,12 @@
           <a:p>
             <a:pPr algn="l" indent="0" marL="0">
               <a:lnSpc>
-                <a:spcPts val="1600"/>
+                <a:spcPts val="1800"/>
               </a:lnSpc>
               <a:buNone/>
             </a:pPr>
             <a:r>
-              <a:rPr lang="en-US" sz="1200" dirty="0">
+              <a:rPr lang="en-US" sz="1400" dirty="0">
                 <a:solidFill>
                   <a:srgbClr val="59636E"/>
                 </a:solidFill>
@@ -17232,12 +17210,12 @@
             </a:r>
             <a:pPr algn="l" indent="0" marL="0">
               <a:lnSpc>
-                <a:spcPts val="1600"/>
+                <a:spcPts val="1800"/>
               </a:lnSpc>
               <a:buNone/>
             </a:pPr>
             <a:r>
-              <a:rPr lang="en-US" sz="1200" b="1" dirty="0">
+              <a:rPr lang="en-US" sz="1400" b="1" dirty="0">
                 <a:solidFill>
                   <a:srgbClr val="59636E"/>
                 </a:solidFill>
@@ -17249,12 +17227,12 @@
             </a:r>
             <a:pPr algn="l" indent="0" marL="0">
               <a:lnSpc>
-                <a:spcPts val="1600"/>
+                <a:spcPts val="1800"/>
               </a:lnSpc>
               <a:buNone/>
             </a:pPr>
             <a:r>
-              <a:rPr lang="en-US" sz="1200" dirty="0">
+              <a:rPr lang="en-US" sz="1400" dirty="0">
                 <a:solidFill>
                   <a:srgbClr val="59636E"/>
                 </a:solidFill>
@@ -17264,7 +17242,7 @@
               </a:rPr>
               <a:t> (Shift+Tab). Review the file list before you approve anything.</a:t>
             </a:r>
-            <a:endParaRPr lang="en-US" sz="1200" dirty="0"/>
+            <a:endParaRPr lang="en-US" sz="1400" dirty="0"/>
           </a:p>
         </p:txBody>
       </p:sp>
@@ -17308,12 +17286,12 @@
         </p:nvSpPr>
         <p:spPr>
           <a:xfrm>
-            <a:off x="7446466" y="152400"/>
-            <a:ext cx="1113383" cy="266700"/>
+            <a:off x="7325916" y="152400"/>
+            <a:ext cx="1233934" cy="279350"/>
           </a:xfrm>
           <a:prstGeom prst="roundRect">
             <a:avLst>
-              <a:gd name="adj" fmla="val 23810"/>
+              <a:gd name="adj" fmla="val 22731"/>
             </a:avLst>
           </a:prstGeom>
           <a:solidFill>
@@ -17340,8 +17318,8 @@
         </p:nvSpPr>
         <p:spPr>
           <a:xfrm>
-            <a:off x="7564822" y="219075"/>
-            <a:ext cx="876672" cy="133350"/>
+            <a:off x="7455969" y="220563"/>
+            <a:ext cx="973827" cy="142875"/>
           </a:xfrm>
           <a:prstGeom prst="rect">
             <a:avLst/>
@@ -17357,7 +17335,7 @@
               <a:buNone/>
             </a:pPr>
             <a:r>
-              <a:rPr lang="en-US" sz="900" b="1" dirty="0">
+              <a:rPr lang="en-US" sz="1000" b="1" dirty="0">
                 <a:solidFill>
                   <a:srgbClr val="FFFFFF"/>
                 </a:solidFill>
@@ -17367,7 +17345,7 @@
               </a:rPr>
               <a:t>WEATHERVIEW</a:t>
             </a:r>
-            <a:endParaRPr lang="en-US" sz="900" dirty="0"/>
+            <a:endParaRPr lang="en-US" sz="1000" dirty="0"/>
           </a:p>
         </p:txBody>
       </p:sp>
@@ -17404,7 +17382,7 @@
         <p:spPr>
           <a:xfrm>
             <a:off x="482501" y="330101"/>
-            <a:ext cx="7772400" cy="142875"/>
+            <a:ext cx="8342275" cy="152400"/>
           </a:xfrm>
           <a:prstGeom prst="rect">
             <a:avLst/>
@@ -17420,7 +17398,7 @@
               <a:buNone/>
             </a:pPr>
             <a:r>
-              <a:rPr lang="en-US" sz="1000" b="1" dirty="0">
+              <a:rPr lang="en-US" sz="1100" b="1" dirty="0">
                 <a:solidFill>
                   <a:srgbClr val="0969DA"/>
                 </a:solidFill>
@@ -17430,7 +17408,7 @@
               </a:rPr>
               <a:t>BUILD THE SHELL</a:t>
             </a:r>
-            <a:endParaRPr lang="en-US" sz="1000" dirty="0"/>
+            <a:endParaRPr lang="en-US" sz="1100" dirty="0"/>
           </a:p>
         </p:txBody>
       </p:sp>
@@ -17442,8 +17420,8 @@
         </p:nvSpPr>
         <p:spPr>
           <a:xfrm>
-            <a:off x="482501" y="523726"/>
-            <a:ext cx="7772400" cy="393650"/>
+            <a:off x="482501" y="533251"/>
+            <a:ext cx="8342275" cy="419100"/>
           </a:xfrm>
           <a:prstGeom prst="rect">
             <a:avLst/>
@@ -17457,7 +17435,7 @@
           <a:p>
             <a:pPr algn="l" indent="0" marL="0">
               <a:lnSpc>
-                <a:spcPts val="3100"/>
+                <a:spcPts val="3300"/>
               </a:lnSpc>
               <a:spcBef>
                 <a:spcPts val="400"/>
@@ -17465,7 +17443,7 @@
               <a:buNone/>
             </a:pPr>
             <a:r>
-              <a:rPr lang="en-US" sz="2600" b="1" dirty="0">
+              <a:rPr lang="en-US" sz="2800" b="1" dirty="0">
                 <a:solidFill>
                   <a:srgbClr val="1F2328"/>
                 </a:solidFill>
@@ -17475,7 +17453,7 @@
               </a:rPr>
               <a:t>Build what you just planned</a:t>
             </a:r>
-            <a:endParaRPr lang="en-US" sz="2600" dirty="0"/>
+            <a:endParaRPr lang="en-US" sz="2800" dirty="0"/>
           </a:p>
         </p:txBody>
       </p:sp>
@@ -17487,12 +17465,12 @@
         </p:nvSpPr>
         <p:spPr>
           <a:xfrm>
-            <a:off x="634901" y="1722834"/>
-            <a:ext cx="7873901" cy="2624733"/>
+            <a:off x="634901" y="1489025"/>
+            <a:ext cx="7873901" cy="3143250"/>
           </a:xfrm>
           <a:prstGeom prst="roundRect">
             <a:avLst>
-              <a:gd name="adj" fmla="val 3871"/>
+              <a:gd name="adj" fmla="val 3232"/>
             </a:avLst>
           </a:prstGeom>
           <a:solidFill>
@@ -17526,7 +17504,7 @@
         </p:nvSpPr>
         <p:spPr>
           <a:xfrm>
-            <a:off x="634901" y="1727597"/>
+            <a:off x="634901" y="1493788"/>
             <a:ext cx="7873901" cy="0"/>
           </a:xfrm>
           <a:prstGeom prst="line">
@@ -17549,8 +17527,8 @@
         </p:nvSpPr>
         <p:spPr>
           <a:xfrm>
-            <a:off x="8504039" y="1722834"/>
-            <a:ext cx="0" cy="2624733"/>
+            <a:off x="8504039" y="1489025"/>
+            <a:ext cx="0" cy="3143250"/>
           </a:xfrm>
           <a:prstGeom prst="line">
             <a:avLst/>
@@ -17572,7 +17550,7 @@
         </p:nvSpPr>
         <p:spPr>
           <a:xfrm>
-            <a:off x="634901" y="4342805"/>
+            <a:off x="634901" y="4627513"/>
             <a:ext cx="7873901" cy="0"/>
           </a:xfrm>
           <a:prstGeom prst="line">
@@ -17595,8 +17573,8 @@
         </p:nvSpPr>
         <p:spPr>
           <a:xfrm>
-            <a:off x="663476" y="1722834"/>
-            <a:ext cx="0" cy="2624733"/>
+            <a:off x="663476" y="1489025"/>
+            <a:ext cx="0" cy="3143250"/>
           </a:xfrm>
           <a:prstGeom prst="line">
             <a:avLst/>
@@ -17626,8 +17604,8 @@
         </p:blipFill>
         <p:spPr>
           <a:xfrm>
-            <a:off x="945952" y="1935510"/>
-            <a:ext cx="165050" cy="165050"/>
+            <a:off x="971401" y="1727150"/>
+            <a:ext cx="190500" cy="190500"/>
           </a:xfrm>
           <a:prstGeom prst="rect">
             <a:avLst/>
@@ -17642,8 +17620,8 @@
         </p:nvSpPr>
         <p:spPr>
           <a:xfrm>
-            <a:off x="1187202" y="1951286"/>
-            <a:ext cx="1220054" cy="133350"/>
+            <a:off x="1238101" y="1746200"/>
+            <a:ext cx="1423169" cy="152400"/>
           </a:xfrm>
           <a:prstGeom prst="rect">
             <a:avLst/>
@@ -17659,7 +17637,7 @@
               <a:buNone/>
             </a:pPr>
             <a:r>
-              <a:rPr lang="en-US" sz="900" dirty="0">
+              <a:rPr lang="en-US" sz="1050" dirty="0">
                 <a:solidFill>
                   <a:srgbClr val="8250DF"/>
                 </a:solidFill>
@@ -17673,7 +17651,7 @@
               <a:buNone/>
             </a:pPr>
             <a:r>
-              <a:rPr lang="en-US" sz="900" b="1" dirty="0">
+              <a:rPr lang="en-US" sz="1050" b="1" dirty="0">
                 <a:solidFill>
                   <a:srgbClr val="818B98"/>
                 </a:solidFill>
@@ -17683,7 +17661,7 @@
               </a:rPr>
               <a:t> · ABRIDGED</a:t>
             </a:r>
-            <a:endParaRPr lang="en-US" sz="900" dirty="0"/>
+            <a:endParaRPr lang="en-US" sz="1050" dirty="0"/>
           </a:p>
         </p:txBody>
       </p:sp>
@@ -17695,8 +17673,8 @@
         </p:nvSpPr>
         <p:spPr>
           <a:xfrm>
-            <a:off x="945952" y="2202061"/>
-            <a:ext cx="7445413" cy="730448"/>
+            <a:off x="971401" y="2031802"/>
+            <a:ext cx="7393496" cy="577155"/>
           </a:xfrm>
           <a:prstGeom prst="rect">
             <a:avLst/>
@@ -17710,12 +17688,12 @@
           <a:p>
             <a:pPr algn="l" indent="0" marL="0">
               <a:lnSpc>
-                <a:spcPts val="1917"/>
+                <a:spcPts val="2272"/>
               </a:lnSpc>
               <a:buNone/>
             </a:pPr>
             <a:r>
-              <a:rPr lang="en-US" sz="1350" dirty="0">
+              <a:rPr lang="en-US" sz="1600" dirty="0">
                 <a:solidFill>
                   <a:srgbClr val="1F2328"/>
                 </a:solidFill>
@@ -17723,9 +17701,9 @@
                 <a:ea typeface="Arial" pitchFamily="34" charset="-122"/>
                 <a:cs typeface="Arial" pitchFamily="34" charset="-120"/>
               </a:rPr>
-              <a:t>Build the app shell you just planned: create index.html, styles.css, package.json, app.js, weather-api.js, and weather-maps.js as PLAN.md specifies. For this step, build the semantic app shell and responsive visual system only:</a:t>
-            </a:r>
-            <a:endParaRPr lang="en-US" sz="1350" dirty="0"/>
+              <a:t>Build the app shell you just planned … For this step, build the semantic app shell and responsive visual system only:</a:t>
+            </a:r>
+            <a:endParaRPr lang="en-US" sz="1600" dirty="0"/>
           </a:p>
         </p:txBody>
       </p:sp>
@@ -17737,7 +17715,7 @@
         </p:nvSpPr>
         <p:spPr>
           <a:xfrm>
-            <a:off x="996702" y="3077468"/>
+            <a:off x="1022152" y="2783979"/>
             <a:ext cx="50750" cy="50750"/>
           </a:xfrm>
           <a:prstGeom prst="roundRect">
@@ -17769,8 +17747,8 @@
         </p:nvSpPr>
         <p:spPr>
           <a:xfrm>
-            <a:off x="1148953" y="2983260"/>
-            <a:ext cx="4135160" cy="243483"/>
+            <a:off x="1174403" y="2672358"/>
+            <a:ext cx="1716456" cy="288578"/>
           </a:xfrm>
           <a:prstGeom prst="rect">
             <a:avLst/>
@@ -17784,12 +17762,12 @@
           <a:p>
             <a:pPr algn="l" indent="0" marL="0">
               <a:lnSpc>
-                <a:spcPts val="1917"/>
+                <a:spcPts val="2272"/>
               </a:lnSpc>
               <a:buNone/>
             </a:pPr>
             <a:r>
-              <a:rPr lang="en-US" sz="1350" dirty="0">
+              <a:rPr lang="en-US" sz="1600" dirty="0">
                 <a:solidFill>
                   <a:srgbClr val="1F2328"/>
                 </a:solidFill>
@@ -17797,9 +17775,9 @@
                 <a:ea typeface="Arial" pitchFamily="34" charset="-122"/>
                 <a:cs typeface="Arial" pitchFamily="34" charset="-120"/>
               </a:rPr>
-              <a:t>header, labeled city search, °C/°F and theme controls</a:t>
-            </a:r>
-            <a:endParaRPr lang="en-US" sz="1350" dirty="0"/>
+              <a:t>labeled city search</a:t>
+            </a:r>
+            <a:endParaRPr lang="en-US" sz="1600" dirty="0"/>
           </a:p>
         </p:txBody>
       </p:sp>
@@ -17811,7 +17789,7 @@
         </p:nvSpPr>
         <p:spPr>
           <a:xfrm>
-            <a:off x="996702" y="3371701"/>
+            <a:off x="1022152" y="3135957"/>
             <a:ext cx="50750" cy="50750"/>
           </a:xfrm>
           <a:prstGeom prst="roundRect">
@@ -17843,8 +17821,8 @@
         </p:nvSpPr>
         <p:spPr>
           <a:xfrm>
-            <a:off x="1148953" y="3277493"/>
-            <a:ext cx="4393683" cy="243483"/>
+            <a:off x="1174403" y="3024336"/>
+            <a:ext cx="2407471" cy="288578"/>
           </a:xfrm>
           <a:prstGeom prst="rect">
             <a:avLst/>
@@ -17858,12 +17836,12 @@
           <a:p>
             <a:pPr algn="l" indent="0" marL="0">
               <a:lnSpc>
-                <a:spcPts val="1917"/>
+                <a:spcPts val="2272"/>
               </a:lnSpc>
               <a:buNone/>
             </a:pPr>
             <a:r>
-              <a:rPr lang="en-US" sz="1350" dirty="0">
+              <a:rPr lang="en-US" sz="1600" dirty="0">
                 <a:solidFill>
                   <a:srgbClr val="1F2328"/>
                 </a:solidFill>
@@ -17871,9 +17849,9 @@
                 <a:ea typeface="Arial" pitchFamily="34" charset="-122"/>
                 <a:cs typeface="Arial" pitchFamily="34" charset="-120"/>
               </a:rPr>
-              <a:t>aria-live status region and five realistic placeholder cards</a:t>
-            </a:r>
-            <a:endParaRPr lang="en-US" sz="1350" dirty="0"/>
+              <a:t>Celsius/Fahrenheit control</a:t>
+            </a:r>
+            <a:endParaRPr lang="en-US" sz="1600" dirty="0"/>
           </a:p>
         </p:txBody>
       </p:sp>
@@ -17885,7 +17863,7 @@
         </p:nvSpPr>
         <p:spPr>
           <a:xfrm>
-            <a:off x="996702" y="3665934"/>
+            <a:off x="1022152" y="3487936"/>
             <a:ext cx="50750" cy="50750"/>
           </a:xfrm>
           <a:prstGeom prst="roundRect">
@@ -17917,8 +17895,8 @@
         </p:nvSpPr>
         <p:spPr>
           <a:xfrm>
-            <a:off x="1148953" y="3571726"/>
-            <a:ext cx="4491142" cy="243483"/>
+            <a:off x="1174403" y="3376315"/>
+            <a:ext cx="2154109" cy="288578"/>
           </a:xfrm>
           <a:prstGeom prst="rect">
             <a:avLst/>
@@ -17932,12 +17910,12 @@
           <a:p>
             <a:pPr algn="l" indent="0" marL="0">
               <a:lnSpc>
-                <a:spcPts val="1917"/>
+                <a:spcPts val="2272"/>
               </a:lnSpc>
               <a:buNone/>
             </a:pPr>
             <a:r>
-              <a:rPr lang="en-US" sz="1350" dirty="0">
+              <a:rPr lang="en-US" sz="1600" dirty="0">
                 <a:solidFill>
                   <a:srgbClr val="1F2328"/>
                 </a:solidFill>
@@ -17945,9 +17923,9 @@
                 <a:ea typeface="Arial" pitchFamily="34" charset="-122"/>
                 <a:cs typeface="Arial" pitchFamily="34" charset="-120"/>
               </a:rPr>
-              <a:t>design tokens, visible focus, reduced motion, both themes</a:t>
-            </a:r>
-            <a:endParaRPr lang="en-US" sz="1350" dirty="0"/>
+              <a:t>light/dark theme control</a:t>
+            </a:r>
+            <a:endParaRPr lang="en-US" sz="1600" dirty="0"/>
           </a:p>
         </p:txBody>
       </p:sp>
@@ -17959,8 +17937,40 @@
         </p:nvSpPr>
         <p:spPr>
           <a:xfrm>
-            <a:off x="945952" y="3865959"/>
-            <a:ext cx="7445413" cy="243483"/>
+            <a:off x="1022152" y="3839914"/>
+            <a:ext cx="50750" cy="50750"/>
+          </a:xfrm>
+          <a:prstGeom prst="roundRect">
+            <a:avLst>
+              <a:gd name="adj" fmla="val 1801773"/>
+            </a:avLst>
+          </a:prstGeom>
+          <a:solidFill>
+            <a:srgbClr val="8250DF"/>
+          </a:solidFill>
+          <a:ln/>
+        </p:spPr>
+        <p:txBody>
+          <a:bodyPr wrap="square" rtlCol="0" anchor="ctr"/>
+          <a:lstStyle/>
+          <a:p>
+            <a:pPr indent="0" marL="0">
+              <a:buNone/>
+            </a:pPr>
+            <a:endParaRPr lang="en-US" dirty="0"/>
+          </a:p>
+        </p:txBody>
+      </p:sp>
+      <p:sp>
+        <p:nvSpPr>
+          <p:cNvPr id="22" name="Text 18"/>
+          <p:cNvSpPr/>
+          <p:nvPr/>
+        </p:nvSpPr>
+        <p:spPr>
+          <a:xfrm>
+            <a:off x="1174403" y="3728293"/>
+            <a:ext cx="5321362" cy="288578"/>
           </a:xfrm>
           <a:prstGeom prst="rect">
             <a:avLst/>
@@ -17974,12 +17984,12 @@
           <a:p>
             <a:pPr algn="l" indent="0" marL="0">
               <a:lnSpc>
-                <a:spcPts val="1917"/>
+                <a:spcPts val="2272"/>
               </a:lnSpc>
               <a:buNone/>
             </a:pPr>
             <a:r>
-              <a:rPr lang="en-US" sz="1350" b="1" dirty="0">
+              <a:rPr lang="en-US" sz="1600" dirty="0">
                 <a:solidFill>
                   <a:srgbClr val="1F2328"/>
                 </a:solidFill>
@@ -17987,16 +17997,41 @@
                 <a:ea typeface="Arial" pitchFamily="34" charset="-122"/>
                 <a:cs typeface="Arial" pitchFamily="34" charset="-120"/>
               </a:rPr>
-              <a:t>Do not call external APIs yet.</a:t>
-            </a:r>
+              <a:t>forecast-grid container with five realistic placeholder cards</a:t>
+            </a:r>
+            <a:endParaRPr lang="en-US" sz="1600" dirty="0"/>
+          </a:p>
+        </p:txBody>
+      </p:sp>
+      <p:sp>
+        <p:nvSpPr>
+          <p:cNvPr id="23" name="Text 19"/>
+          <p:cNvSpPr/>
+          <p:nvPr/>
+        </p:nvSpPr>
+        <p:spPr>
+          <a:xfrm>
+            <a:off x="971401" y="4080272"/>
+            <a:ext cx="7393496" cy="288578"/>
+          </a:xfrm>
+          <a:prstGeom prst="rect">
+            <a:avLst/>
+          </a:prstGeom>
+          <a:noFill/>
+          <a:ln/>
+        </p:spPr>
+        <p:txBody>
+          <a:bodyPr wrap="square" lIns="0" tIns="0" rIns="0" bIns="0" rtlCol="0" anchor="t"/>
+          <a:lstStyle/>
+          <a:p>
             <a:pPr algn="l" indent="0" marL="0">
               <a:lnSpc>
-                <a:spcPts val="1917"/>
+                <a:spcPts val="2272"/>
               </a:lnSpc>
               <a:buNone/>
             </a:pPr>
             <a:r>
-              <a:rPr lang="en-US" sz="1350" dirty="0">
+              <a:rPr lang="en-US" sz="1600" b="1" dirty="0">
                 <a:solidFill>
                   <a:srgbClr val="1F2328"/>
                 </a:solidFill>
@@ -18004,9 +18039,9 @@
                 <a:ea typeface="Arial" pitchFamily="34" charset="-122"/>
                 <a:cs typeface="Arial" pitchFamily="34" charset="-120"/>
               </a:rPr>
-              <a:t> … Log issues to issues.md.</a:t>
-            </a:r>
-            <a:endParaRPr lang="en-US" sz="1350" dirty="0"/>
+              <a:t>Do not call external APIs yet.</a:t>
+            </a:r>
+            <a:endParaRPr lang="en-US" sz="1600" dirty="0"/>
           </a:p>
         </p:txBody>
       </p:sp>
